--- a/sjoskolan/vecka-40/aktuell/v40_03_Effekt_i_vaxelstromskretsar_elev.pptx
+++ b/sjoskolan/vecka-40/aktuell/v40_03_Effekt_i_vaxelstromskretsar_elev.pptx
@@ -4254,7 +4254,7 @@
         <p:spPr>
           <a:xfrm xmlns:a="http://schemas.openxmlformats.org/drawingml/2006/main">
             <a:off x="762000" y="2533650"/>
-            <a:ext cx="7620000" cy="2286000"/>
+            <a:ext cx="3886200" cy="2606040"/>
           </a:xfrm>
           <a:prstGeom xmlns:a="http://schemas.openxmlformats.org/drawingml/2006/main" prst="rect">
             <a:avLst/>
@@ -4411,6 +4411,30 @@
           </a:p>
         </p:txBody>
       </p:sp>
+      <p:pic xmlns:a="http://schemas.openxmlformats.org/drawingml/2006/main" xmlns:r="http://schemas.openxmlformats.org/officeDocument/2006/relationships">
+        <p:nvPicPr>
+          <p:cNvPr id="9" name="Figur: Enfaslast på 230 V där amperemetern visa" descr="Enfaslast på 230 V där amperemetern visar 4,0 A"/>
+          <p:cNvPicPr>
+            <a:picLocks noChangeAspect="1"/>
+          </p:cNvPicPr>
+          <p:nvPr/>
+        </p:nvPicPr>
+        <p:blipFill>
+          <a:blip r:embed="rId3"/>
+          <a:stretch>
+            <a:fillRect/>
+          </a:stretch>
+        </p:blipFill>
+        <p:spPr>
+          <a:xfrm>
+            <a:off x="4846320" y="2331720"/>
+            <a:ext cx="3931920" cy="2740984"/>
+          </a:xfrm>
+          <a:prstGeom prst="rect">
+            <a:avLst/>
+          </a:prstGeom>
+        </p:spPr>
+      </p:pic>
     </p:spTree>
     <p:extLst>
       <p:ext uri="{BB962C8B-B14F-4D97-AF65-F5344CB8AC3E}">
@@ -4978,7 +5002,7 @@
         <p:spPr>
           <a:xfrm xmlns:a="http://schemas.openxmlformats.org/drawingml/2006/main">
             <a:off x="762000" y="2533650"/>
-            <a:ext cx="7620000" cy="2286000"/>
+            <a:ext cx="3886200" cy="2606040"/>
           </a:xfrm>
           <a:prstGeom xmlns:a="http://schemas.openxmlformats.org/drawingml/2006/main" prst="rect">
             <a:avLst/>
@@ -5135,6 +5159,30 @@
           </a:p>
         </p:txBody>
       </p:sp>
+      <p:pic xmlns:a="http://schemas.openxmlformats.org/drawingml/2006/main" xmlns:r="http://schemas.openxmlformats.org/officeDocument/2006/relationships">
+        <p:nvPicPr>
+          <p:cNvPr id="9" name="Figur: Effekttriangel med S = 920 VA och cos fi" descr="Effekttriangel med S = 920 VA och cos fi 0,75"/>
+          <p:cNvPicPr>
+            <a:picLocks noChangeAspect="1"/>
+          </p:cNvPicPr>
+          <p:nvPr/>
+        </p:nvPicPr>
+        <p:blipFill>
+          <a:blip r:embed="rId3"/>
+          <a:stretch>
+            <a:fillRect/>
+          </a:stretch>
+        </p:blipFill>
+        <p:spPr>
+          <a:xfrm>
+            <a:off x="4846320" y="2331720"/>
+            <a:ext cx="3931920" cy="2740984"/>
+          </a:xfrm>
+          <a:prstGeom prst="rect">
+            <a:avLst/>
+          </a:prstGeom>
+        </p:spPr>
+      </p:pic>
     </p:spTree>
     <p:extLst>
       <p:ext uri="{BB962C8B-B14F-4D97-AF65-F5344CB8AC3E}">
@@ -5702,7 +5750,7 @@
         <p:spPr>
           <a:xfrm xmlns:a="http://schemas.openxmlformats.org/drawingml/2006/main">
             <a:off x="762000" y="2533650"/>
-            <a:ext cx="7620000" cy="2286000"/>
+            <a:ext cx="3886200" cy="2606040"/>
           </a:xfrm>
           <a:prstGeom xmlns:a="http://schemas.openxmlformats.org/drawingml/2006/main" prst="rect">
             <a:avLst/>
@@ -5859,6 +5907,30 @@
           </a:p>
         </p:txBody>
       </p:sp>
+      <p:pic xmlns:a="http://schemas.openxmlformats.org/drawingml/2006/main" xmlns:r="http://schemas.openxmlformats.org/officeDocument/2006/relationships">
+        <p:nvPicPr>
+          <p:cNvPr id="9" name="Figur: Effekttriangel med P = 600 W och Q = 800" descr="Effekttriangel med P = 600 W och Q = 800 var"/>
+          <p:cNvPicPr>
+            <a:picLocks noChangeAspect="1"/>
+          </p:cNvPicPr>
+          <p:nvPr/>
+        </p:nvPicPr>
+        <p:blipFill>
+          <a:blip r:embed="rId3"/>
+          <a:stretch>
+            <a:fillRect/>
+          </a:stretch>
+        </p:blipFill>
+        <p:spPr>
+          <a:xfrm>
+            <a:off x="4846320" y="2331720"/>
+            <a:ext cx="3931920" cy="2740984"/>
+          </a:xfrm>
+          <a:prstGeom prst="rect">
+            <a:avLst/>
+          </a:prstGeom>
+        </p:spPr>
+      </p:pic>
     </p:spTree>
     <p:extLst>
       <p:ext uri="{BB962C8B-B14F-4D97-AF65-F5344CB8AC3E}">
@@ -6449,7 +6521,7 @@
         <p:spPr>
           <a:xfrm xmlns:a="http://schemas.openxmlformats.org/drawingml/2006/main">
             <a:off x="762000" y="2533650"/>
-            <a:ext cx="7620000" cy="2286000"/>
+            <a:ext cx="3886200" cy="2606040"/>
           </a:xfrm>
           <a:prstGeom xmlns:a="http://schemas.openxmlformats.org/drawingml/2006/main" prst="rect">
             <a:avLst/>
@@ -6606,6 +6678,30 @@
           </a:p>
         </p:txBody>
       </p:sp>
+      <p:pic xmlns:a="http://schemas.openxmlformats.org/drawingml/2006/main" xmlns:r="http://schemas.openxmlformats.org/officeDocument/2006/relationships">
+        <p:nvPicPr>
+          <p:cNvPr id="9" name="Figur: Effekttriangel med S = 2,0 kVA och cos f" descr="Effekttriangel med S = 2,0 kVA och cos fi 0,80"/>
+          <p:cNvPicPr>
+            <a:picLocks noChangeAspect="1"/>
+          </p:cNvPicPr>
+          <p:nvPr/>
+        </p:nvPicPr>
+        <p:blipFill>
+          <a:blip r:embed="rId3"/>
+          <a:stretch>
+            <a:fillRect/>
+          </a:stretch>
+        </p:blipFill>
+        <p:spPr>
+          <a:xfrm>
+            <a:off x="4846320" y="2331720"/>
+            <a:ext cx="3931920" cy="2740984"/>
+          </a:xfrm>
+          <a:prstGeom prst="rect">
+            <a:avLst/>
+          </a:prstGeom>
+        </p:spPr>
+      </p:pic>
     </p:spTree>
     <p:extLst>
       <p:ext uri="{BB962C8B-B14F-4D97-AF65-F5344CB8AC3E}">
@@ -7173,7 +7269,7 @@
         <p:spPr>
           <a:xfrm xmlns:a="http://schemas.openxmlformats.org/drawingml/2006/main">
             <a:off x="762000" y="2533650"/>
-            <a:ext cx="7620000" cy="2286000"/>
+            <a:ext cx="3886200" cy="2606040"/>
           </a:xfrm>
           <a:prstGeom xmlns:a="http://schemas.openxmlformats.org/drawingml/2006/main" prst="rect">
             <a:avLst/>
@@ -7330,6 +7426,30 @@
           </a:p>
         </p:txBody>
       </p:sp>
+      <p:pic xmlns:a="http://schemas.openxmlformats.org/drawingml/2006/main" xmlns:r="http://schemas.openxmlformats.org/officeDocument/2006/relationships">
+        <p:nvPicPr>
+          <p:cNvPr id="9" name="Figur: Aktiv effekt 1,60 kW under 3 timmar, ene" descr="Aktiv effekt 1,60 kW under 3 timmar, energin är ytan under linjen"/>
+          <p:cNvPicPr>
+            <a:picLocks noChangeAspect="1"/>
+          </p:cNvPicPr>
+          <p:nvPr/>
+        </p:nvPicPr>
+        <p:blipFill>
+          <a:blip r:embed="rId3"/>
+          <a:stretch>
+            <a:fillRect/>
+          </a:stretch>
+        </p:blipFill>
+        <p:spPr>
+          <a:xfrm>
+            <a:off x="4846320" y="2331720"/>
+            <a:ext cx="3931920" cy="2740984"/>
+          </a:xfrm>
+          <a:prstGeom prst="rect">
+            <a:avLst/>
+          </a:prstGeom>
+        </p:spPr>
+      </p:pic>
     </p:spTree>
     <p:extLst>
       <p:ext uri="{BB962C8B-B14F-4D97-AF65-F5344CB8AC3E}">
@@ -8195,7 +8315,7 @@
         <p:spPr>
           <a:xfrm xmlns:a="http://schemas.openxmlformats.org/drawingml/2006/main">
             <a:off x="762000" y="1619250"/>
-            <a:ext cx="7620000" cy="1466850"/>
+            <a:ext cx="3977639" cy="1466850"/>
           </a:xfrm>
           <a:prstGeom xmlns:a="http://schemas.openxmlformats.org/drawingml/2006/main" prst="rect">
             <a:avLst/>
@@ -8223,7 +8343,7 @@
               </a:defRPr>
             </a:pPr>
             <a:r>
-              <a:rPr sz="2400" b="0">
+              <a:rPr sz="2350" b="0">
                 <a:solidFill>
                   <a:srgbClr val="111111"/>
                 </a:solidFill>
@@ -8247,7 +8367,7 @@
               </a:defRPr>
             </a:pPr>
             <a:r>
-              <a:rPr sz="2400" b="0">
+              <a:rPr sz="2350" b="0">
                 <a:solidFill>
                   <a:srgbClr val="111111"/>
                 </a:solidFill>
@@ -8277,7 +8397,7 @@
         <p:spPr>
           <a:xfrm xmlns:a="http://schemas.openxmlformats.org/drawingml/2006/main">
             <a:off x="762000" y="3200400"/>
-            <a:ext cx="7620000" cy="838200"/>
+            <a:ext cx="3977639" cy="838200"/>
           </a:xfrm>
           <a:prstGeom xmlns:a="http://schemas.openxmlformats.org/drawingml/2006/main" prst="rect">
             <a:avLst/>
@@ -8335,7 +8455,7 @@
         <p:spPr>
           <a:xfrm xmlns:a="http://schemas.openxmlformats.org/drawingml/2006/main">
             <a:off x="762000" y="4429125"/>
-            <a:ext cx="7620000" cy="1352550"/>
+            <a:ext cx="3977639" cy="1352550"/>
           </a:xfrm>
           <a:prstGeom xmlns:a="http://schemas.openxmlformats.org/drawingml/2006/main" prst="rect">
             <a:avLst/>
@@ -8363,7 +8483,7 @@
               </a:defRPr>
             </a:pPr>
             <a:r>
-              <a:rPr sz="2250" b="0">
+              <a:rPr sz="2050" b="0">
                 <a:solidFill>
                   <a:srgbClr val="111111"/>
                 </a:solidFill>
@@ -8387,7 +8507,7 @@
               </a:defRPr>
             </a:pPr>
             <a:r>
-              <a:rPr sz="2250" b="0">
+              <a:rPr sz="2050" b="0">
                 <a:solidFill>
                   <a:srgbClr val="111111"/>
                 </a:solidFill>
@@ -8458,6 +8578,30 @@
           </a:p>
         </p:txBody>
       </p:sp>
+      <p:pic xmlns:a="http://schemas.openxmlformats.org/drawingml/2006/main" xmlns:r="http://schemas.openxmlformats.org/officeDocument/2006/relationships">
+        <p:nvPicPr>
+          <p:cNvPr id="9" name="Figur: Sinusformad spänning och ström med övert" descr="Sinusformad spänning och ström med övertoner"/>
+          <p:cNvPicPr>
+            <a:picLocks noChangeAspect="1"/>
+          </p:cNvPicPr>
+          <p:nvPr/>
+        </p:nvPicPr>
+        <p:blipFill>
+          <a:blip r:embed="rId3"/>
+          <a:stretch>
+            <a:fillRect/>
+          </a:stretch>
+        </p:blipFill>
+        <p:spPr>
+          <a:xfrm>
+            <a:off x="4892040" y="1645920"/>
+            <a:ext cx="3886200" cy="3071293"/>
+          </a:xfrm>
+          <a:prstGeom prst="rect">
+            <a:avLst/>
+          </a:prstGeom>
+        </p:spPr>
+      </p:pic>
     </p:spTree>
     <p:extLst>
       <p:ext uri="{BB962C8B-B14F-4D97-AF65-F5344CB8AC3E}">
@@ -8579,7 +8723,7 @@
         <p:spPr>
           <a:xfrm xmlns:a="http://schemas.openxmlformats.org/drawingml/2006/main">
             <a:off x="762000" y="1619250"/>
-            <a:ext cx="7620000" cy="1466850"/>
+            <a:ext cx="3977639" cy="1466850"/>
           </a:xfrm>
           <a:prstGeom xmlns:a="http://schemas.openxmlformats.org/drawingml/2006/main" prst="rect">
             <a:avLst/>
@@ -8607,7 +8751,7 @@
               </a:defRPr>
             </a:pPr>
             <a:r>
-              <a:rPr sz="2400" b="0">
+              <a:rPr sz="2050" b="0">
                 <a:solidFill>
                   <a:srgbClr val="111111"/>
                 </a:solidFill>
@@ -8631,7 +8775,7 @@
               </a:defRPr>
             </a:pPr>
             <a:r>
-              <a:rPr sz="2400" b="0">
+              <a:rPr sz="2050" b="0">
                 <a:solidFill>
                   <a:srgbClr val="111111"/>
                 </a:solidFill>
@@ -8661,7 +8805,7 @@
         <p:spPr>
           <a:xfrm xmlns:a="http://schemas.openxmlformats.org/drawingml/2006/main">
             <a:off x="762000" y="3200400"/>
-            <a:ext cx="7620000" cy="838200"/>
+            <a:ext cx="3977639" cy="838200"/>
           </a:xfrm>
           <a:prstGeom xmlns:a="http://schemas.openxmlformats.org/drawingml/2006/main" prst="rect">
             <a:avLst/>
@@ -8689,7 +8833,7 @@
               </a:defRPr>
             </a:pPr>
             <a:r>
-              <a:rPr sz="2925" b="1">
+              <a:rPr sz="2650" b="1">
                 <a:solidFill>
                   <a:srgbClr val="064F91"/>
                 </a:solidFill>
@@ -8719,7 +8863,7 @@
         <p:spPr>
           <a:xfrm xmlns:a="http://schemas.openxmlformats.org/drawingml/2006/main">
             <a:off x="762000" y="4429125"/>
-            <a:ext cx="7620000" cy="1352550"/>
+            <a:ext cx="3977639" cy="1352550"/>
           </a:xfrm>
           <a:prstGeom xmlns:a="http://schemas.openxmlformats.org/drawingml/2006/main" prst="rect">
             <a:avLst/>
@@ -8747,7 +8891,7 @@
               </a:defRPr>
             </a:pPr>
             <a:r>
-              <a:rPr sz="2250" b="0">
+              <a:rPr sz="2100" b="0">
                 <a:solidFill>
                   <a:srgbClr val="111111"/>
                 </a:solidFill>
@@ -8771,7 +8915,7 @@
               </a:defRPr>
             </a:pPr>
             <a:r>
-              <a:rPr sz="2250" b="0">
+              <a:rPr sz="2100" b="0">
                 <a:solidFill>
                   <a:srgbClr val="111111"/>
                 </a:solidFill>
@@ -8842,6 +8986,30 @@
           </a:p>
         </p:txBody>
       </p:sp>
+      <p:pic xmlns:a="http://schemas.openxmlformats.org/drawingml/2006/main" xmlns:r="http://schemas.openxmlformats.org/officeDocument/2006/relationships">
+        <p:nvPicPr>
+          <p:cNvPr id="9" name="Figur: Kondensatorns reaktiva effekt minskar Q " descr="Kondensatorns reaktiva effekt minskar Q och S medan P är oförändrad"/>
+          <p:cNvPicPr>
+            <a:picLocks noChangeAspect="1"/>
+          </p:cNvPicPr>
+          <p:nvPr/>
+        </p:nvPicPr>
+        <p:blipFill>
+          <a:blip r:embed="rId3"/>
+          <a:stretch>
+            <a:fillRect/>
+          </a:stretch>
+        </p:blipFill>
+        <p:spPr>
+          <a:xfrm>
+            <a:off x="4892040" y="1645920"/>
+            <a:ext cx="3886200" cy="3071293"/>
+          </a:xfrm>
+          <a:prstGeom prst="rect">
+            <a:avLst/>
+          </a:prstGeom>
+        </p:spPr>
+      </p:pic>
     </p:spTree>
     <p:extLst>
       <p:ext uri="{BB962C8B-B14F-4D97-AF65-F5344CB8AC3E}">
@@ -10227,7 +10395,7 @@
         <p:spPr>
           <a:xfrm xmlns:a="http://schemas.openxmlformats.org/drawingml/2006/main">
             <a:off x="762000" y="2533650"/>
-            <a:ext cx="7620000" cy="2286000"/>
+            <a:ext cx="3886200" cy="2606040"/>
           </a:xfrm>
           <a:prstGeom xmlns:a="http://schemas.openxmlformats.org/drawingml/2006/main" prst="rect">
             <a:avLst/>
@@ -10384,6 +10552,30 @@
           </a:p>
         </p:txBody>
       </p:sp>
+      <p:pic xmlns:a="http://schemas.openxmlformats.org/drawingml/2006/main" xmlns:r="http://schemas.openxmlformats.org/officeDocument/2006/relationships">
+        <p:nvPicPr>
+          <p:cNvPr id="9" name="Figur: Enfaslast på 230 V med P = 1 840 W och P" descr="Enfaslast på 230 V med P = 1 840 W och PF 0,80"/>
+          <p:cNvPicPr>
+            <a:picLocks noChangeAspect="1"/>
+          </p:cNvPicPr>
+          <p:nvPr/>
+        </p:nvPicPr>
+        <p:blipFill>
+          <a:blip r:embed="rId3"/>
+          <a:stretch>
+            <a:fillRect/>
+          </a:stretch>
+        </p:blipFill>
+        <p:spPr>
+          <a:xfrm>
+            <a:off x="4846320" y="2331720"/>
+            <a:ext cx="3931920" cy="2740984"/>
+          </a:xfrm>
+          <a:prstGeom prst="rect">
+            <a:avLst/>
+          </a:prstGeom>
+        </p:spPr>
+      </p:pic>
     </p:spTree>
     <p:extLst>
       <p:ext uri="{BB962C8B-B14F-4D97-AF65-F5344CB8AC3E}">
@@ -10951,7 +11143,7 @@
         <p:spPr>
           <a:xfrm xmlns:a="http://schemas.openxmlformats.org/drawingml/2006/main">
             <a:off x="762000" y="2533650"/>
-            <a:ext cx="7620000" cy="2286000"/>
+            <a:ext cx="3886200" cy="2606040"/>
           </a:xfrm>
           <a:prstGeom xmlns:a="http://schemas.openxmlformats.org/drawingml/2006/main" prst="rect">
             <a:avLst/>
@@ -11108,6 +11300,30 @@
           </a:p>
         </p:txBody>
       </p:sp>
+      <p:pic xmlns:a="http://schemas.openxmlformats.org/drawingml/2006/main" xmlns:r="http://schemas.openxmlformats.org/officeDocument/2006/relationships">
+        <p:nvPicPr>
+          <p:cNvPr id="9" name="Figur: Effekttriangel med P = 3 kW och Q = +4 k" descr="Effekttriangel med P = 3 kW och Q = +4 kvar samt okänd kapacitiv kompensering"/>
+          <p:cNvPicPr>
+            <a:picLocks noChangeAspect="1"/>
+          </p:cNvPicPr>
+          <p:nvPr/>
+        </p:nvPicPr>
+        <p:blipFill>
+          <a:blip r:embed="rId3"/>
+          <a:stretch>
+            <a:fillRect/>
+          </a:stretch>
+        </p:blipFill>
+        <p:spPr>
+          <a:xfrm>
+            <a:off x="4846320" y="2331720"/>
+            <a:ext cx="3931920" cy="2740984"/>
+          </a:xfrm>
+          <a:prstGeom prst="rect">
+            <a:avLst/>
+          </a:prstGeom>
+        </p:spPr>
+      </p:pic>
     </p:spTree>
     <p:extLst>
       <p:ext uri="{BB962C8B-B14F-4D97-AF65-F5344CB8AC3E}">
@@ -12189,7 +12405,7 @@
         <p:spPr>
           <a:xfrm xmlns:a="http://schemas.openxmlformats.org/drawingml/2006/main">
             <a:off x="762000" y="2533650"/>
-            <a:ext cx="7620000" cy="2286000"/>
+            <a:ext cx="3886200" cy="2606040"/>
           </a:xfrm>
           <a:prstGeom xmlns:a="http://schemas.openxmlformats.org/drawingml/2006/main" prst="rect">
             <a:avLst/>
@@ -12346,6 +12562,30 @@
           </a:p>
         </p:txBody>
       </p:sp>
+      <p:pic xmlns:a="http://schemas.openxmlformats.org/drawingml/2006/main" xmlns:r="http://schemas.openxmlformats.org/officeDocument/2006/relationships">
+        <p:nvPicPr>
+          <p:cNvPr id="9" name="Figur: Två effekttrianglar med samma P = 1 800 " descr="Två effekttrianglar med samma P = 1 800 W vid PF 0,60 och 0,90"/>
+          <p:cNvPicPr>
+            <a:picLocks noChangeAspect="1"/>
+          </p:cNvPicPr>
+          <p:nvPr/>
+        </p:nvPicPr>
+        <p:blipFill>
+          <a:blip r:embed="rId3"/>
+          <a:stretch>
+            <a:fillRect/>
+          </a:stretch>
+        </p:blipFill>
+        <p:spPr>
+          <a:xfrm>
+            <a:off x="4846320" y="2331720"/>
+            <a:ext cx="3931920" cy="2740984"/>
+          </a:xfrm>
+          <a:prstGeom prst="rect">
+            <a:avLst/>
+          </a:prstGeom>
+        </p:spPr>
+      </p:pic>
     </p:spTree>
     <p:extLst>
       <p:ext uri="{BB962C8B-B14F-4D97-AF65-F5344CB8AC3E}">
@@ -12936,7 +13176,7 @@
         <p:spPr>
           <a:xfrm xmlns:a="http://schemas.openxmlformats.org/drawingml/2006/main">
             <a:off x="762000" y="2533650"/>
-            <a:ext cx="7620000" cy="2286000"/>
+            <a:ext cx="3886200" cy="2606040"/>
           </a:xfrm>
           <a:prstGeom xmlns:a="http://schemas.openxmlformats.org/drawingml/2006/main" prst="rect">
             <a:avLst/>
@@ -13093,6 +13333,30 @@
           </a:p>
         </p:txBody>
       </p:sp>
+      <p:pic xmlns:a="http://schemas.openxmlformats.org/drawingml/2006/main" xmlns:r="http://schemas.openxmlformats.org/officeDocument/2006/relationships">
+        <p:nvPicPr>
+          <p:cNvPr id="9" name="Figur: Stapeldiagram för förlust I i kvadrat vi" descr="Stapeldiagram för förlust I i kvadrat vid 12 A och 8 A i samma kabel"/>
+          <p:cNvPicPr>
+            <a:picLocks noChangeAspect="1"/>
+          </p:cNvPicPr>
+          <p:nvPr/>
+        </p:nvPicPr>
+        <p:blipFill>
+          <a:blip r:embed="rId3"/>
+          <a:stretch>
+            <a:fillRect/>
+          </a:stretch>
+        </p:blipFill>
+        <p:spPr>
+          <a:xfrm>
+            <a:off x="4846320" y="2331720"/>
+            <a:ext cx="3931920" cy="2740984"/>
+          </a:xfrm>
+          <a:prstGeom prst="rect">
+            <a:avLst/>
+          </a:prstGeom>
+        </p:spPr>
+      </p:pic>
     </p:spTree>
     <p:extLst>
       <p:ext uri="{BB962C8B-B14F-4D97-AF65-F5344CB8AC3E}">
@@ -13660,7 +13924,7 @@
         <p:spPr>
           <a:xfrm xmlns:a="http://schemas.openxmlformats.org/drawingml/2006/main">
             <a:off x="762000" y="2533650"/>
-            <a:ext cx="7620000" cy="2286000"/>
+            <a:ext cx="3886200" cy="2606040"/>
           </a:xfrm>
           <a:prstGeom xmlns:a="http://schemas.openxmlformats.org/drawingml/2006/main" prst="rect">
             <a:avLst/>
@@ -13817,6 +14081,30 @@
           </a:p>
         </p:txBody>
       </p:sp>
+      <p:pic xmlns:a="http://schemas.openxmlformats.org/drawingml/2006/main" xmlns:r="http://schemas.openxmlformats.org/officeDocument/2006/relationships">
+        <p:nvPicPr>
+          <p:cNvPr id="9" name="Figur: Sinusformad spänning och ström med övert" descr="Sinusformad spänning och ström med övertoner, P = 800 W och S = 1 000 VA"/>
+          <p:cNvPicPr>
+            <a:picLocks noChangeAspect="1"/>
+          </p:cNvPicPr>
+          <p:nvPr/>
+        </p:nvPicPr>
+        <p:blipFill>
+          <a:blip r:embed="rId3"/>
+          <a:stretch>
+            <a:fillRect/>
+          </a:stretch>
+        </p:blipFill>
+        <p:spPr>
+          <a:xfrm>
+            <a:off x="4846320" y="2331720"/>
+            <a:ext cx="3931920" cy="2740984"/>
+          </a:xfrm>
+          <a:prstGeom prst="rect">
+            <a:avLst/>
+          </a:prstGeom>
+        </p:spPr>
+      </p:pic>
     </p:spTree>
     <p:extLst>
       <p:ext uri="{BB962C8B-B14F-4D97-AF65-F5344CB8AC3E}">
@@ -15549,7 +15837,7 @@
         <p:spPr>
           <a:xfrm xmlns:a="http://schemas.openxmlformats.org/drawingml/2006/main">
             <a:off x="762000" y="1619250"/>
-            <a:ext cx="7620000" cy="1466850"/>
+            <a:ext cx="3977639" cy="1466850"/>
           </a:xfrm>
           <a:prstGeom xmlns:a="http://schemas.openxmlformats.org/drawingml/2006/main" prst="rect">
             <a:avLst/>
@@ -15577,7 +15865,7 @@
               </a:defRPr>
             </a:pPr>
             <a:r>
-              <a:rPr sz="2400" b="0">
+              <a:rPr sz="1950" b="0">
                 <a:solidFill>
                   <a:srgbClr val="111111"/>
                 </a:solidFill>
@@ -15601,7 +15889,7 @@
               </a:defRPr>
             </a:pPr>
             <a:r>
-              <a:rPr sz="2400" b="0">
+              <a:rPr sz="1950" b="0">
                 <a:solidFill>
                   <a:srgbClr val="111111"/>
                 </a:solidFill>
@@ -15631,7 +15919,7 @@
         <p:spPr>
           <a:xfrm xmlns:a="http://schemas.openxmlformats.org/drawingml/2006/main">
             <a:off x="762000" y="3200400"/>
-            <a:ext cx="7620000" cy="838200"/>
+            <a:ext cx="3977639" cy="838200"/>
           </a:xfrm>
           <a:prstGeom xmlns:a="http://schemas.openxmlformats.org/drawingml/2006/main" prst="rect">
             <a:avLst/>
@@ -15659,7 +15947,7 @@
               </a:defRPr>
             </a:pPr>
             <a:r>
-              <a:rPr sz="2925" b="1">
+              <a:rPr sz="2650" b="1">
                 <a:solidFill>
                   <a:srgbClr val="064F91"/>
                 </a:solidFill>
@@ -15689,7 +15977,7 @@
         <p:spPr>
           <a:xfrm xmlns:a="http://schemas.openxmlformats.org/drawingml/2006/main">
             <a:off x="762000" y="4429125"/>
-            <a:ext cx="7620000" cy="1352550"/>
+            <a:ext cx="3977639" cy="1352550"/>
           </a:xfrm>
           <a:prstGeom xmlns:a="http://schemas.openxmlformats.org/drawingml/2006/main" prst="rect">
             <a:avLst/>
@@ -15717,7 +16005,7 @@
               </a:defRPr>
             </a:pPr>
             <a:r>
-              <a:rPr sz="2250" b="0">
+              <a:rPr sz="2100" b="0">
                 <a:solidFill>
                   <a:srgbClr val="111111"/>
                 </a:solidFill>
@@ -15741,7 +16029,7 @@
               </a:defRPr>
             </a:pPr>
             <a:r>
-              <a:rPr sz="2250" b="0">
+              <a:rPr sz="2100" b="0">
                 <a:solidFill>
                   <a:srgbClr val="111111"/>
                 </a:solidFill>
@@ -15812,6 +16100,30 @@
           </a:p>
         </p:txBody>
       </p:sp>
+      <p:pic xmlns:a="http://schemas.openxmlformats.org/drawingml/2006/main" xmlns:r="http://schemas.openxmlformats.org/officeDocument/2006/relationships">
+        <p:nvPicPr>
+          <p:cNvPr id="9" name="Figur: Effekttriangel med aktiv effekt P, reakt" descr="Effekttriangel med aktiv effekt P, reaktiv effekt Q och skenbar effekt S"/>
+          <p:cNvPicPr>
+            <a:picLocks noChangeAspect="1"/>
+          </p:cNvPicPr>
+          <p:nvPr/>
+        </p:nvPicPr>
+        <p:blipFill>
+          <a:blip r:embed="rId3"/>
+          <a:stretch>
+            <a:fillRect/>
+          </a:stretch>
+        </p:blipFill>
+        <p:spPr>
+          <a:xfrm>
+            <a:off x="4892040" y="1645920"/>
+            <a:ext cx="3886200" cy="3071293"/>
+          </a:xfrm>
+          <a:prstGeom prst="rect">
+            <a:avLst/>
+          </a:prstGeom>
+        </p:spPr>
+      </p:pic>
     </p:spTree>
     <p:extLst>
       <p:ext uri="{BB962C8B-B14F-4D97-AF65-F5344CB8AC3E}">
@@ -15933,7 +16245,7 @@
         <p:spPr>
           <a:xfrm xmlns:a="http://schemas.openxmlformats.org/drawingml/2006/main">
             <a:off x="762000" y="1619250"/>
-            <a:ext cx="7620000" cy="1466850"/>
+            <a:ext cx="3977639" cy="1466850"/>
           </a:xfrm>
           <a:prstGeom xmlns:a="http://schemas.openxmlformats.org/drawingml/2006/main" prst="rect">
             <a:avLst/>
@@ -15961,7 +16273,7 @@
               </a:defRPr>
             </a:pPr>
             <a:r>
-              <a:rPr sz="2400" b="0">
+              <a:rPr sz="2350" b="0">
                 <a:solidFill>
                   <a:srgbClr val="111111"/>
                 </a:solidFill>
@@ -15985,7 +16297,7 @@
               </a:defRPr>
             </a:pPr>
             <a:r>
-              <a:rPr sz="2400" b="0">
+              <a:rPr sz="2350" b="0">
                 <a:solidFill>
                   <a:srgbClr val="111111"/>
                 </a:solidFill>
@@ -16015,7 +16327,7 @@
         <p:spPr>
           <a:xfrm xmlns:a="http://schemas.openxmlformats.org/drawingml/2006/main">
             <a:off x="762000" y="3200400"/>
-            <a:ext cx="7620000" cy="838200"/>
+            <a:ext cx="3977639" cy="838200"/>
           </a:xfrm>
           <a:prstGeom xmlns:a="http://schemas.openxmlformats.org/drawingml/2006/main" prst="rect">
             <a:avLst/>
@@ -16073,7 +16385,7 @@
         <p:spPr>
           <a:xfrm xmlns:a="http://schemas.openxmlformats.org/drawingml/2006/main">
             <a:off x="762000" y="4429125"/>
-            <a:ext cx="7620000" cy="1352550"/>
+            <a:ext cx="3977639" cy="1352550"/>
           </a:xfrm>
           <a:prstGeom xmlns:a="http://schemas.openxmlformats.org/drawingml/2006/main" prst="rect">
             <a:avLst/>
@@ -16101,7 +16413,7 @@
               </a:defRPr>
             </a:pPr>
             <a:r>
-              <a:rPr sz="2250" b="0">
+              <a:rPr sz="2100" b="0">
                 <a:solidFill>
                   <a:srgbClr val="111111"/>
                 </a:solidFill>
@@ -16125,7 +16437,7 @@
               </a:defRPr>
             </a:pPr>
             <a:r>
-              <a:rPr sz="2250" b="0">
+              <a:rPr sz="2100" b="0">
                 <a:solidFill>
                   <a:srgbClr val="111111"/>
                 </a:solidFill>
@@ -16196,6 +16508,30 @@
           </a:p>
         </p:txBody>
       </p:sp>
+      <p:pic xmlns:a="http://schemas.openxmlformats.org/drawingml/2006/main" xmlns:r="http://schemas.openxmlformats.org/officeDocument/2006/relationships">
+        <p:nvPicPr>
+          <p:cNvPr id="9" name="Figur: Spänning, ström som släpar 90 grader och" descr="Spänning, ström som släpar 90 grader och momentan effekt med medelvärde noll"/>
+          <p:cNvPicPr>
+            <a:picLocks noChangeAspect="1"/>
+          </p:cNvPicPr>
+          <p:nvPr/>
+        </p:nvPicPr>
+        <p:blipFill>
+          <a:blip r:embed="rId3"/>
+          <a:stretch>
+            <a:fillRect/>
+          </a:stretch>
+        </p:blipFill>
+        <p:spPr>
+          <a:xfrm>
+            <a:off x="4892040" y="1645920"/>
+            <a:ext cx="3886200" cy="3071293"/>
+          </a:xfrm>
+          <a:prstGeom prst="rect">
+            <a:avLst/>
+          </a:prstGeom>
+        </p:spPr>
+      </p:pic>
     </p:spTree>
     <p:extLst>
       <p:ext uri="{BB962C8B-B14F-4D97-AF65-F5344CB8AC3E}">

--- a/sjoskolan/vecka-40/aktuell/v40_03_Effekt_i_vaxelstromskretsar_elev.pptx
+++ b/sjoskolan/vecka-40/aktuell/v40_03_Effekt_i_vaxelstromskretsar_elev.pptx
@@ -4290,7 +4290,7 @@
                 <a:ea typeface="Calibri"/>
                 <a:cs typeface="Calibri"/>
               </a:rPr>
-              <a:t>En enfaslast har U = 230 V och I = 4,0 A RMS. Beräkna S.</a:t>
+              <a:t>En enfaslast har U = 230 V och I = 4,0 A RMS. Beräkna S.</a:t>
             </a:r>
           </a:p>
         </p:txBody>
@@ -5038,7 +5038,7 @@
                 <a:ea typeface="Calibri"/>
                 <a:cs typeface="Calibri"/>
               </a:rPr>
-              <a:t>S = 920 VA och cos φ = 0,75. Beräkna P för sinusformade signaler.</a:t>
+              <a:t>S = 920 VA och cos φ = 0,75. Beräkna P för sinusformade signaler.</a:t>
             </a:r>
           </a:p>
         </p:txBody>
@@ -5786,7 +5786,7 @@
                 <a:ea typeface="Calibri"/>
                 <a:cs typeface="Calibri"/>
               </a:rPr>
-              <a:t>En induktiv enfaslast har P = 600 W och Q = 800 var. Bestäm S och PF.</a:t>
+              <a:t>En induktiv enfaslast har P = 600 W och Q = 800 var. Bestäm S och PF.</a:t>
             </a:r>
           </a:p>
         </p:txBody>
@@ -6557,7 +6557,7 @@
                 <a:ea typeface="Calibri"/>
                 <a:cs typeface="Calibri"/>
               </a:rPr>
-              <a:t>S = 2,0 kVA och cos φ = 0,80. Lasten är induktiv och sinusformad. Bestäm P och Q.</a:t>
+              <a:t>S = 2,0 kVA och cos φ = 0,80. Lasten är induktiv och sinusformad. Bestäm P och Q.</a:t>
             </a:r>
           </a:p>
         </p:txBody>
@@ -7305,7 +7305,7 @@
                 <a:ea typeface="Calibri"/>
                 <a:cs typeface="Calibri"/>
               </a:rPr>
-              <a:t>En last har P = 1,60 kW och S = 2,0 kVA. Den går i 3 h. Beräkna aktiv energi.</a:t>
+              <a:t>En last har P = 1,60 kW och S = 2,0 kVA. Den går i 3 h. Beräkna aktiv energi.</a:t>
             </a:r>
           </a:p>
         </p:txBody>
@@ -8375,7 +8375,7 @@
                 <a:ea typeface="Calibri"/>
                 <a:cs typeface="Calibri"/>
               </a:rPr>
-              <a:t>För rena sinussignaler är PF = cos φ.</a:t>
+              <a:t>För rena sinussignaler är PF = cos φ.</a:t>
             </a:r>
           </a:p>
         </p:txBody>
@@ -8433,7 +8433,7 @@
                 <a:ea typeface="Calibri"/>
                 <a:cs typeface="Calibri"/>
               </a:rPr>
-              <a:t>PF = P/S</a:t>
+              <a:t>PF = P/S</a:t>
             </a:r>
           </a:p>
         </p:txBody>
@@ -8483,15 +8483,15 @@
               </a:defRPr>
             </a:pPr>
             <a:r>
-              <a:rPr sz="2050" b="0">
-                <a:solidFill>
-                  <a:srgbClr val="111111"/>
-                </a:solidFill>
-                <a:latin typeface="Calibri"/>
-                <a:ea typeface="Calibri"/>
-                <a:cs typeface="Calibri"/>
-              </a:rPr>
-              <a:t>Vid förvrängd ström kan PF vara lägre än cos φ.</a:t>
+              <a:rPr sz="1850" b="0">
+                <a:solidFill>
+                  <a:srgbClr val="111111"/>
+                </a:solidFill>
+                <a:latin typeface="Calibri"/>
+                <a:ea typeface="Calibri"/>
+                <a:cs typeface="Calibri"/>
+              </a:rPr>
+              <a:t>Vid förvrängd ström kan PF vara lägre än cos φ.</a:t>
             </a:r>
           </a:p>
           <a:p xmlns:a="http://schemas.openxmlformats.org/drawingml/2006/main">
@@ -8507,7 +8507,7 @@
               </a:defRPr>
             </a:pPr>
             <a:r>
-              <a:rPr sz="2050" b="0">
+              <a:rPr sz="1850" b="0">
                 <a:solidFill>
                   <a:srgbClr val="111111"/>
                 </a:solidFill>
@@ -8751,7 +8751,7 @@
               </a:defRPr>
             </a:pPr>
             <a:r>
-              <a:rPr sz="2050" b="0">
+              <a:rPr sz="1800" b="0">
                 <a:solidFill>
                   <a:srgbClr val="111111"/>
                 </a:solidFill>
@@ -8775,7 +8775,7 @@
               </a:defRPr>
             </a:pPr>
             <a:r>
-              <a:rPr sz="2050" b="0">
+              <a:rPr sz="1800" b="0">
                 <a:solidFill>
                   <a:srgbClr val="111111"/>
                 </a:solidFill>
@@ -8841,7 +8841,7 @@
                 <a:ea typeface="Calibri"/>
                 <a:cs typeface="Calibri"/>
               </a:rPr>
-              <a:t>Qᶜ = P · (tan φ₁ − tan φ₂)</a:t>
+              <a:t>Qᶜ = P · (tan φ₁ − tan φ₂)</a:t>
             </a:r>
           </a:p>
         </p:txBody>
@@ -8899,7 +8899,7 @@
                 <a:ea typeface="Calibri"/>
                 <a:cs typeface="Calibri"/>
               </a:rPr>
-              <a:t>P = 3 kW, cos φ₁ = 0,60 och cos φ₂ = 1:</a:t>
+              <a:t>P = 3 kW, cos φ₁ = 0,60 och cos φ₂ = 1:</a:t>
             </a:r>
           </a:p>
           <a:p xmlns:a="http://schemas.openxmlformats.org/drawingml/2006/main">
@@ -8923,7 +8923,7 @@
                 <a:ea typeface="Calibri"/>
                 <a:cs typeface="Calibri"/>
               </a:rPr>
-              <a:t>Qᶜ = 4 kvar. Matningens S minskar från 5 till 3 kVA.</a:t>
+              <a:t>Qᶜ = 4 kvar. Matningens S minskar från 5 till 3 kVA.</a:t>
             </a:r>
           </a:p>
         </p:txBody>
@@ -10431,7 +10431,7 @@
                 <a:ea typeface="Calibri"/>
                 <a:cs typeface="Calibri"/>
               </a:rPr>
-              <a:t>En enfaslast tar P = 1 840 W vid 230 V och PF = 0,80. Bestäm strömmen.</a:t>
+              <a:t>En enfaslast tar P = 1 840 W vid 230 V och PF = 0,80. Bestäm strömmen.</a:t>
             </a:r>
           </a:p>
         </p:txBody>
@@ -11179,7 +11179,7 @@
                 <a:ea typeface="Calibri"/>
                 <a:cs typeface="Calibri"/>
               </a:rPr>
-              <a:t>En sinusformad last har P = 3 kW och Q = +4 kvar. Vilken kapacitiv reaktiv effekt behövs för Qtotal = 0?</a:t>
+              <a:t>En sinusformad last har P = 3 kW och Q = +4 kvar. Vilken kapacitiv reaktiv effekt behövs för Qtotal = 0?</a:t>
             </a:r>
           </a:p>
         </p:txBody>
@@ -12441,7 +12441,7 @@
                 <a:ea typeface="Calibri"/>
                 <a:cs typeface="Calibri"/>
               </a:rPr>
-              <a:t>En enfaslast har P = 1 800 W vid 230 V. PF höjs från 0,60 till 0,90. Beräkna matningsström före och efter.</a:t>
+              <a:t>En enfaslast har P = 1 800 W vid 230 V. PF höjs från 0,60 till 0,90. Beräkna matningsström före och efter.</a:t>
             </a:r>
           </a:p>
         </p:txBody>
@@ -13212,7 +13212,7 @@
                 <a:ea typeface="Calibri"/>
                 <a:cs typeface="Calibri"/>
               </a:rPr>
-              <a:t>För samma kabel minskar strömmen från 12 A till 8 A. Hur stor del av den gamla I²R-förlusten återstår?</a:t>
+              <a:t>För samma kabel minskar strömmen från 12 A till 8 A. Hur stor del av den gamla I²R-förlusten återstår?</a:t>
             </a:r>
           </a:p>
         </p:txBody>
@@ -13960,7 +13960,7 @@
                 <a:ea typeface="Calibri"/>
                 <a:cs typeface="Calibri"/>
               </a:rPr>
-              <a:t>En mätare visar P = 800 W, S = 1 000 VA och cos φ = 0,95 för grundtonen. Beräkna PF och förklara skillnaden.</a:t>
+              <a:t>En mätare visar P = 800 W, S = 1 000 VA och cos φ = 0,95 för grundtonen. Beräkna PF och förklara skillnaden.</a:t>
             </a:r>
           </a:p>
         </p:txBody>
@@ -15865,7 +15865,7 @@
               </a:defRPr>
             </a:pPr>
             <a:r>
-              <a:rPr sz="1950" b="0">
+              <a:rPr sz="1800" b="0">
                 <a:solidFill>
                   <a:srgbClr val="111111"/>
                 </a:solidFill>
@@ -15889,7 +15889,7 @@
               </a:defRPr>
             </a:pPr>
             <a:r>
-              <a:rPr sz="1950" b="0">
+              <a:rPr sz="1800" b="0">
                 <a:solidFill>
                   <a:srgbClr val="111111"/>
                 </a:solidFill>
@@ -15955,7 +15955,7 @@
                 <a:ea typeface="Calibri"/>
                 <a:cs typeface="Calibri"/>
               </a:rPr>
-              <a:t>S = U · I     P = U · I · cos φ</a:t>
+              <a:t>S = U · I     P = U · I · cos φ</a:t>
             </a:r>
           </a:p>
         </p:txBody>
@@ -16013,7 +16013,7 @@
                 <a:ea typeface="Calibri"/>
                 <a:cs typeface="Calibri"/>
               </a:rPr>
-              <a:t>Enfas, sinus: 230 V, 10 A, cos φ = 0,80</a:t>
+              <a:t>Enfas, sinus: 230 V, 10 A, cos φ = 0,80</a:t>
             </a:r>
           </a:p>
           <a:p xmlns:a="http://schemas.openxmlformats.org/drawingml/2006/main">
@@ -16037,7 +16037,7 @@
                 <a:ea typeface="Calibri"/>
                 <a:cs typeface="Calibri"/>
               </a:rPr>
-              <a:t>ger S = 2,30 kVA och P = 1,84 kW.</a:t>
+              <a:t>ger S = 2,30 kVA och P = 1,84 kW.</a:t>
             </a:r>
           </a:p>
         </p:txBody>
@@ -16273,7 +16273,7 @@
               </a:defRPr>
             </a:pPr>
             <a:r>
-              <a:rPr sz="2350" b="0">
+              <a:rPr sz="2200" b="0">
                 <a:solidFill>
                   <a:srgbClr val="111111"/>
                 </a:solidFill>
@@ -16297,7 +16297,7 @@
               </a:defRPr>
             </a:pPr>
             <a:r>
-              <a:rPr sz="2350" b="0">
+              <a:rPr sz="2200" b="0">
                 <a:solidFill>
                   <a:srgbClr val="111111"/>
                 </a:solidFill>
@@ -16363,7 +16363,7 @@
                 <a:ea typeface="Calibri"/>
                 <a:cs typeface="Calibri"/>
               </a:rPr>
-              <a:t>Q = U · I · sin φ</a:t>
+              <a:t>Q = U · I · sin φ</a:t>
             </a:r>
           </a:p>
         </p:txBody>
@@ -16421,7 +16421,7 @@
                 <a:ea typeface="Calibri"/>
                 <a:cs typeface="Calibri"/>
               </a:rPr>
-              <a:t>Vid cos φ = 0,80 är sin φ = 0,60.</a:t>
+              <a:t>Vid cos φ = 0,80 är sin φ = 0,60.</a:t>
             </a:r>
           </a:p>
           <a:p xmlns:a="http://schemas.openxmlformats.org/drawingml/2006/main">
@@ -16445,7 +16445,7 @@
                 <a:ea typeface="Calibri"/>
                 <a:cs typeface="Calibri"/>
               </a:rPr>
-              <a:t>S = 2,30 kVA ger Q = 1,38 kvar.</a:t>
+              <a:t>S = 2,30 kVA ger Q = 1,38 kvar.</a:t>
             </a:r>
           </a:p>
         </p:txBody>

--- a/sjoskolan/vecka-40/aktuell/v40_03_Effekt_i_vaxelstromskretsar_elev.pptx
+++ b/sjoskolan/vecka-40/aktuell/v40_03_Effekt_i_vaxelstromskretsar_elev.pptx
@@ -7247,7 +7247,7 @@
                 <a:ea typeface="Calibri"/>
                 <a:cs typeface="Calibri"/>
               </a:rPr>
-              <a:t>Energin på elmätaren</a:t>
+              <a:t>Energi vid landanslutning</a:t>
             </a:r>
           </a:p>
         </p:txBody>
@@ -7305,7 +7305,7 @@
                 <a:ea typeface="Calibri"/>
                 <a:cs typeface="Calibri"/>
               </a:rPr>
-              <a:t>En last har P = 1,60 kW och S = 2,0 kVA. Den går i 3 h. Beräkna aktiv energi.</a:t>
+              <a:t>Vid landanslutning tar en last P = 1,60 kW och S = 2,0 kVA. Den går i 3 h. Beräkna aktiv energi från land.</a:t>
             </a:r>
           </a:p>
         </p:txBody>
@@ -8790,7 +8790,7 @@
       </p:sp>
       <p:sp>
         <p:nvSpPr>
-          <p:cNvPr id="4" name="Qᶜ = P · (tan φ₁ − tan φ₂)">
+          <p:cNvPr id="4" name="QC = P · (tan φ₁ − tan φ₂)">
             <a:extLst xmlns:a="http://schemas.openxmlformats.org/drawingml/2006/main">
               <a:ext uri="{FF2B5EF4-FFF2-40B4-BE49-F238E27FC236}">
                 <a16:creationId xmlns:a16="http://schemas.microsoft.com/office/drawing/2014/main" id="{D05274D9-1F5C-4E81-B178-EFAF23B01DB7}"/>
@@ -8841,14 +8841,36 @@
                 <a:ea typeface="Calibri"/>
                 <a:cs typeface="Calibri"/>
               </a:rPr>
-              <a:t>Qᶜ = P · (tan φ₁ − tan φ₂)</a:t>
-            </a:r>
-          </a:p>
-        </p:txBody>
-      </p:sp>
-      <p:sp>
-        <p:nvSpPr>
-          <p:cNvPr id="5" name="P = 3 kW, cos φ₁ = 0,60 och cos φ₂ = 1:&#10;Qᶜ = 4 kvar. Matningens S">
+              <a:t>Q</a:t>
+            </a:r>
+            <a:r>
+              <a:rPr sz="2650" b="1" baseline="-25000">
+                <a:solidFill>
+                  <a:srgbClr val="064F91"/>
+                </a:solidFill>
+                <a:latin typeface="Calibri"/>
+                <a:ea typeface="Calibri"/>
+                <a:cs typeface="Calibri"/>
+              </a:rPr>
+              <a:t>C</a:t>
+            </a:r>
+            <a:r>
+              <a:rPr sz="2650" b="1">
+                <a:solidFill>
+                  <a:srgbClr val="064F91"/>
+                </a:solidFill>
+                <a:latin typeface="Calibri"/>
+                <a:ea typeface="Calibri"/>
+                <a:cs typeface="Calibri"/>
+              </a:rPr>
+              <a:t> = P · (tan φ₁ − tan φ₂)</a:t>
+            </a:r>
+          </a:p>
+        </p:txBody>
+      </p:sp>
+      <p:sp>
+        <p:nvSpPr>
+          <p:cNvPr id="5" name="P = 3 kW, cos φ₁ = 0,60 och cos φ₂ = 1:&#10;QC = 4 kvar. Matningens S">
             <a:extLst xmlns:a="http://schemas.openxmlformats.org/drawingml/2006/main">
               <a:ext uri="{FF2B5EF4-FFF2-40B4-BE49-F238E27FC236}">
                 <a16:creationId xmlns:a16="http://schemas.microsoft.com/office/drawing/2014/main" id="{0C93CA5B-273F-4F05-A12F-02B5D5C6E478}"/>
@@ -8923,7 +8945,29 @@
                 <a:ea typeface="Calibri"/>
                 <a:cs typeface="Calibri"/>
               </a:rPr>
-              <a:t>Qᶜ = 4 kvar. Matningens S minskar från 5 till 3 kVA.</a:t>
+              <a:t>Q</a:t>
+            </a:r>
+            <a:r>
+              <a:rPr sz="2100" b="0" baseline="-25000">
+                <a:solidFill>
+                  <a:srgbClr val="111111"/>
+                </a:solidFill>
+                <a:latin typeface="Calibri"/>
+                <a:ea typeface="Calibri"/>
+                <a:cs typeface="Calibri"/>
+              </a:rPr>
+              <a:t>C</a:t>
+            </a:r>
+            <a:r>
+              <a:rPr sz="2100" b="0">
+                <a:solidFill>
+                  <a:srgbClr val="111111"/>
+                </a:solidFill>
+                <a:latin typeface="Calibri"/>
+                <a:ea typeface="Calibri"/>
+                <a:cs typeface="Calibri"/>
+              </a:rPr>
+              <a:t> = 4 kvar. Matningens S minskar från 5 till 3 kVA.</a:t>
             </a:r>
           </a:p>
         </p:txBody>
@@ -9307,7 +9351,7 @@
                 <a:ea typeface="Calibri"/>
                 <a:cs typeface="Calibri"/>
               </a:rPr>
-              <a:t>I modellen P = 1,8 kW, U = 230 V:</a:t>
+              <a:t>I modellen P = 2,4 kW, U = 230 V:</a:t>
             </a:r>
           </a:p>
           <a:p xmlns:a="http://schemas.openxmlformats.org/drawingml/2006/main">
@@ -9331,7 +9375,31 @@
                 <a:ea typeface="Calibri"/>
                 <a:cs typeface="Calibri"/>
               </a:rPr>
-              <a:t>PF 0,60 ger 13,0 A. PF 1,00 ger 7,83 A.</a:t>
+              <a:t>PF 0,60 ger 17,4 A. PF 1,00 ger 10,4 A.</a:t>
+            </a:r>
+          </a:p>
+          <a:p xmlns:a="http://schemas.openxmlformats.org/drawingml/2006/main">
+            <a:pPr algn="l">
+              <a:buNone/>
+              <a:defRPr sz="2250" b="0">
+                <a:solidFill>
+                  <a:srgbClr val="111111"/>
+                </a:solidFill>
+                <a:latin typeface="Calibri"/>
+                <a:ea typeface="Calibri"/>
+                <a:cs typeface="Calibri"/>
+              </a:defRPr>
+            </a:pPr>
+            <a:r>
+              <a:rPr sz="1800" b="0">
+                <a:solidFill>
+                  <a:srgbClr val="111111"/>
+                </a:solidFill>
+                <a:latin typeface="Calibri"/>
+                <a:ea typeface="Calibri"/>
+                <a:cs typeface="Calibri"/>
+              </a:rPr>
+              <a:t>Ombord används kondensatorbatterier sällan: generatorn levererar Q själv. En kondensator kan hålla farlig spänning efter frånkoppling.</a:t>
             </a:r>
           </a:p>
         </p:txBody>
@@ -14689,64 +14757,6 @@
       </p:sp>
       <p:sp>
         <p:nvSpPr>
-          <p:cNvPr id="6" name="Källor och lärarstöd finns även i bildanteckningarna.">
-            <a:extLst xmlns:a="http://schemas.openxmlformats.org/drawingml/2006/main">
-              <a:ext uri="{FF2B5EF4-FFF2-40B4-BE49-F238E27FC236}">
-                <a16:creationId xmlns:a16="http://schemas.microsoft.com/office/drawing/2014/main" id="{5F9F8AAA-2225-4FB1-AC02-0596BCBA65C2}"/>
-              </a:ext>
-            </a:extLst>
-          </p:cNvPr>
-          <p:cNvSpPr>
-            <a:spLocks xmlns:a="http://schemas.openxmlformats.org/drawingml/2006/main" noGrp="1"/>
-          </p:cNvSpPr>
-          <p:nvPr/>
-        </p:nvSpPr>
-        <p:spPr>
-          <a:xfrm xmlns:a="http://schemas.openxmlformats.org/drawingml/2006/main">
-            <a:off x="762000" y="5676900"/>
-            <a:ext cx="7620000" cy="352425"/>
-          </a:xfrm>
-          <a:prstGeom xmlns:a="http://schemas.openxmlformats.org/drawingml/2006/main" prst="rect">
-            <a:avLst/>
-          </a:prstGeom>
-          <a:noFill xmlns:a="http://schemas.openxmlformats.org/drawingml/2006/main"/>
-          <a:ln xmlns:a="http://schemas.openxmlformats.org/drawingml/2006/main" w="0">
-            <a:noFill/>
-          </a:ln>
-        </p:spPr>
-        <p:txBody>
-          <a:bodyPr xmlns:a="http://schemas.openxmlformats.org/drawingml/2006/main" wrap="square" lIns="0" tIns="0" rIns="0" bIns="0" anchor="t">
-            <a:noAutofit/>
-          </a:bodyPr>
-          <a:lstStyle xmlns:a="http://schemas.openxmlformats.org/drawingml/2006/main"/>
-          <a:p xmlns:a="http://schemas.openxmlformats.org/drawingml/2006/main">
-            <a:pPr algn="l">
-              <a:buNone/>
-              <a:defRPr sz="1800" b="0">
-                <a:solidFill>
-                  <a:srgbClr val="111111"/>
-                </a:solidFill>
-                <a:latin typeface="Calibri"/>
-                <a:ea typeface="Calibri"/>
-                <a:cs typeface="Calibri"/>
-              </a:defRPr>
-            </a:pPr>
-            <a:r>
-              <a:rPr sz="1800" b="0">
-                <a:solidFill>
-                  <a:srgbClr val="111111"/>
-                </a:solidFill>
-                <a:latin typeface="Calibri"/>
-                <a:ea typeface="Calibri"/>
-                <a:cs typeface="Calibri"/>
-              </a:rPr>
-              <a:t>Källor och lärarstöd finns även i bildanteckningarna.</a:t>
-            </a:r>
-          </a:p>
-        </p:txBody>
-      </p:sp>
-      <p:sp>
-        <p:nvSpPr>
           <p:cNvPr id="7" name="22">
             <a:extLst xmlns:a="http://schemas.openxmlformats.org/drawingml/2006/main">
               <a:ext uri="{FF2B5EF4-FFF2-40B4-BE49-F238E27FC236}">
@@ -16013,7 +16023,7 @@
                 <a:ea typeface="Calibri"/>
                 <a:cs typeface="Calibri"/>
               </a:rPr>
-              <a:t>Enfas, sinus: 230 V, 10 A, cos φ = 0,80</a:t>
+              <a:t>Enfas, sinus: 230 V, 6,0 A, cos φ = 0,85</a:t>
             </a:r>
           </a:p>
           <a:p xmlns:a="http://schemas.openxmlformats.org/drawingml/2006/main">
@@ -16037,7 +16047,7 @@
                 <a:ea typeface="Calibri"/>
                 <a:cs typeface="Calibri"/>
               </a:rPr>
-              <a:t>ger S = 2,30 kVA och P = 1,84 kW.</a:t>
+              <a:t>ger S = 1,38 kVA och P = 1,17 kW.</a:t>
             </a:r>
           </a:p>
         </p:txBody>
@@ -16421,7 +16431,7 @@
                 <a:ea typeface="Calibri"/>
                 <a:cs typeface="Calibri"/>
               </a:rPr>
-              <a:t>Vid cos φ = 0,80 är sin φ = 0,60.</a:t>
+              <a:t>Vid cos φ = 0,85 är sin φ ≈ 0,53.</a:t>
             </a:r>
           </a:p>
           <a:p xmlns:a="http://schemas.openxmlformats.org/drawingml/2006/main">
@@ -16445,7 +16455,7 @@
                 <a:ea typeface="Calibri"/>
                 <a:cs typeface="Calibri"/>
               </a:rPr>
-              <a:t>S = 2,30 kVA ger Q = 1,38 kvar.</a:t>
+              <a:t>S = 1,38 kVA ger Q ≈ 0,73 kvar.</a:t>
             </a:r>
           </a:p>
         </p:txBody>

--- a/sjoskolan/vecka-40/aktuell/v40_03_Effekt_i_vaxelstromskretsar_elev.pptx
+++ b/sjoskolan/vecka-40/aktuell/v40_03_Effekt_i_vaxelstromskretsar_elev.pptx
@@ -5562,11 +5562,6 @@
             </a:r>
           </a:p>
           <a:p xmlns:a="http://schemas.openxmlformats.org/drawingml/2006/main">
-            <a:r>
-              <a:t/>
-            </a:r>
-          </a:p>
-          <a:p xmlns:a="http://schemas.openxmlformats.org/drawingml/2006/main">
             <a:pPr>
               <a:defRPr sz="2100" b="0">
                 <a:solidFill>
@@ -5577,6 +5572,18 @@
                 <a:cs typeface="Calibri"/>
               </a:defRPr>
             </a:pPr>
+          </a:p>
+          <a:p xmlns:a="http://schemas.openxmlformats.org/drawingml/2006/main">
+            <a:pPr>
+              <a:defRPr sz="2100" b="0">
+                <a:solidFill>
+                  <a:srgbClr val="172F43"/>
+                </a:solidFill>
+                <a:latin typeface="Calibri"/>
+                <a:ea typeface="Calibri"/>
+                <a:cs typeface="Calibri"/>
+              </a:defRPr>
+            </a:pPr>
             <a:r>
               <a:rPr sz="2100" b="0">
                 <a:solidFill>
@@ -5586,12 +5593,7 @@
                 <a:ea typeface="Calibri"/>
                 <a:cs typeface="Calibri"/>
               </a:rPr>
-              <a:t>E = P · t. Med kW och timmar blir enheten kWh.</a:t>
-            </a:r>
-          </a:p>
-          <a:p xmlns:a="http://schemas.openxmlformats.org/drawingml/2006/main">
-            <a:r>
-              <a:t/>
+              <a:t>E = P · t. Med kW (kilowatt) och timmar blir enheten kWh (kilowattimme).</a:t>
             </a:r>
           </a:p>
           <a:p xmlns:a="http://schemas.openxmlformats.org/drawingml/2006/main">
@@ -5605,6 +5607,18 @@
                 <a:cs typeface="Calibri"/>
               </a:defRPr>
             </a:pPr>
+          </a:p>
+          <a:p xmlns:a="http://schemas.openxmlformats.org/drawingml/2006/main">
+            <a:pPr>
+              <a:defRPr sz="2100" b="0">
+                <a:solidFill>
+                  <a:srgbClr val="172F43"/>
+                </a:solidFill>
+                <a:latin typeface="Calibri"/>
+                <a:ea typeface="Calibri"/>
+                <a:cs typeface="Calibri"/>
+              </a:defRPr>
+            </a:pPr>
             <a:r>
               <a:rPr sz="2100" b="0">
                 <a:solidFill>
@@ -5618,9 +5632,16 @@
             </a:r>
           </a:p>
           <a:p xmlns:a="http://schemas.openxmlformats.org/drawingml/2006/main">
-            <a:r>
-              <a:t/>
-            </a:r>
+            <a:pPr>
+              <a:defRPr sz="2100" b="0">
+                <a:solidFill>
+                  <a:srgbClr val="172F43"/>
+                </a:solidFill>
+                <a:latin typeface="Calibri"/>
+                <a:ea typeface="Calibri"/>
+                <a:cs typeface="Calibri"/>
+              </a:defRPr>
+            </a:pPr>
           </a:p>
           <a:p xmlns:a="http://schemas.openxmlformats.org/drawingml/2006/main">
             <a:pPr>
@@ -6332,12 +6353,7 @@
                 <a:ea typeface="Calibri"/>
                 <a:cs typeface="Calibri"/>
               </a:rPr>
-              <a:t>En kondensator kan tillföra kapacitiv Q som tar ut en del av lastens induktiva Q.</a:t>
-            </a:r>
-          </a:p>
-          <a:p xmlns:a="http://schemas.openxmlformats.org/drawingml/2006/main">
-            <a:r>
-              <a:t/>
+              <a:t>Att kompensera betyder att en kondensator tillför kapacitiv reaktiv effekt som tar ut en del av lastens induktiva Q.</a:t>
             </a:r>
           </a:p>
           <a:p xmlns:a="http://schemas.openxmlformats.org/drawingml/2006/main">
@@ -6351,6 +6367,18 @@
                 <a:cs typeface="Calibri"/>
               </a:defRPr>
             </a:pPr>
+          </a:p>
+          <a:p xmlns:a="http://schemas.openxmlformats.org/drawingml/2006/main">
+            <a:pPr>
+              <a:defRPr sz="2100" b="0">
+                <a:solidFill>
+                  <a:srgbClr val="172F43"/>
+                </a:solidFill>
+                <a:latin typeface="Calibri"/>
+                <a:ea typeface="Calibri"/>
+                <a:cs typeface="Calibri"/>
+              </a:defRPr>
+            </a:pPr>
             <a:r>
               <a:rPr sz="2100" b="0">
                 <a:solidFill>
@@ -6364,11 +6392,6 @@
             </a:r>
           </a:p>
           <a:p xmlns:a="http://schemas.openxmlformats.org/drawingml/2006/main">
-            <a:r>
-              <a:t/>
-            </a:r>
-          </a:p>
-          <a:p xmlns:a="http://schemas.openxmlformats.org/drawingml/2006/main">
             <a:pPr>
               <a:defRPr sz="2100" b="0">
                 <a:solidFill>
@@ -6379,6 +6402,18 @@
                 <a:cs typeface="Calibri"/>
               </a:defRPr>
             </a:pPr>
+          </a:p>
+          <a:p xmlns:a="http://schemas.openxmlformats.org/drawingml/2006/main">
+            <a:pPr>
+              <a:defRPr sz="2100" b="0">
+                <a:solidFill>
+                  <a:srgbClr val="172F43"/>
+                </a:solidFill>
+                <a:latin typeface="Calibri"/>
+                <a:ea typeface="Calibri"/>
+                <a:cs typeface="Calibri"/>
+              </a:defRPr>
+            </a:pPr>
             <a:r>
               <a:rPr sz="2100" b="0">
                 <a:solidFill>
@@ -6392,11 +6427,6 @@
             </a:r>
           </a:p>
           <a:p xmlns:a="http://schemas.openxmlformats.org/drawingml/2006/main">
-            <a:r>
-              <a:t/>
-            </a:r>
-          </a:p>
-          <a:p xmlns:a="http://schemas.openxmlformats.org/drawingml/2006/main">
             <a:pPr>
               <a:defRPr sz="2100" b="0">
                 <a:solidFill>
@@ -6407,6 +6437,18 @@
                 <a:cs typeface="Calibri"/>
               </a:defRPr>
             </a:pPr>
+          </a:p>
+          <a:p xmlns:a="http://schemas.openxmlformats.org/drawingml/2006/main">
+            <a:pPr>
+              <a:defRPr sz="2100" b="0">
+                <a:solidFill>
+                  <a:srgbClr val="172F43"/>
+                </a:solidFill>
+                <a:latin typeface="Calibri"/>
+                <a:ea typeface="Calibri"/>
+                <a:cs typeface="Calibri"/>
+              </a:defRPr>
+            </a:pPr>
             <a:r>
               <a:rPr sz="2100" b="0">
                 <a:solidFill>
@@ -6416,7 +6458,29 @@
                 <a:ea typeface="Calibri"/>
                 <a:cs typeface="Calibri"/>
               </a:rPr>
-              <a:t>För full kompensation behövs Qkondensator = −1 500 var. Behovets belopp är 1 500 var.</a:t>
+              <a:t>För full kompensation behövs Q</a:t>
+            </a:r>
+            <a:r>
+              <a:rPr sz="2100" b="0" baseline="-25000">
+                <a:solidFill>
+                  <a:srgbClr val="172F43"/>
+                </a:solidFill>
+                <a:latin typeface="Calibri"/>
+                <a:ea typeface="Calibri"/>
+                <a:cs typeface="Calibri"/>
+              </a:rPr>
+              <a:t>kondensator</a:t>
+            </a:r>
+            <a:r>
+              <a:rPr sz="2100" b="0">
+                <a:solidFill>
+                  <a:srgbClr val="172F43"/>
+                </a:solidFill>
+                <a:latin typeface="Calibri"/>
+                <a:ea typeface="Calibri"/>
+                <a:cs typeface="Calibri"/>
+              </a:rPr>
+              <a:t> = −1 500 var. Behovets belopp är 1 500 var.</a:t>
             </a:r>
           </a:p>
         </p:txBody>
@@ -6473,7 +6537,62 @@
                 <a:ea typeface="Calibri"/>
                 <a:cs typeface="Calibri"/>
               </a:rPr>
-              <a:t>Qtotal = Qlast + Qkondensator</a:t>
+              <a:t>Q</a:t>
+            </a:r>
+            <a:r>
+              <a:rPr sz="2250" b="1" baseline="-25000">
+                <a:solidFill>
+                  <a:srgbClr val="064F91"/>
+                </a:solidFill>
+                <a:latin typeface="Calibri"/>
+                <a:ea typeface="Calibri"/>
+                <a:cs typeface="Calibri"/>
+              </a:rPr>
+              <a:t>total</a:t>
+            </a:r>
+            <a:r>
+              <a:rPr sz="2250" b="1">
+                <a:solidFill>
+                  <a:srgbClr val="064F91"/>
+                </a:solidFill>
+                <a:latin typeface="Calibri"/>
+                <a:ea typeface="Calibri"/>
+                <a:cs typeface="Calibri"/>
+              </a:rPr>
+              <a:t> = Q</a:t>
+            </a:r>
+            <a:r>
+              <a:rPr sz="2250" b="1" baseline="-25000">
+                <a:solidFill>
+                  <a:srgbClr val="064F91"/>
+                </a:solidFill>
+                <a:latin typeface="Calibri"/>
+                <a:ea typeface="Calibri"/>
+                <a:cs typeface="Calibri"/>
+              </a:rPr>
+              <a:t>last</a:t>
+            </a:r>
+            <a:r>
+              <a:rPr sz="2250" b="1">
+                <a:solidFill>
+                  <a:srgbClr val="064F91"/>
+                </a:solidFill>
+                <a:latin typeface="Calibri"/>
+                <a:ea typeface="Calibri"/>
+                <a:cs typeface="Calibri"/>
+              </a:rPr>
+              <a:t> + Q</a:t>
+            </a:r>
+            <a:r>
+              <a:rPr sz="2250" b="1" baseline="-25000">
+                <a:solidFill>
+                  <a:srgbClr val="064F91"/>
+                </a:solidFill>
+                <a:latin typeface="Calibri"/>
+                <a:ea typeface="Calibri"/>
+                <a:cs typeface="Calibri"/>
+              </a:rPr>
+              <a:t>kondensator</a:t>
             </a:r>
           </a:p>
         </p:txBody>
@@ -6860,7 +6979,29 @@
                 <a:ea typeface="Calibri"/>
                 <a:cs typeface="Calibri"/>
               </a:rPr>
-              <a:t>Pförlust = I²R</a:t>
+              <a:t>P</a:t>
+            </a:r>
+            <a:r>
+              <a:rPr sz="2250" b="1" baseline="-25000">
+                <a:solidFill>
+                  <a:srgbClr val="064F91"/>
+                </a:solidFill>
+                <a:latin typeface="Calibri"/>
+                <a:ea typeface="Calibri"/>
+                <a:cs typeface="Calibri"/>
+              </a:rPr>
+              <a:t>förlust</a:t>
+            </a:r>
+            <a:r>
+              <a:rPr sz="2250" b="1">
+                <a:solidFill>
+                  <a:srgbClr val="064F91"/>
+                </a:solidFill>
+                <a:latin typeface="Calibri"/>
+                <a:ea typeface="Calibri"/>
+                <a:cs typeface="Calibri"/>
+              </a:rPr>
+              <a:t> = I²R</a:t>
             </a:r>
           </a:p>
         </p:txBody>
@@ -7134,12 +7275,7 @@
                 <a:ea typeface="Calibri"/>
                 <a:cs typeface="Calibri"/>
               </a:rPr>
-              <a:t>PF = P/S gäller även när strömmen är förvrängd.</a:t>
-            </a:r>
-          </a:p>
-          <a:p xmlns:a="http://schemas.openxmlformats.org/drawingml/2006/main">
-            <a:r>
-              <a:t/>
+              <a:t>PF = P/S gäller även när strömmen är förvrängd av övertoner (strömmar med 2, 3, 5 … gånger nätfrekvensen, till exempel från elektronik).</a:t>
             </a:r>
           </a:p>
           <a:p xmlns:a="http://schemas.openxmlformats.org/drawingml/2006/main">
@@ -7153,6 +7289,18 @@
                 <a:cs typeface="Calibri"/>
               </a:defRPr>
             </a:pPr>
+          </a:p>
+          <a:p xmlns:a="http://schemas.openxmlformats.org/drawingml/2006/main">
+            <a:pPr>
+              <a:defRPr sz="2100" b="0">
+                <a:solidFill>
+                  <a:srgbClr val="172F43"/>
+                </a:solidFill>
+                <a:latin typeface="Calibri"/>
+                <a:ea typeface="Calibri"/>
+                <a:cs typeface="Calibri"/>
+              </a:defRPr>
+            </a:pPr>
             <a:r>
               <a:rPr sz="2100" b="0">
                 <a:solidFill>
@@ -7166,11 +7314,6 @@
             </a:r>
           </a:p>
           <a:p xmlns:a="http://schemas.openxmlformats.org/drawingml/2006/main">
-            <a:r>
-              <a:t/>
-            </a:r>
-          </a:p>
-          <a:p xmlns:a="http://schemas.openxmlformats.org/drawingml/2006/main">
             <a:pPr>
               <a:defRPr sz="2100" b="0">
                 <a:solidFill>
@@ -7181,6 +7324,18 @@
                 <a:cs typeface="Calibri"/>
               </a:defRPr>
             </a:pPr>
+          </a:p>
+          <a:p xmlns:a="http://schemas.openxmlformats.org/drawingml/2006/main">
+            <a:pPr>
+              <a:defRPr sz="2100" b="0">
+                <a:solidFill>
+                  <a:srgbClr val="172F43"/>
+                </a:solidFill>
+                <a:latin typeface="Calibri"/>
+                <a:ea typeface="Calibri"/>
+                <a:cs typeface="Calibri"/>
+              </a:defRPr>
+            </a:pPr>
             <a:r>
               <a:rPr sz="2100" b="0">
                 <a:solidFill>
@@ -7194,9 +7349,16 @@
             </a:r>
           </a:p>
           <a:p xmlns:a="http://schemas.openxmlformats.org/drawingml/2006/main">
-            <a:r>
-              <a:t/>
-            </a:r>
+            <a:pPr>
+              <a:defRPr sz="2100" b="0">
+                <a:solidFill>
+                  <a:srgbClr val="172F43"/>
+                </a:solidFill>
+                <a:latin typeface="Calibri"/>
+                <a:ea typeface="Calibri"/>
+                <a:cs typeface="Calibri"/>
+              </a:defRPr>
+            </a:pPr>
           </a:p>
           <a:p xmlns:a="http://schemas.openxmlformats.org/drawingml/2006/main">
             <a:pPr>
@@ -7492,12 +7654,7 @@
                 <a:ea typeface="Calibri"/>
                 <a:cs typeface="Calibri"/>
               </a:rPr>
-              <a:t>Kan du förklara skillnaden mellan W, var och VA?</a:t>
-            </a:r>
-          </a:p>
-          <a:p xmlns:a="http://schemas.openxmlformats.org/drawingml/2006/main">
-            <a:r>
-              <a:t/>
+              <a:t>Kan du förklara skillnaden mellan W (watt, aktiv effekt), var (voltampere reaktiv, reaktiv effekt) och VA (voltampere, skenbar effekt)?</a:t>
             </a:r>
           </a:p>
           <a:p xmlns:a="http://schemas.openxmlformats.org/drawingml/2006/main">
@@ -7511,6 +7668,18 @@
                 <a:cs typeface="Calibri"/>
               </a:defRPr>
             </a:pPr>
+          </a:p>
+          <a:p xmlns:a="http://schemas.openxmlformats.org/drawingml/2006/main">
+            <a:pPr>
+              <a:defRPr sz="2100" b="0">
+                <a:solidFill>
+                  <a:srgbClr val="172F43"/>
+                </a:solidFill>
+                <a:latin typeface="Calibri"/>
+                <a:ea typeface="Calibri"/>
+                <a:cs typeface="Calibri"/>
+              </a:defRPr>
+            </a:pPr>
             <a:r>
               <a:rPr sz="2100" b="0">
                 <a:solidFill>
@@ -7524,11 +7693,6 @@
             </a:r>
           </a:p>
           <a:p xmlns:a="http://schemas.openxmlformats.org/drawingml/2006/main">
-            <a:r>
-              <a:t/>
-            </a:r>
-          </a:p>
-          <a:p xmlns:a="http://schemas.openxmlformats.org/drawingml/2006/main">
             <a:pPr>
               <a:defRPr sz="2100" b="0">
                 <a:solidFill>
@@ -7539,6 +7703,18 @@
                 <a:cs typeface="Calibri"/>
               </a:defRPr>
             </a:pPr>
+          </a:p>
+          <a:p xmlns:a="http://schemas.openxmlformats.org/drawingml/2006/main">
+            <a:pPr>
+              <a:defRPr sz="2100" b="0">
+                <a:solidFill>
+                  <a:srgbClr val="172F43"/>
+                </a:solidFill>
+                <a:latin typeface="Calibri"/>
+                <a:ea typeface="Calibri"/>
+                <a:cs typeface="Calibri"/>
+              </a:defRPr>
+            </a:pPr>
             <a:r>
               <a:rPr sz="2100" b="0">
                 <a:solidFill>
@@ -7552,9 +7728,16 @@
             </a:r>
           </a:p>
           <a:p xmlns:a="http://schemas.openxmlformats.org/drawingml/2006/main">
-            <a:r>
-              <a:t/>
-            </a:r>
+            <a:pPr>
+              <a:defRPr sz="2100" b="0">
+                <a:solidFill>
+                  <a:srgbClr val="172F43"/>
+                </a:solidFill>
+                <a:latin typeface="Calibri"/>
+                <a:ea typeface="Calibri"/>
+                <a:cs typeface="Calibri"/>
+              </a:defRPr>
+            </a:pPr>
           </a:p>
           <a:p xmlns:a="http://schemas.openxmlformats.org/drawingml/2006/main">
             <a:pPr>
@@ -7850,12 +8033,7 @@
                 <a:ea typeface="Calibri"/>
                 <a:cs typeface="Calibri"/>
               </a:rPr>
-              <a:t>En enfaslast arbetar vid U = 230 V RMS och P = 1 150 W.</a:t>
-            </a:r>
-          </a:p>
-          <a:p xmlns:a="http://schemas.openxmlformats.org/drawingml/2006/main">
-            <a:r>
-              <a:t/>
+              <a:t>En enfaslast arbetar vid spänningen U = 230 V (effektivvärde) och den aktiva effekten P = 1 150 W.</a:t>
             </a:r>
           </a:p>
           <a:p xmlns:a="http://schemas.openxmlformats.org/drawingml/2006/main">
@@ -7869,6 +8047,18 @@
                 <a:cs typeface="Calibri"/>
               </a:defRPr>
             </a:pPr>
+          </a:p>
+          <a:p xmlns:a="http://schemas.openxmlformats.org/drawingml/2006/main">
+            <a:pPr>
+              <a:defRPr sz="2100" b="0">
+                <a:solidFill>
+                  <a:srgbClr val="172F43"/>
+                </a:solidFill>
+                <a:latin typeface="Calibri"/>
+                <a:ea typeface="Calibri"/>
+                <a:cs typeface="Calibri"/>
+              </a:defRPr>
+            </a:pPr>
             <a:r>
               <a:rPr sz="2100" b="0">
                 <a:solidFill>
@@ -7882,9 +8072,16 @@
             </a:r>
           </a:p>
           <a:p xmlns:a="http://schemas.openxmlformats.org/drawingml/2006/main">
-            <a:r>
-              <a:t/>
-            </a:r>
+            <a:pPr>
+              <a:defRPr sz="2100" b="0">
+                <a:solidFill>
+                  <a:srgbClr val="172F43"/>
+                </a:solidFill>
+                <a:latin typeface="Calibri"/>
+                <a:ea typeface="Calibri"/>
+                <a:cs typeface="Calibri"/>
+              </a:defRPr>
+            </a:pPr>
           </a:p>
           <a:p xmlns:a="http://schemas.openxmlformats.org/drawingml/2006/main">
             <a:pPr>
@@ -8966,12 +9163,7 @@
                 <a:ea typeface="Calibri"/>
                 <a:cs typeface="Calibri"/>
               </a:rPr>
-              <a:t>Effektfaktorn PF = P/S saknar enhet.</a:t>
-            </a:r>
-          </a:p>
-          <a:p xmlns:a="http://schemas.openxmlformats.org/drawingml/2006/main">
-            <a:r>
-              <a:t/>
+              <a:t>Effektfaktorn förkortas PF (power factor). PF = P/S, där S är den skenbara effekten (se nedan). PF saknar enhet och ligger mellan 0 och 1.</a:t>
             </a:r>
           </a:p>
           <a:p xmlns:a="http://schemas.openxmlformats.org/drawingml/2006/main">
@@ -8985,6 +9177,18 @@
                 <a:cs typeface="Calibri"/>
               </a:defRPr>
             </a:pPr>
+          </a:p>
+          <a:p xmlns:a="http://schemas.openxmlformats.org/drawingml/2006/main">
+            <a:pPr>
+              <a:defRPr sz="1650" b="0">
+                <a:solidFill>
+                  <a:srgbClr val="172F43"/>
+                </a:solidFill>
+                <a:latin typeface="Calibri"/>
+                <a:ea typeface="Calibri"/>
+                <a:cs typeface="Calibri"/>
+              </a:defRPr>
+            </a:pPr>
             <a:r>
               <a:rPr sz="1650" b="0">
                 <a:solidFill>
@@ -8994,13 +9198,20 @@
                 <a:ea typeface="Calibri"/>
                 <a:cs typeface="Calibri"/>
               </a:rPr>
-              <a:t>För rena sinussignaler är PF = cos φ. Lägre PF innebär större ström för samma U och P.</a:t>
-            </a:r>
-          </a:p>
-          <a:p xmlns:a="http://schemas.openxmlformats.org/drawingml/2006/main">
-            <a:r>
-              <a:t/>
-            </a:r>
+              <a:t>För rena sinussignaler är PF = cos φ, cosinus för fasvinkeln φ mellan spänning och ström. Lägre PF innebär större ström för samma U och P.</a:t>
+            </a:r>
+          </a:p>
+          <a:p xmlns:a="http://schemas.openxmlformats.org/drawingml/2006/main">
+            <a:pPr>
+              <a:defRPr sz="1650" b="0">
+                <a:solidFill>
+                  <a:srgbClr val="172F43"/>
+                </a:solidFill>
+                <a:latin typeface="Calibri"/>
+                <a:ea typeface="Calibri"/>
+                <a:cs typeface="Calibri"/>
+              </a:defRPr>
+            </a:pPr>
           </a:p>
           <a:p xmlns:a="http://schemas.openxmlformats.org/drawingml/2006/main">
             <a:pPr>
@@ -10777,12 +10988,7 @@
                 <a:ea typeface="Calibri"/>
                 <a:cs typeface="Calibri"/>
               </a:rPr>
-              <a:t>Ideal reaktiv effekt beskriver energiutbyte som går fram och tillbaka mellan källa och reaktiva komponenter.</a:t>
-            </a:r>
-          </a:p>
-          <a:p xmlns:a="http://schemas.openxmlformats.org/drawingml/2006/main">
-            <a:r>
-              <a:t/>
+              <a:t>Reaktiv effekt Q beskriver energi som går fram och tillbaka mellan källan och spolar eller kondensatorer. Den förbrukas inte, men ger ändå ström i ledningarna.</a:t>
             </a:r>
           </a:p>
           <a:p xmlns:a="http://schemas.openxmlformats.org/drawingml/2006/main">
@@ -10796,6 +11002,18 @@
                 <a:cs typeface="Calibri"/>
               </a:defRPr>
             </a:pPr>
+          </a:p>
+          <a:p xmlns:a="http://schemas.openxmlformats.org/drawingml/2006/main">
+            <a:pPr>
+              <a:defRPr sz="1650" b="0">
+                <a:solidFill>
+                  <a:srgbClr val="172F43"/>
+                </a:solidFill>
+                <a:latin typeface="Calibri"/>
+                <a:ea typeface="Calibri"/>
+                <a:cs typeface="Calibri"/>
+              </a:defRPr>
+            </a:pPr>
             <a:r>
               <a:rPr sz="1650" b="0">
                 <a:solidFill>
@@ -10809,11 +11027,6 @@
             </a:r>
           </a:p>
           <a:p xmlns:a="http://schemas.openxmlformats.org/drawingml/2006/main">
-            <a:r>
-              <a:t/>
-            </a:r>
-          </a:p>
-          <a:p xmlns:a="http://schemas.openxmlformats.org/drawingml/2006/main">
             <a:pPr>
               <a:defRPr sz="1650" b="0">
                 <a:solidFill>
@@ -10824,6 +11037,18 @@
                 <a:cs typeface="Calibri"/>
               </a:defRPr>
             </a:pPr>
+          </a:p>
+          <a:p xmlns:a="http://schemas.openxmlformats.org/drawingml/2006/main">
+            <a:pPr>
+              <a:defRPr sz="1650" b="0">
+                <a:solidFill>
+                  <a:srgbClr val="172F43"/>
+                </a:solidFill>
+                <a:latin typeface="Calibri"/>
+                <a:ea typeface="Calibri"/>
+                <a:cs typeface="Calibri"/>
+              </a:defRPr>
+            </a:pPr>
             <a:r>
               <a:rPr sz="1650" b="0">
                 <a:solidFill>
@@ -10833,13 +11058,20 @@
                 <a:ea typeface="Calibri"/>
                 <a:cs typeface="Calibri"/>
               </a:rPr>
-              <a:t>Exempel: S = 2 300 VA och P = 1 150 W ger |Q| ≈ 1 991,86 var.</a:t>
-            </a:r>
-          </a:p>
-          <a:p xmlns:a="http://schemas.openxmlformats.org/drawingml/2006/main">
-            <a:r>
-              <a:t/>
-            </a:r>
+              <a:t>Exempel: S = 2 300 VA och P = 1 150 W ger |Q| ≈ 1 991,86 var. Enheten var betyder voltampere reaktiv.</a:t>
+            </a:r>
+          </a:p>
+          <a:p xmlns:a="http://schemas.openxmlformats.org/drawingml/2006/main">
+            <a:pPr>
+              <a:defRPr sz="1650" b="0">
+                <a:solidFill>
+                  <a:srgbClr val="172F43"/>
+                </a:solidFill>
+                <a:latin typeface="Calibri"/>
+                <a:ea typeface="Calibri"/>
+                <a:cs typeface="Calibri"/>
+              </a:defRPr>
+            </a:pPr>
           </a:p>
           <a:p xmlns:a="http://schemas.openxmlformats.org/drawingml/2006/main">
             <a:pPr>

--- a/sjoskolan/vecka-40/aktuell/v40_03_Effekt_i_vaxelstromskretsar_elev.pptx
+++ b/sjoskolan/vecka-40/aktuell/v40_03_Effekt_i_vaxelstromskretsar_elev.pptx
@@ -5228,6 +5228,10 @@
             <a:noFill/>
           </a:ln>
         </p:spPr>
+        <p:txBody xmlns:a="http://schemas.openxmlformats.org/drawingml/2006/main">
+          <a:bodyPr/>
+          <a:p/>
+        </p:txBody>
       </p:sp>
       <p:sp>
         <p:nvSpPr>
@@ -6388,7 +6392,7 @@
                 <a:ea typeface="Calibri"/>
                 <a:cs typeface="Calibri"/>
               </a:rPr>
-              <a:t>Exempel: P = 2 000 W och PF = 0,80. S = 2 000/0,80 = 2 500 VA.</a:t>
+              <a:t>Exempel: pumpmotorn P = 1 380 W och PF = 0,80. S = 1 380/0,80 = 1 725 VA.</a:t>
             </a:r>
           </a:p>
           <a:p xmlns:a="http://schemas.openxmlformats.org/drawingml/2006/main">
@@ -6423,7 +6427,7 @@
                 <a:ea typeface="Calibri"/>
                 <a:cs typeface="Calibri"/>
               </a:rPr>
-              <a:t>Q = √(2 500² − 2 000²) = +1 500 var.</a:t>
+              <a:t>Q = √(1 725² − 1 380²) = +1 035 var.</a:t>
             </a:r>
           </a:p>
           <a:p xmlns:a="http://schemas.openxmlformats.org/drawingml/2006/main">
@@ -6480,7 +6484,7 @@
                 <a:ea typeface="Calibri"/>
                 <a:cs typeface="Calibri"/>
               </a:rPr>
-              <a:t> = −1 500 var. Behovets belopp är 1 500 var.</a:t>
+              <a:t> = −1 035 var. Behovets belopp är 1 035 var.</a:t>
             </a:r>
           </a:p>
         </p:txBody>
@@ -6894,7 +6898,7 @@
                 <a:ea typeface="Calibri"/>
                 <a:cs typeface="Calibri"/>
               </a:rPr>
-              <a:t>När strömmen minskar från 10 A till 5 A återstår (5/10)² = 0,25 av ledningsförlusten.</a:t>
+              <a:t>När strömmen minskar från 12 A till 6 A återstår (6/12)² = 0,25 av ledningsförlusten.</a:t>
             </a:r>
           </a:p>
           <a:p xmlns:a="http://schemas.openxmlformats.org/drawingml/2006/main">
@@ -8434,7 +8438,7 @@
                 <a:ea typeface="Calibri"/>
                 <a:cs typeface="Calibri"/>
               </a:rPr>
-              <a:t>5,00 A</a:t>
+              <a:t>6,00 A</a:t>
             </a:r>
           </a:p>
         </p:txBody>
@@ -8548,7 +8552,7 @@
                 <a:ea typeface="Calibri"/>
                 <a:cs typeface="Calibri"/>
               </a:rPr>
-              <a:t>10,00 A</a:t>
+              <a:t>12,00 A</a:t>
             </a:r>
           </a:p>
         </p:txBody>
@@ -8633,7 +8637,7 @@
                 <a:ea typeface="Calibri"/>
                 <a:cs typeface="Calibri"/>
               </a:rPr>
-              <a:t>Vid effektfaktorn 1,00: I = P/U = 1 150/230 = 5,00 A.</a:t>
+              <a:t>Exempel: ett värmeelement på 1 380 W vid 230 V har effektfaktorn 1,00: I = P/U = 1 380/230 = 6,00 A.</a:t>
             </a:r>
           </a:p>
           <a:p xmlns:a="http://schemas.openxmlformats.org/drawingml/2006/main">
@@ -8992,7 +8996,7 @@
                 <a:ea typeface="Calibri"/>
                 <a:cs typeface="Calibri"/>
               </a:rPr>
-              <a:t>5,00 A</a:t>
+              <a:t>6,00 A</a:t>
             </a:r>
           </a:p>
         </p:txBody>
@@ -9106,7 +9110,7 @@
                 <a:ea typeface="Calibri"/>
                 <a:cs typeface="Calibri"/>
               </a:rPr>
-              <a:t>10,00 A</a:t>
+              <a:t>12,00 A</a:t>
             </a:r>
           </a:p>
         </p:txBody>
@@ -9621,7 +9625,7 @@
                 <a:ea typeface="Calibri"/>
                 <a:cs typeface="Calibri"/>
               </a:rPr>
-              <a:t>5,00 A</a:t>
+              <a:t>6,00 A</a:t>
             </a:r>
           </a:p>
         </p:txBody>
@@ -9735,7 +9739,7 @@
                 <a:ea typeface="Calibri"/>
                 <a:cs typeface="Calibri"/>
               </a:rPr>
-              <a:t>10,00 A</a:t>
+              <a:t>12,00 A</a:t>
             </a:r>
           </a:p>
         </p:txBody>
@@ -9820,7 +9824,7 @@
                 <a:ea typeface="Calibri"/>
                 <a:cs typeface="Calibri"/>
               </a:rPr>
-              <a:t>Vid PF = 1,00: I = 1 150/(230 · 1) = 5,00 A.</a:t>
+              <a:t>Exempel: en pumpmotor på 1 380 W vid 230 V.</a:t>
             </a:r>
           </a:p>
           <a:p xmlns:a="http://schemas.openxmlformats.org/drawingml/2006/main">
@@ -9848,7 +9852,7 @@
                 <a:ea typeface="Calibri"/>
                 <a:cs typeface="Calibri"/>
               </a:rPr>
-              <a:t>Vid PF = 0,50: I = 1 150/(230 · 0,50) = 10,00 A.</a:t>
+              <a:t>Vid PF = 1,00: I = 1 380/(230 · 1) = 6,00 A.</a:t>
             </a:r>
           </a:p>
           <a:p xmlns:a="http://schemas.openxmlformats.org/drawingml/2006/main">
@@ -9876,7 +9880,7 @@
                 <a:ea typeface="Calibri"/>
                 <a:cs typeface="Calibri"/>
               </a:rPr>
-              <a:t>Strömmen fördubblas. Lastens aktiva effekt är fortfarande 1 150 W.</a:t>
+              <a:t>Vid PF = 0,50: I = 1 380/(230 · 0,50) = 12,00 A. Strömmen fördubblas, men den aktiva effekten är fortfarande 1 380 W.</a:t>
             </a:r>
           </a:p>
         </p:txBody>
@@ -10263,7 +10267,7 @@
                 <a:ea typeface="Calibri"/>
                 <a:cs typeface="Calibri"/>
               </a:rPr>
-              <a:t>Vid PF = 0,50: S = 1 150/0,50 = 2 300 VA.</a:t>
+              <a:t>Pumpmotorn vid PF = 0,50: S = 1 380/0,50 = 2 760 VA.</a:t>
             </a:r>
           </a:p>
           <a:p xmlns:a="http://schemas.openxmlformats.org/drawingml/2006/main">
@@ -10291,7 +10295,7 @@
                 <a:ea typeface="Calibri"/>
                 <a:cs typeface="Calibri"/>
               </a:rPr>
-              <a:t>Kontroll: 230 V · 10 A = 2 300 VA.</a:t>
+              <a:t>Kontroll: 230 V · 12 A = 2 760 VA.</a:t>
             </a:r>
           </a:p>
         </p:txBody>
@@ -10608,6 +10612,10 @@
             </a:solidFill>
           </a:ln>
         </p:spPr>
+        <p:txBody xmlns:a="http://schemas.openxmlformats.org/drawingml/2006/main">
+          <a:bodyPr/>
+          <a:p/>
+        </p:txBody>
       </p:sp>
       <p:sp>
         <p:nvSpPr>
@@ -10647,6 +10655,10 @@
             </a:solidFill>
           </a:ln>
         </p:spPr>
+        <p:txBody xmlns:a="http://schemas.openxmlformats.org/drawingml/2006/main">
+          <a:bodyPr/>
+          <a:p/>
+        </p:txBody>
       </p:sp>
       <p:sp>
         <p:nvSpPr>
@@ -10686,6 +10698,10 @@
             </a:solidFill>
           </a:ln>
         </p:spPr>
+        <p:txBody xmlns:a="http://schemas.openxmlformats.org/drawingml/2006/main">
+          <a:bodyPr/>
+          <a:p/>
+        </p:txBody>
       </p:sp>
       <p:sp>
         <p:nvSpPr>
@@ -10725,6 +10741,10 @@
             </a:solidFill>
           </a:ln>
         </p:spPr>
+        <p:txBody xmlns:a="http://schemas.openxmlformats.org/drawingml/2006/main">
+          <a:bodyPr/>
+          <a:p/>
+        </p:txBody>
       </p:sp>
       <p:sp>
         <p:nvSpPr>
@@ -10764,6 +10784,10 @@
             </a:solidFill>
           </a:ln>
         </p:spPr>
+        <p:txBody xmlns:a="http://schemas.openxmlformats.org/drawingml/2006/main">
+          <a:bodyPr/>
+          <a:p/>
+        </p:txBody>
       </p:sp>
       <p:sp>
         <p:nvSpPr>
@@ -10817,7 +10841,7 @@
                 <a:ea typeface="Calibri"/>
                 <a:cs typeface="Calibri"/>
               </a:rPr>
-              <a:t>P = 1 150 W</a:t>
+              <a:t>P = 1 380 W</a:t>
             </a:r>
           </a:p>
         </p:txBody>
@@ -10874,7 +10898,7 @@
                 <a:ea typeface="Calibri"/>
                 <a:cs typeface="Calibri"/>
               </a:rPr>
-              <a:t>Q ≈ 1 992 var</a:t>
+              <a:t>Q ≈ 2 390 var</a:t>
             </a:r>
           </a:p>
         </p:txBody>
@@ -10931,7 +10955,7 @@
                 <a:ea typeface="Calibri"/>
                 <a:cs typeface="Calibri"/>
               </a:rPr>
-              <a:t>S = 2 300 VA</a:t>
+              <a:t>S = 2 760 VA</a:t>
             </a:r>
           </a:p>
         </p:txBody>
@@ -11058,7 +11082,7 @@
                 <a:ea typeface="Calibri"/>
                 <a:cs typeface="Calibri"/>
               </a:rPr>
-              <a:t>Exempel: S = 2 300 VA och P = 1 150 W ger |Q| ≈ 1 991,86 var. Enheten var betyder voltampere reaktiv.</a:t>
+              <a:t>Exempel: S = 2 760 VA och P = 1 380 W ger |Q| ≈ 2 390,23 var. Enheten var betyder voltampere reaktiv.</a:t>
             </a:r>
           </a:p>
           <a:p xmlns:a="http://schemas.openxmlformats.org/drawingml/2006/main">

--- a/sjoskolan/vecka-40/aktuell/v40_03_Effekt_i_vaxelstromskretsar_elev.pptx
+++ b/sjoskolan/vecka-40/aktuell/v40_03_Effekt_i_vaxelstromskretsar_elev.pptx
@@ -8037,7 +8037,7 @@
                 <a:ea typeface="Calibri"/>
                 <a:cs typeface="Calibri"/>
               </a:rPr>
-              <a:t>En enfaslast arbetar vid spänningen U = 230 V (effektivvärde) och den aktiva effekten P = 1 150 W.</a:t>
+              <a:t>I labben arbetar en enfaslast vid spänningen U = 230 V (effektivvärde). Den aktiva effekten P räknas fram ur ditt namn.</a:t>
             </a:r>
           </a:p>
           <a:p xmlns:a="http://schemas.openxmlformats.org/drawingml/2006/main">

--- a/sjoskolan/vecka-40/aktuell/v40_03_Effekt_i_vaxelstromskretsar_elev.pptx
+++ b/sjoskolan/vecka-40/aktuell/v40_03_Effekt_i_vaxelstromskretsar_elev.pptx
@@ -633,7 +633,7 @@
           </a:p>
           <a:p xmlns:a="http://schemas.openxmlformats.org/drawingml/2006/main">
             <a:r>
-              <a:t>Facit: I = 20,00 A. S = 4 600 VA. P hålls oförändrad i modellen.</a:t>
+              <a:t>Facit: I = 30,00 A. S = 6 900 VA. P hålls oförändrad i modellen.</a:t>
             </a:r>
           </a:p>
           <a:p xmlns:a="http://schemas.openxmlformats.org/drawingml/2006/main">
@@ -5998,13 +5998,20 @@
                 <a:ea typeface="Calibri"/>
                 <a:cs typeface="Calibri"/>
               </a:rPr>
-              <a:t>En enfaslast tar P = 2 300 W vid U = 230 V och PF = 0,50.</a:t>
-            </a:r>
-          </a:p>
-          <a:p xmlns:a="http://schemas.openxmlformats.org/drawingml/2006/main">
-            <a:r>
-              <a:t/>
-            </a:r>
+              <a:t>En enfaslast tar P = 4 140 W vid U = 230 V och PF = 0,60.</a:t>
+            </a:r>
+          </a:p>
+          <a:p xmlns:a="http://schemas.openxmlformats.org/drawingml/2006/main">
+            <a:pPr>
+              <a:defRPr sz="2100" b="0">
+                <a:solidFill>
+                  <a:srgbClr val="172F43"/>
+                </a:solidFill>
+                <a:latin typeface="Calibri"/>
+                <a:ea typeface="Calibri"/>
+                <a:cs typeface="Calibri"/>
+              </a:defRPr>
+            </a:pPr>
           </a:p>
           <a:p xmlns:a="http://schemas.openxmlformats.org/drawingml/2006/main">
             <a:pPr>

--- a/sjoskolan/vecka-40/aktuell/v40_03_Effekt_i_vaxelstromskretsar_elev.pptx
+++ b/sjoskolan/vecka-40/aktuell/v40_03_Effekt_i_vaxelstromskretsar_elev.pptx
@@ -7987,7 +7987,7 @@
                 <a:ea typeface="Calibri"/>
                 <a:cs typeface="Calibri"/>
               </a:rPr>
-              <a:t>Det här behövs i labben</a:t>
+              <a:t>Det här ska du kunna</a:t>
             </a:r>
           </a:p>
         </p:txBody>
@@ -8044,7 +8044,7 @@
                 <a:ea typeface="Calibri"/>
                 <a:cs typeface="Calibri"/>
               </a:rPr>
-              <a:t>I labben arbetar en enfaslast vid spänningen U = 230 V (effektivvärde). Den aktiva effekten P räknas fram ur ditt namn.</a:t>
+              <a:t>Skilja på aktiv effekt P, reaktiv effekt Q och skenbar effekt S.</a:t>
             </a:r>
           </a:p>
           <a:p xmlns:a="http://schemas.openxmlformats.org/drawingml/2006/main">
@@ -8079,7 +8079,7 @@
                 <a:ea typeface="Calibri"/>
                 <a:cs typeface="Calibri"/>
               </a:rPr>
-              <a:t>Jämför effektfaktorn 1,00 med 0,50. Behåll samma U och P.</a:t>
+              <a:t>Räkna strömmen när U, P och effektfaktorn PF är givna.</a:t>
             </a:r>
           </a:p>
           <a:p xmlns:a="http://schemas.openxmlformats.org/drawingml/2006/main">
@@ -8114,7 +8114,7 @@
                 <a:ea typeface="Calibri"/>
                 <a:cs typeface="Calibri"/>
               </a:rPr>
-              <a:t>Förklara vad som händer med strömmen och vad som är oförändrat.</a:t>
+              <a:t>Förklara varför lägre effektfaktor ger större ström vid samma P och U.</a:t>
             </a:r>
           </a:p>
         </p:txBody>
@@ -11813,7 +11813,7 @@
                 <a:ea typeface="Calibri"/>
                 <a:cs typeface="Calibri"/>
               </a:rPr>
-              <a:t>Förutsäg strömmen vid PF = 1,00. Läs av och registrera värdet.</a:t>
+              <a:t>Du får en egen effekt P ur ditt namn. Förutsäg strömmen vid PF = 1,00, läs av och registrera värdet.</a:t>
             </a:r>
           </a:p>
           <a:p xmlns:a="http://schemas.openxmlformats.org/drawingml/2006/main">

--- a/sjoskolan/vecka-40/aktuell/v40_03_Effekt_i_vaxelstromskretsar_elev.pptx
+++ b/sjoskolan/vecka-40/aktuell/v40_03_Effekt_i_vaxelstromskretsar_elev.pptx
@@ -526,31 +526,7 @@
         <p:txBody>
           <a:bodyPr xmlns:a="http://schemas.openxmlformats.org/drawingml/2006/main"/>
           <a:lstStyle xmlns:a="http://schemas.openxmlformats.org/drawingml/2006/main"/>
-          <a:p xmlns:a="http://schemas.openxmlformats.org/drawingml/2006/main">
-            <a:r>
-              <a:t>Skilj anläggningens effektbehov från ackumulerad energianvändning.</a:t>
-            </a:r>
-          </a:p>
-          <a:p xmlns:a="http://schemas.openxmlformats.org/drawingml/2006/main">
-            <a:r>
-              <a:t/>
-            </a:r>
-          </a:p>
-          <a:p xmlns:a="http://schemas.openxmlformats.org/drawingml/2006/main">
-            <a:r>
-              <a:t>Webbgenomgång: https://nj22az.github.io/sjoskolan/vecka-40/aktuell/Genomgang.html?del=effekt&amp;avsnitt=energi</a:t>
-            </a:r>
-          </a:p>
-          <a:p xmlns:a="http://schemas.openxmlformats.org/drawingml/2006/main">
-            <a:r>
-              <a:t/>
-            </a:r>
-          </a:p>
-          <a:p xmlns:a="http://schemas.openxmlformats.org/drawingml/2006/main">
-            <a:r>
-              <a:t>Guidad labb: https://nj22az.github.io/sjoskolan/vaxelstromslabbet/?lage=guidad&amp;del=effekt</a:t>
-            </a:r>
-          </a:p>
+          <a:p xmlns:a="http://schemas.openxmlformats.org/drawingml/2006/main"/>
         </p:txBody>
       </p:sp>
       <p:sp>
@@ -616,46 +592,7 @@
         <p:txBody>
           <a:bodyPr xmlns:a="http://schemas.openxmlformats.org/drawingml/2006/main"/>
           <a:lstStyle xmlns:a="http://schemas.openxmlformats.org/drawingml/2006/main"/>
-          <a:p xmlns:a="http://schemas.openxmlformats.org/drawingml/2006/main">
-            <a:r>
-              <a:t>Be eleven ange vad som hålls konstant innan formeln används.</a:t>
-            </a:r>
-          </a:p>
-          <a:p xmlns:a="http://schemas.openxmlformats.org/drawingml/2006/main">
-            <a:r>
-              <a:t/>
-            </a:r>
-          </a:p>
-          <a:p xmlns:a="http://schemas.openxmlformats.org/drawingml/2006/main">
-            <a:r>
-              <a:t>Kontrollfråga: Räkna innan facit visas.</a:t>
-            </a:r>
-          </a:p>
-          <a:p xmlns:a="http://schemas.openxmlformats.org/drawingml/2006/main">
-            <a:r>
-              <a:t>Facit: I = 30,00 A. S = 6 900 VA. P hålls oförändrad i modellen.</a:t>
-            </a:r>
-          </a:p>
-          <a:p xmlns:a="http://schemas.openxmlformats.org/drawingml/2006/main">
-            <a:r>
-              <a:t/>
-            </a:r>
-          </a:p>
-          <a:p xmlns:a="http://schemas.openxmlformats.org/drawingml/2006/main">
-            <a:r>
-              <a:t>Webbgenomgång: https://nj22az.github.io/sjoskolan/vecka-40/aktuell/Genomgang.html?del=effekt&amp;avsnitt=eget</a:t>
-            </a:r>
-          </a:p>
-          <a:p xmlns:a="http://schemas.openxmlformats.org/drawingml/2006/main">
-            <a:r>
-              <a:t/>
-            </a:r>
-          </a:p>
-          <a:p xmlns:a="http://schemas.openxmlformats.org/drawingml/2006/main">
-            <a:r>
-              <a:t>Guidad labb: https://nj22az.github.io/sjoskolan/vaxelstromslabbet/?lage=guidad&amp;del=effekt</a:t>
-            </a:r>
-          </a:p>
+          <a:p xmlns:a="http://schemas.openxmlformats.org/drawingml/2006/main"/>
         </p:txBody>
       </p:sp>
       <p:sp>
@@ -721,31 +658,7 @@
         <p:txBody>
           <a:bodyPr xmlns:a="http://schemas.openxmlformats.org/drawingml/2006/main"/>
           <a:lstStyle xmlns:a="http://schemas.openxmlformats.org/drawingml/2006/main"/>
-          <a:p xmlns:a="http://schemas.openxmlformats.org/drawingml/2006/main">
-            <a:r>
-              <a:t>Skilj kompensationsbehovets positiva belopp från kondensatorns negativa bidrag. Detta är en undervisningsmodell, ingen dimensioneringsanvisning.</a:t>
-            </a:r>
-          </a:p>
-          <a:p xmlns:a="http://schemas.openxmlformats.org/drawingml/2006/main">
-            <a:r>
-              <a:t/>
-            </a:r>
-          </a:p>
-          <a:p xmlns:a="http://schemas.openxmlformats.org/drawingml/2006/main">
-            <a:r>
-              <a:t>Webbgenomgång: https://nj22az.github.io/sjoskolan/vecka-40/aktuell/Genomgang.html?del=effekt&amp;avsnitt=kompensering</a:t>
-            </a:r>
-          </a:p>
-          <a:p xmlns:a="http://schemas.openxmlformats.org/drawingml/2006/main">
-            <a:r>
-              <a:t/>
-            </a:r>
-          </a:p>
-          <a:p xmlns:a="http://schemas.openxmlformats.org/drawingml/2006/main">
-            <a:r>
-              <a:t>Guidad labb: https://nj22az.github.io/sjoskolan/vaxelstromslabbet/?lage=guidad&amp;del=effekt</a:t>
-            </a:r>
-          </a:p>
+          <a:p xmlns:a="http://schemas.openxmlformats.org/drawingml/2006/main"/>
         </p:txBody>
       </p:sp>
       <p:sp>
@@ -811,31 +724,7 @@
         <p:txBody>
           <a:bodyPr xmlns:a="http://schemas.openxmlformats.org/drawingml/2006/main"/>
           <a:lstStyle xmlns:a="http://schemas.openxmlformats.org/drawingml/2006/main"/>
-          <a:p xmlns:a="http://schemas.openxmlformats.org/drawingml/2006/main">
-            <a:r>
-              <a:t>Procentsatsen gäller kabelns förlust. Den är inte en besparing på 75 % av hela lastens energibehov.</a:t>
-            </a:r>
-          </a:p>
-          <a:p xmlns:a="http://schemas.openxmlformats.org/drawingml/2006/main">
-            <a:r>
-              <a:t/>
-            </a:r>
-          </a:p>
-          <a:p xmlns:a="http://schemas.openxmlformats.org/drawingml/2006/main">
-            <a:r>
-              <a:t>Webbgenomgång: https://nj22az.github.io/sjoskolan/vecka-40/aktuell/Genomgang.html?del=effekt&amp;avsnitt=forlust</a:t>
-            </a:r>
-          </a:p>
-          <a:p xmlns:a="http://schemas.openxmlformats.org/drawingml/2006/main">
-            <a:r>
-              <a:t/>
-            </a:r>
-          </a:p>
-          <a:p xmlns:a="http://schemas.openxmlformats.org/drawingml/2006/main">
-            <a:r>
-              <a:t>Guidad labb: https://nj22az.github.io/sjoskolan/vaxelstromslabbet/?lage=guidad&amp;del=effekt</a:t>
-            </a:r>
-          </a:p>
+          <a:p xmlns:a="http://schemas.openxmlformats.org/drawingml/2006/main"/>
         </p:txBody>
       </p:sp>
       <p:sp>
@@ -901,31 +790,7 @@
         <p:txBody>
           <a:bodyPr xmlns:a="http://schemas.openxmlformats.org/drawingml/2006/main"/>
           <a:lstStyle xmlns:a="http://schemas.openxmlformats.org/drawingml/2006/main"/>
-          <a:p xmlns:a="http://schemas.openxmlformats.org/drawingml/2006/main">
-            <a:r>
-              <a:t>Behåll detta som en uttrycklig begränsning av modellen. Verklig kompensation kräver bedömning av bland annat övertoner och resonans.</a:t>
-            </a:r>
-          </a:p>
-          <a:p xmlns:a="http://schemas.openxmlformats.org/drawingml/2006/main">
-            <a:r>
-              <a:t/>
-            </a:r>
-          </a:p>
-          <a:p xmlns:a="http://schemas.openxmlformats.org/drawingml/2006/main">
-            <a:r>
-              <a:t>Webbgenomgång: https://nj22az.github.io/sjoskolan/vecka-40/aktuell/Genomgang.html?del=effekt&amp;avsnitt=overtoner</a:t>
-            </a:r>
-          </a:p>
-          <a:p xmlns:a="http://schemas.openxmlformats.org/drawingml/2006/main">
-            <a:r>
-              <a:t/>
-            </a:r>
-          </a:p>
-          <a:p xmlns:a="http://schemas.openxmlformats.org/drawingml/2006/main">
-            <a:r>
-              <a:t>Guidad labb: https://nj22az.github.io/sjoskolan/vaxelstromslabbet/?lage=guidad&amp;del=effekt</a:t>
-            </a:r>
-          </a:p>
+          <a:p xmlns:a="http://schemas.openxmlformats.org/drawingml/2006/main"/>
         </p:txBody>
       </p:sp>
       <p:sp>
@@ -991,31 +856,7 @@
         <p:txBody>
           <a:bodyPr xmlns:a="http://schemas.openxmlformats.org/drawingml/2006/main"/>
           <a:lstStyle xmlns:a="http://schemas.openxmlformats.org/drawingml/2006/main"/>
-          <a:p xmlns:a="http://schemas.openxmlformats.org/drawingml/2006/main">
-            <a:r>
-              <a:t>Ifyllda rutor eller rätt antal ord visar inte ensamma att eleven förstår.</a:t>
-            </a:r>
-          </a:p>
-          <a:p xmlns:a="http://schemas.openxmlformats.org/drawingml/2006/main">
-            <a:r>
-              <a:t/>
-            </a:r>
-          </a:p>
-          <a:p xmlns:a="http://schemas.openxmlformats.org/drawingml/2006/main">
-            <a:r>
-              <a:t>Webbgenomgång: https://nj22az.github.io/sjoskolan/vecka-40/aktuell/Genomgang.html?del=effekt&amp;avsnitt=klart</a:t>
-            </a:r>
-          </a:p>
-          <a:p xmlns:a="http://schemas.openxmlformats.org/drawingml/2006/main">
-            <a:r>
-              <a:t/>
-            </a:r>
-          </a:p>
-          <a:p xmlns:a="http://schemas.openxmlformats.org/drawingml/2006/main">
-            <a:r>
-              <a:t>Guidad labb: https://nj22az.github.io/sjoskolan/vaxelstromslabbet/?lage=guidad&amp;del=effekt</a:t>
-            </a:r>
-          </a:p>
+          <a:p xmlns:a="http://schemas.openxmlformats.org/drawingml/2006/main"/>
         </p:txBody>
       </p:sp>
       <p:sp>
@@ -1081,31 +922,7 @@
         <p:txBody>
           <a:bodyPr xmlns:a="http://schemas.openxmlformats.org/drawingml/2006/main"/>
           <a:lstStyle xmlns:a="http://schemas.openxmlformats.org/drawingml/2006/main"/>
-          <a:p xmlns:a="http://schemas.openxmlformats.org/drawingml/2006/main">
-            <a:r>
-              <a:t>Förslag: 30 min genomgång och film, 15 min räkning tillsammans, 30 min guidad labb, 15 min återkoppling. Modellen är sinusformad enfas, inte trefas.</a:t>
-            </a:r>
-          </a:p>
-          <a:p xmlns:a="http://schemas.openxmlformats.org/drawingml/2006/main">
-            <a:r>
-              <a:t/>
-            </a:r>
-          </a:p>
-          <a:p xmlns:a="http://schemas.openxmlformats.org/drawingml/2006/main">
-            <a:r>
-              <a:t>Webbgenomgång: https://nj22az.github.io/sjoskolan/vecka-40/aktuell/Genomgang.html?del=effekt&amp;avsnitt=mal</a:t>
-            </a:r>
-          </a:p>
-          <a:p xmlns:a="http://schemas.openxmlformats.org/drawingml/2006/main">
-            <a:r>
-              <a:t/>
-            </a:r>
-          </a:p>
-          <a:p xmlns:a="http://schemas.openxmlformats.org/drawingml/2006/main">
-            <a:r>
-              <a:t>Guidad labb: https://nj22az.github.io/sjoskolan/vaxelstromslabbet/?lage=guidad&amp;del=effekt</a:t>
-            </a:r>
-          </a:p>
+          <a:p xmlns:a="http://schemas.openxmlformats.org/drawingml/2006/main"/>
         </p:txBody>
       </p:sp>
       <p:sp>
@@ -1171,31 +988,7 @@
         <p:txBody>
           <a:bodyPr xmlns:a="http://schemas.openxmlformats.org/drawingml/2006/main"/>
           <a:lstStyle xmlns:a="http://schemas.openxmlformats.org/drawingml/2006/main"/>
-          <a:p xmlns:a="http://schemas.openxmlformats.org/drawingml/2006/main">
-            <a:r>
-              <a:t>Börja med ett bekant resistivt exempel innan reaktiv effekt introduceras.</a:t>
-            </a:r>
-          </a:p>
-          <a:p xmlns:a="http://schemas.openxmlformats.org/drawingml/2006/main">
-            <a:r>
-              <a:t/>
-            </a:r>
-          </a:p>
-          <a:p xmlns:a="http://schemas.openxmlformats.org/drawingml/2006/main">
-            <a:r>
-              <a:t>Webbgenomgång: https://nj22az.github.io/sjoskolan/vecka-40/aktuell/Genomgang.html?del=effekt&amp;avsnitt=resistiv</a:t>
-            </a:r>
-          </a:p>
-          <a:p xmlns:a="http://schemas.openxmlformats.org/drawingml/2006/main">
-            <a:r>
-              <a:t/>
-            </a:r>
-          </a:p>
-          <a:p xmlns:a="http://schemas.openxmlformats.org/drawingml/2006/main">
-            <a:r>
-              <a:t>Guidad labb: https://nj22az.github.io/sjoskolan/vaxelstromslabbet/?lage=guidad&amp;del=effekt</a:t>
-            </a:r>
-          </a:p>
+          <a:p xmlns:a="http://schemas.openxmlformats.org/drawingml/2006/main"/>
         </p:txBody>
       </p:sp>
       <p:sp>
@@ -1261,31 +1054,7 @@
         <p:txBody>
           <a:bodyPr xmlns:a="http://schemas.openxmlformats.org/drawingml/2006/main"/>
           <a:lstStyle xmlns:a="http://schemas.openxmlformats.org/drawingml/2006/main"/>
-          <a:p xmlns:a="http://schemas.openxmlformats.org/drawingml/2006/main">
-            <a:r>
-              <a:t>PF är inte motorns verkningsgrad. Undvik att säga att hälften av energin förbrukas i onödan vid PF = 0,5.</a:t>
-            </a:r>
-          </a:p>
-          <a:p xmlns:a="http://schemas.openxmlformats.org/drawingml/2006/main">
-            <a:r>
-              <a:t/>
-            </a:r>
-          </a:p>
-          <a:p xmlns:a="http://schemas.openxmlformats.org/drawingml/2006/main">
-            <a:r>
-              <a:t>Webbgenomgång: https://nj22az.github.io/sjoskolan/vecka-40/aktuell/Genomgang.html?del=effekt&amp;avsnitt=pf</a:t>
-            </a:r>
-          </a:p>
-          <a:p xmlns:a="http://schemas.openxmlformats.org/drawingml/2006/main">
-            <a:r>
-              <a:t/>
-            </a:r>
-          </a:p>
-          <a:p xmlns:a="http://schemas.openxmlformats.org/drawingml/2006/main">
-            <a:r>
-              <a:t>Guidad labb: https://nj22az.github.io/sjoskolan/vaxelstromslabbet/?lage=guidad&amp;del=effekt</a:t>
-            </a:r>
-          </a:p>
+          <a:p xmlns:a="http://schemas.openxmlformats.org/drawingml/2006/main"/>
         </p:txBody>
       </p:sp>
       <p:sp>
@@ -1351,31 +1120,7 @@
         <p:txBody>
           <a:bodyPr xmlns:a="http://schemas.openxmlformats.org/drawingml/2006/main"/>
           <a:lstStyle xmlns:a="http://schemas.openxmlformats.org/drawingml/2006/main"/>
-          <a:p xmlns:a="http://schemas.openxmlformats.org/drawingml/2006/main">
-            <a:r>
-              <a:t>Skriv hela nämnaren inom parentes i räknaren.</a:t>
-            </a:r>
-          </a:p>
-          <a:p xmlns:a="http://schemas.openxmlformats.org/drawingml/2006/main">
-            <a:r>
-              <a:t/>
-            </a:r>
-          </a:p>
-          <a:p xmlns:a="http://schemas.openxmlformats.org/drawingml/2006/main">
-            <a:r>
-              <a:t>Webbgenomgång: https://nj22az.github.io/sjoskolan/vecka-40/aktuell/Genomgang.html?del=effekt&amp;avsnitt=strom</a:t>
-            </a:r>
-          </a:p>
-          <a:p xmlns:a="http://schemas.openxmlformats.org/drawingml/2006/main">
-            <a:r>
-              <a:t/>
-            </a:r>
-          </a:p>
-          <a:p xmlns:a="http://schemas.openxmlformats.org/drawingml/2006/main">
-            <a:r>
-              <a:t>Guidad labb: https://nj22az.github.io/sjoskolan/vaxelstromslabbet/?lage=guidad&amp;del=effekt</a:t>
-            </a:r>
-          </a:p>
+          <a:p xmlns:a="http://schemas.openxmlformats.org/drawingml/2006/main"/>
         </p:txBody>
       </p:sp>
       <p:sp>
@@ -1441,31 +1186,7 @@
         <p:txBody>
           <a:bodyPr xmlns:a="http://schemas.openxmlformats.org/drawingml/2006/main"/>
           <a:lstStyle xmlns:a="http://schemas.openxmlformats.org/drawingml/2006/main"/>
-          <a:p xmlns:a="http://schemas.openxmlformats.org/drawingml/2006/main">
-            <a:r>
-              <a:t>Skilj VA från W även när talen råkar vara lika vid PF = 1.</a:t>
-            </a:r>
-          </a:p>
-          <a:p xmlns:a="http://schemas.openxmlformats.org/drawingml/2006/main">
-            <a:r>
-              <a:t/>
-            </a:r>
-          </a:p>
-          <a:p xmlns:a="http://schemas.openxmlformats.org/drawingml/2006/main">
-            <a:r>
-              <a:t>Webbgenomgång: https://nj22az.github.io/sjoskolan/vecka-40/aktuell/Genomgang.html?del=effekt&amp;avsnitt=s</a:t>
-            </a:r>
-          </a:p>
-          <a:p xmlns:a="http://schemas.openxmlformats.org/drawingml/2006/main">
-            <a:r>
-              <a:t/>
-            </a:r>
-          </a:p>
-          <a:p xmlns:a="http://schemas.openxmlformats.org/drawingml/2006/main">
-            <a:r>
-              <a:t>Guidad labb: https://nj22az.github.io/sjoskolan/vaxelstromslabbet/?lage=guidad&amp;del=effekt</a:t>
-            </a:r>
-          </a:p>
+          <a:p xmlns:a="http://schemas.openxmlformats.org/drawingml/2006/main"/>
         </p:txBody>
       </p:sp>
       <p:sp>
@@ -1531,31 +1252,7 @@
         <p:txBody>
           <a:bodyPr xmlns:a="http://schemas.openxmlformats.org/drawingml/2006/main"/>
           <a:lstStyle xmlns:a="http://schemas.openxmlformats.org/drawingml/2006/main"/>
-          <a:p xmlns:a="http://schemas.openxmlformats.org/drawingml/2006/main">
-            <a:r>
-              <a:t>Q är inte i sig en förbrukad energi. Den större strömmen kan däremot öka resistiva förluster.</a:t>
-            </a:r>
-          </a:p>
-          <a:p xmlns:a="http://schemas.openxmlformats.org/drawingml/2006/main">
-            <a:r>
-              <a:t/>
-            </a:r>
-          </a:p>
-          <a:p xmlns:a="http://schemas.openxmlformats.org/drawingml/2006/main">
-            <a:r>
-              <a:t>Webbgenomgång: https://nj22az.github.io/sjoskolan/vecka-40/aktuell/Genomgang.html?del=effekt&amp;avsnitt=q</a:t>
-            </a:r>
-          </a:p>
-          <a:p xmlns:a="http://schemas.openxmlformats.org/drawingml/2006/main">
-            <a:r>
-              <a:t/>
-            </a:r>
-          </a:p>
-          <a:p xmlns:a="http://schemas.openxmlformats.org/drawingml/2006/main">
-            <a:r>
-              <a:t>Guidad labb: https://nj22az.github.io/sjoskolan/vaxelstromslabbet/?lage=guidad&amp;del=effekt</a:t>
-            </a:r>
-          </a:p>
+          <a:p xmlns:a="http://schemas.openxmlformats.org/drawingml/2006/main"/>
         </p:txBody>
       </p:sp>
       <p:sp>
@@ -1621,31 +1318,7 @@
         <p:txBody>
           <a:bodyPr xmlns:a="http://schemas.openxmlformats.org/drawingml/2006/main"/>
           <a:lstStyle xmlns:a="http://schemas.openxmlformats.org/drawingml/2006/main"/>
-          <a:p xmlns:a="http://schemas.openxmlformats.org/drawingml/2006/main">
-            <a:r>
-              <a:t>Detta stänger luckan mellan given effektfaktor och reaktiv effekt i räkna-först-uppgifterna.</a:t>
-            </a:r>
-          </a:p>
-          <a:p xmlns:a="http://schemas.openxmlformats.org/drawingml/2006/main">
-            <a:r>
-              <a:t/>
-            </a:r>
-          </a:p>
-          <a:p xmlns:a="http://schemas.openxmlformats.org/drawingml/2006/main">
-            <a:r>
-              <a:t>Webbgenomgång: https://nj22az.github.io/sjoskolan/vecka-40/aktuell/Genomgang.html?del=effekt&amp;avsnitt=exempel</a:t>
-            </a:r>
-          </a:p>
-          <a:p xmlns:a="http://schemas.openxmlformats.org/drawingml/2006/main">
-            <a:r>
-              <a:t/>
-            </a:r>
-          </a:p>
-          <a:p xmlns:a="http://schemas.openxmlformats.org/drawingml/2006/main">
-            <a:r>
-              <a:t>Guidad labb: https://nj22az.github.io/sjoskolan/vaxelstromslabbet/?lage=guidad&amp;del=effekt</a:t>
-            </a:r>
-          </a:p>
+          <a:p xmlns:a="http://schemas.openxmlformats.org/drawingml/2006/main"/>
         </p:txBody>
       </p:sp>
       <p:sp>
@@ -1711,31 +1384,7 @@
         <p:txBody>
           <a:bodyPr xmlns:a="http://schemas.openxmlformats.org/drawingml/2006/main"/>
           <a:lstStyle xmlns:a="http://schemas.openxmlformats.org/drawingml/2006/main"/>
-          <a:p xmlns:a="http://schemas.openxmlformats.org/drawingml/2006/main">
-            <a:r>
-              <a:t>Ingen kompensering eller kabelresistans behöver justeras för dessa två grunduppgifter.</a:t>
-            </a:r>
-          </a:p>
-          <a:p xmlns:a="http://schemas.openxmlformats.org/drawingml/2006/main">
-            <a:r>
-              <a:t/>
-            </a:r>
-          </a:p>
-          <a:p xmlns:a="http://schemas.openxmlformats.org/drawingml/2006/main">
-            <a:r>
-              <a:t>Webbgenomgång: https://nj22az.github.io/sjoskolan/vecka-40/aktuell/Genomgang.html?del=effekt&amp;avsnitt=labb</a:t>
-            </a:r>
-          </a:p>
-          <a:p xmlns:a="http://schemas.openxmlformats.org/drawingml/2006/main">
-            <a:r>
-              <a:t/>
-            </a:r>
-          </a:p>
-          <a:p xmlns:a="http://schemas.openxmlformats.org/drawingml/2006/main">
-            <a:r>
-              <a:t>Guidad labb: https://nj22az.github.io/sjoskolan/vaxelstromslabbet/?lage=guidad&amp;del=effekt</a:t>
-            </a:r>
-          </a:p>
+          <a:p xmlns:a="http://schemas.openxmlformats.org/drawingml/2006/main"/>
         </p:txBody>
       </p:sp>
       <p:sp>

--- a/sjoskolan/vecka-40/aktuell/v40_03_Effekt_i_vaxelstromskretsar_elev.pptx
+++ b/sjoskolan/vecka-40/aktuell/v40_03_Effekt_i_vaxelstromskretsar_elev.pptx
@@ -11462,12 +11462,7 @@
                 <a:ea typeface="Calibri"/>
                 <a:cs typeface="Calibri"/>
               </a:rPr>
-              <a:t>Du får en egen effekt P ur ditt namn. Förutsäg strömmen vid PF = 1,00, läs av och registrera värdet.</a:t>
-            </a:r>
-          </a:p>
-          <a:p xmlns:a="http://schemas.openxmlformats.org/drawingml/2006/main">
-            <a:r>
-              <a:t/>
+              <a:t>Du får en egen effekt P ur ditt D. Förutsäg strömmen vid PF = 1,00, läs av och registrera värdet.</a:t>
             </a:r>
           </a:p>
           <a:p xmlns:a="http://schemas.openxmlformats.org/drawingml/2006/main">
@@ -11481,6 +11476,18 @@
                 <a:cs typeface="Calibri"/>
               </a:defRPr>
             </a:pPr>
+          </a:p>
+          <a:p xmlns:a="http://schemas.openxmlformats.org/drawingml/2006/main">
+            <a:pPr>
+              <a:defRPr sz="2100" b="0">
+                <a:solidFill>
+                  <a:srgbClr val="172F43"/>
+                </a:solidFill>
+                <a:latin typeface="Calibri"/>
+                <a:ea typeface="Calibri"/>
+                <a:cs typeface="Calibri"/>
+              </a:defRPr>
+            </a:pPr>
             <a:r>
               <a:rPr sz="2100" b="0">
                 <a:solidFill>
@@ -11494,11 +11501,6 @@
             </a:r>
           </a:p>
           <a:p xmlns:a="http://schemas.openxmlformats.org/drawingml/2006/main">
-            <a:r>
-              <a:t/>
-            </a:r>
-          </a:p>
-          <a:p xmlns:a="http://schemas.openxmlformats.org/drawingml/2006/main">
             <a:pPr>
               <a:defRPr sz="2100" b="0">
                 <a:solidFill>
@@ -11509,6 +11511,18 @@
                 <a:cs typeface="Calibri"/>
               </a:defRPr>
             </a:pPr>
+          </a:p>
+          <a:p xmlns:a="http://schemas.openxmlformats.org/drawingml/2006/main">
+            <a:pPr>
+              <a:defRPr sz="2100" b="0">
+                <a:solidFill>
+                  <a:srgbClr val="172F43"/>
+                </a:solidFill>
+                <a:latin typeface="Calibri"/>
+                <a:ea typeface="Calibri"/>
+                <a:cs typeface="Calibri"/>
+              </a:defRPr>
+            </a:pPr>
             <a:r>
               <a:rPr sz="2100" b="0">
                 <a:solidFill>
@@ -11522,9 +11536,16 @@
             </a:r>
           </a:p>
           <a:p xmlns:a="http://schemas.openxmlformats.org/drawingml/2006/main">
-            <a:r>
-              <a:t/>
-            </a:r>
+            <a:pPr>
+              <a:defRPr sz="2100" b="0">
+                <a:solidFill>
+                  <a:srgbClr val="172F43"/>
+                </a:solidFill>
+                <a:latin typeface="Calibri"/>
+                <a:ea typeface="Calibri"/>
+                <a:cs typeface="Calibri"/>
+              </a:defRPr>
+            </a:pPr>
           </a:p>
           <a:p xmlns:a="http://schemas.openxmlformats.org/drawingml/2006/main">
             <a:pPr>

--- a/sjoskolan/vecka-40/aktuell/v40_03_Effekt_i_vaxelstromskretsar_elev.pptx
+++ b/sjoskolan/vecka-40/aktuell/v40_03_Effekt_i_vaxelstromskretsar_elev.pptx
@@ -16,6 +16,7 @@
     <p:sldId xmlns:r="http://schemas.openxmlformats.org/officeDocument/2006/relationships" id="261" r:id="R6e45d74eeb204a65"/>
     <p:sldId xmlns:r="http://schemas.openxmlformats.org/officeDocument/2006/relationships" id="262" r:id="Rdb8984ba93e049b0"/>
     <p:sldId xmlns:r="http://schemas.openxmlformats.org/officeDocument/2006/relationships" id="263" r:id="R2cf686f955f34a77"/>
+    <p:sldId xmlns:ns0="http://schemas.openxmlformats.org/officeDocument/2006/relationships" id="271" ns0:id="rId22"/>
     <p:sldId xmlns:r="http://schemas.openxmlformats.org/officeDocument/2006/relationships" id="264" r:id="R83f6f40d3ea44b6d"/>
     <p:sldId xmlns:r="http://schemas.openxmlformats.org/officeDocument/2006/relationships" id="265" r:id="Rf2bd7de840ee4093"/>
     <p:sldId xmlns:r="http://schemas.openxmlformats.org/officeDocument/2006/relationships" id="266" r:id="R20462ad3885c4ed5"/>
@@ -5080,14 +5081,14 @@
       </p:grpSpPr>
       <p:pic>
         <p:nvPicPr>
-          <p:cNvPr id="14" name="Bildobjekt 2"/>
+          <p:cNvPr id="13" name="Bildobjekt 2"/>
           <p:cNvPicPr>
             <a:picLocks xmlns:a="http://schemas.openxmlformats.org/drawingml/2006/main" noChangeAspect="1"/>
           </p:cNvPicPr>
           <p:nvPr/>
         </p:nvPicPr>
         <p:blipFill>
-          <a:blip xmlns:r="http://schemas.openxmlformats.org/officeDocument/2006/relationships" xmlns:a="http://schemas.openxmlformats.org/drawingml/2006/main" r:embed="Rd117b30faff44780"/>
+          <a:blip xmlns:r="http://schemas.openxmlformats.org/officeDocument/2006/relationships" xmlns:a="http://schemas.openxmlformats.org/drawingml/2006/main" r:embed="R8790e0a3cd5441b7"/>
           <a:stretch xmlns:a="http://schemas.openxmlformats.org/drawingml/2006/main">
             <a:fillRect l="0" t="0" r="0" b="0"/>
           </a:stretch>
@@ -5107,7 +5108,7 @@
           <p:cNvPr id="9" name="title">
             <a:extLst xmlns:a="http://schemas.openxmlformats.org/drawingml/2006/main">
               <a:ext uri="{FF2B5EF4-FFF2-40B4-BE49-F238E27FC236}">
-                <a16:creationId xmlns:a16="http://schemas.microsoft.com/office/drawing/2014/main" id="{19289708-58E8-43A0-BAB1-F482491D15CD}"/>
+                <a16:creationId xmlns:a16="http://schemas.microsoft.com/office/drawing/2014/main" id="{A3FC888B-E98B-4768-B4B6-9DCBD8C3052B}"/>
               </a:ext>
             </a:extLst>
           </p:cNvPr>
@@ -5154,7 +5155,7 @@
                 <a:ea typeface="Calibri"/>
                 <a:cs typeface="Calibri"/>
               </a:rPr>
-              <a:t>Effekt och energi</a:t>
+              <a:t>Arbetsgång i den guidade labben</a:t>
             </a:r>
           </a:p>
         </p:txBody>
@@ -5164,7 +5165,7 @@
           <p:cNvPr id="10" name="body">
             <a:extLst xmlns:a="http://schemas.openxmlformats.org/drawingml/2006/main">
               <a:ext uri="{FF2B5EF4-FFF2-40B4-BE49-F238E27FC236}">
-                <a16:creationId xmlns:a16="http://schemas.microsoft.com/office/drawing/2014/main" id="{884E9602-E653-4E67-82A1-9A0740CF5246}"/>
+                <a16:creationId xmlns:a16="http://schemas.microsoft.com/office/drawing/2014/main" id="{5CEC0966-DB79-40FD-B306-DC827586F843}"/>
               </a:ext>
             </a:extLst>
           </p:cNvPr>
@@ -5176,7 +5177,7 @@
         <p:spPr>
           <a:xfrm xmlns:a="http://schemas.openxmlformats.org/drawingml/2006/main">
             <a:off x="762000" y="1590675"/>
-            <a:ext cx="7620000" cy="3286125"/>
+            <a:ext cx="7620000" cy="3524250"/>
           </a:xfrm>
           <a:prstGeom xmlns:a="http://schemas.openxmlformats.org/drawingml/2006/main" prst="rect">
             <a:avLst/>
@@ -5211,7 +5212,7 @@
                 <a:ea typeface="Calibri"/>
                 <a:cs typeface="Calibri"/>
               </a:rPr>
-              <a:t>Energi beror både på aktiv effekt och på tid.</a:t>
+              <a:t>Du får en egen effekt P ur ditt D. Förutsäg strömmen vid PF = 1,00, läs av och registrera värdet.</a:t>
             </a:r>
           </a:p>
           <a:p xmlns:a="http://schemas.openxmlformats.org/drawingml/2006/main">
@@ -5246,7 +5247,7 @@
                 <a:ea typeface="Calibri"/>
                 <a:cs typeface="Calibri"/>
               </a:rPr>
-              <a:t>E = P · t. Med kW (kilowatt) och timmar blir enheten kWh (kilowattimme).</a:t>
+              <a:t>Förutsäg strömmen vid PF = 0,50. U och P hålls oförändrade.</a:t>
             </a:r>
           </a:p>
           <a:p xmlns:a="http://schemas.openxmlformats.org/drawingml/2006/main">
@@ -5281,7 +5282,7 @@
                 <a:ea typeface="Calibri"/>
                 <a:cs typeface="Calibri"/>
               </a:rPr>
-              <a:t>1,60 kW under 3 h ger 4,80 kWh aktiv energi.</a:t>
+              <a:t>Jämför de båda värdena och förklara orsaken.</a:t>
             </a:r>
           </a:p>
           <a:p xmlns:a="http://schemas.openxmlformats.org/drawingml/2006/main">
@@ -5316,17 +5317,17 @@
                 <a:ea typeface="Calibri"/>
                 <a:cs typeface="Calibri"/>
               </a:rPr>
-              <a:t>Använd P för aktiv energi, även om S är större.</a:t>
-            </a:r>
-          </a:p>
-        </p:txBody>
-      </p:sp>
-      <p:sp>
-        <p:nvSpPr>
-          <p:cNvPr id="11" name="formula">
-            <a:extLst xmlns:a="http://schemas.openxmlformats.org/drawingml/2006/main">
-              <a:ext uri="{FF2B5EF4-FFF2-40B4-BE49-F238E27FC236}">
-                <a16:creationId xmlns:a16="http://schemas.microsoft.com/office/drawing/2014/main" id="{EF08AD41-7883-4F3E-80D1-59A660A06BF7}"/>
+              <a:t>Redovisa vilka storheter som ändrades och vilka som var konstanta.</a:t>
+            </a:r>
+          </a:p>
+        </p:txBody>
+      </p:sp>
+      <p:sp>
+        <p:nvSpPr>
+          <p:cNvPr id="11" name="section">
+            <a:extLst xmlns:a="http://schemas.openxmlformats.org/drawingml/2006/main">
+              <a:ext uri="{FF2B5EF4-FFF2-40B4-BE49-F238E27FC236}">
+                <a16:creationId xmlns:a16="http://schemas.microsoft.com/office/drawing/2014/main" id="{658188E9-BDC9-477D-9A79-5EED68B17B9A}"/>
               </a:ext>
             </a:extLst>
           </p:cNvPr>
@@ -5337,8 +5338,8 @@
         </p:nvSpPr>
         <p:spPr>
           <a:xfrm xmlns:a="http://schemas.openxmlformats.org/drawingml/2006/main">
-            <a:off x="762000" y="4953000"/>
-            <a:ext cx="7620000" cy="619125"/>
+            <a:off x="1809750" y="6419850"/>
+            <a:ext cx="4191000" cy="266700"/>
           </a:xfrm>
           <a:prstGeom xmlns:a="http://schemas.openxmlformats.org/drawingml/2006/main" prst="rect">
             <a:avLst/>
@@ -5355,63 +5356,6 @@
           <a:lstStyle xmlns:a="http://schemas.openxmlformats.org/drawingml/2006/main"/>
           <a:p xmlns:a="http://schemas.openxmlformats.org/drawingml/2006/main">
             <a:pPr>
-              <a:defRPr sz="2250" b="1">
-                <a:solidFill>
-                  <a:srgbClr val="064F91"/>
-                </a:solidFill>
-                <a:latin typeface="Calibri"/>
-                <a:ea typeface="Calibri"/>
-                <a:cs typeface="Calibri"/>
-              </a:defRPr>
-            </a:pPr>
-            <a:r>
-              <a:rPr sz="2250" b="1">
-                <a:solidFill>
-                  <a:srgbClr val="064F91"/>
-                </a:solidFill>
-                <a:latin typeface="Calibri"/>
-                <a:ea typeface="Calibri"/>
-                <a:cs typeface="Calibri"/>
-              </a:rPr>
-              <a:t>E = P · t</a:t>
-            </a:r>
-          </a:p>
-        </p:txBody>
-      </p:sp>
-      <p:sp>
-        <p:nvSpPr>
-          <p:cNvPr id="12" name="section">
-            <a:extLst xmlns:a="http://schemas.openxmlformats.org/drawingml/2006/main">
-              <a:ext uri="{FF2B5EF4-FFF2-40B4-BE49-F238E27FC236}">
-                <a16:creationId xmlns:a16="http://schemas.microsoft.com/office/drawing/2014/main" id="{DD8B815E-40B6-42A0-A8BA-516FA5076B39}"/>
-              </a:ext>
-            </a:extLst>
-          </p:cNvPr>
-          <p:cNvSpPr>
-            <a:spLocks xmlns:a="http://schemas.openxmlformats.org/drawingml/2006/main" noGrp="1"/>
-          </p:cNvSpPr>
-          <p:nvPr/>
-        </p:nvSpPr>
-        <p:spPr>
-          <a:xfrm xmlns:a="http://schemas.openxmlformats.org/drawingml/2006/main">
-            <a:off x="1809750" y="6419850"/>
-            <a:ext cx="4191000" cy="266700"/>
-          </a:xfrm>
-          <a:prstGeom xmlns:a="http://schemas.openxmlformats.org/drawingml/2006/main" prst="rect">
-            <a:avLst/>
-          </a:prstGeom>
-          <a:noFill xmlns:a="http://schemas.openxmlformats.org/drawingml/2006/main"/>
-          <a:ln xmlns:a="http://schemas.openxmlformats.org/drawingml/2006/main" w="0">
-            <a:noFill/>
-          </a:ln>
-        </p:spPr>
-        <p:txBody>
-          <a:bodyPr xmlns:a="http://schemas.openxmlformats.org/drawingml/2006/main" lIns="0" tIns="0" rIns="0" bIns="0" anchor="t">
-            <a:noAutofit/>
-          </a:bodyPr>
-          <a:lstStyle xmlns:a="http://schemas.openxmlformats.org/drawingml/2006/main"/>
-          <a:p xmlns:a="http://schemas.openxmlformats.org/drawingml/2006/main">
-            <a:pPr>
               <a:defRPr sz="1275" b="0">
                 <a:solidFill>
                   <a:srgbClr val="FFFFFF"/>
@@ -5437,10 +5381,10 @@
       </p:sp>
       <p:sp>
         <p:nvSpPr>
-          <p:cNvPr id="13" name="page">
-            <a:extLst xmlns:a="http://schemas.openxmlformats.org/drawingml/2006/main">
-              <a:ext uri="{FF2B5EF4-FFF2-40B4-BE49-F238E27FC236}">
-                <a16:creationId xmlns:a16="http://schemas.microsoft.com/office/drawing/2014/main" id="{8B569EC5-D74C-4FE6-A578-5EF96C4104AC}"/>
+          <p:cNvPr id="12" name="page">
+            <a:extLst xmlns:a="http://schemas.openxmlformats.org/drawingml/2006/main">
+              <a:ext uri="{FF2B5EF4-FFF2-40B4-BE49-F238E27FC236}">
+                <a16:creationId xmlns:a16="http://schemas.microsoft.com/office/drawing/2014/main" id="{89381429-45A2-49C4-929C-A561EE8F9D04}"/>
               </a:ext>
             </a:extLst>
           </p:cNvPr>
@@ -5523,7 +5467,7 @@
           <p:nvPr/>
         </p:nvPicPr>
         <p:blipFill>
-          <a:blip xmlns:r="http://schemas.openxmlformats.org/officeDocument/2006/relationships" xmlns:a="http://schemas.openxmlformats.org/drawingml/2006/main" r:embed="Rbbdca3c7b09d4d8b"/>
+          <a:blip xmlns:r="http://schemas.openxmlformats.org/officeDocument/2006/relationships" xmlns:a="http://schemas.openxmlformats.org/drawingml/2006/main" r:embed="Rd117b30faff44780"/>
           <a:stretch xmlns:a="http://schemas.openxmlformats.org/drawingml/2006/main">
             <a:fillRect l="0" t="0" r="0" b="0"/>
           </a:stretch>
@@ -5543,7 +5487,7 @@
           <p:cNvPr id="9" name="title">
             <a:extLst xmlns:a="http://schemas.openxmlformats.org/drawingml/2006/main">
               <a:ext uri="{FF2B5EF4-FFF2-40B4-BE49-F238E27FC236}">
-                <a16:creationId xmlns:a16="http://schemas.microsoft.com/office/drawing/2014/main" id="{172696AE-105E-47B5-AA9F-83EEDDC2C059}"/>
+                <a16:creationId xmlns:a16="http://schemas.microsoft.com/office/drawing/2014/main" id="{19289708-58E8-43A0-BAB1-F482491D15CD}"/>
               </a:ext>
             </a:extLst>
           </p:cNvPr>
@@ -5590,7 +5534,7 @@
                 <a:ea typeface="Calibri"/>
                 <a:cs typeface="Calibri"/>
               </a:rPr>
-              <a:t>Eget försök med andra värden</a:t>
+              <a:t>Effekt och energi</a:t>
             </a:r>
           </a:p>
         </p:txBody>
@@ -5600,7 +5544,7 @@
           <p:cNvPr id="10" name="body">
             <a:extLst xmlns:a="http://schemas.openxmlformats.org/drawingml/2006/main">
               <a:ext uri="{FF2B5EF4-FFF2-40B4-BE49-F238E27FC236}">
-                <a16:creationId xmlns:a16="http://schemas.microsoft.com/office/drawing/2014/main" id="{9BC49B0C-87EC-48AA-B0B4-101753504D3F}"/>
+                <a16:creationId xmlns:a16="http://schemas.microsoft.com/office/drawing/2014/main" id="{884E9602-E653-4E67-82A1-9A0740CF5246}"/>
               </a:ext>
             </a:extLst>
           </p:cNvPr>
@@ -5612,7 +5556,7 @@
         <p:spPr>
           <a:xfrm xmlns:a="http://schemas.openxmlformats.org/drawingml/2006/main">
             <a:off x="762000" y="1590675"/>
-            <a:ext cx="7620000" cy="3524250"/>
+            <a:ext cx="7620000" cy="3286125"/>
           </a:xfrm>
           <a:prstGeom xmlns:a="http://schemas.openxmlformats.org/drawingml/2006/main" prst="rect">
             <a:avLst/>
@@ -5647,7 +5591,7 @@
                 <a:ea typeface="Calibri"/>
                 <a:cs typeface="Calibri"/>
               </a:rPr>
-              <a:t>En enfaslast tar P = 4 140 W vid U = 230 V och PF = 0,60.</a:t>
+              <a:t>Energi beror både på aktiv effekt och på tid.</a:t>
             </a:r>
           </a:p>
           <a:p xmlns:a="http://schemas.openxmlformats.org/drawingml/2006/main">
@@ -5682,17 +5626,87 @@
                 <a:ea typeface="Calibri"/>
                 <a:cs typeface="Calibri"/>
               </a:rPr>
-              <a:t>Beräkna I och S. Förklara om P skulle ändras bara för att PF förbättras i vår modell.</a:t>
-            </a:r>
-          </a:p>
-        </p:txBody>
-      </p:sp>
-      <p:sp>
-        <p:nvSpPr>
-          <p:cNvPr id="11" name="check">
-            <a:extLst xmlns:a="http://schemas.openxmlformats.org/drawingml/2006/main">
-              <a:ext uri="{FF2B5EF4-FFF2-40B4-BE49-F238E27FC236}">
-                <a16:creationId xmlns:a16="http://schemas.microsoft.com/office/drawing/2014/main" id="{DAC25AC2-956E-4B5F-AE5D-D800FBC91592}"/>
+              <a:t>E = P · t. Med kW (kilowatt) och timmar blir enheten kWh (kilowattimme).</a:t>
+            </a:r>
+          </a:p>
+          <a:p xmlns:a="http://schemas.openxmlformats.org/drawingml/2006/main">
+            <a:pPr>
+              <a:defRPr sz="2100" b="0">
+                <a:solidFill>
+                  <a:srgbClr val="172F43"/>
+                </a:solidFill>
+                <a:latin typeface="Calibri"/>
+                <a:ea typeface="Calibri"/>
+                <a:cs typeface="Calibri"/>
+              </a:defRPr>
+            </a:pPr>
+          </a:p>
+          <a:p xmlns:a="http://schemas.openxmlformats.org/drawingml/2006/main">
+            <a:pPr>
+              <a:defRPr sz="2100" b="0">
+                <a:solidFill>
+                  <a:srgbClr val="172F43"/>
+                </a:solidFill>
+                <a:latin typeface="Calibri"/>
+                <a:ea typeface="Calibri"/>
+                <a:cs typeface="Calibri"/>
+              </a:defRPr>
+            </a:pPr>
+            <a:r>
+              <a:rPr sz="2100" b="0">
+                <a:solidFill>
+                  <a:srgbClr val="172F43"/>
+                </a:solidFill>
+                <a:latin typeface="Calibri"/>
+                <a:ea typeface="Calibri"/>
+                <a:cs typeface="Calibri"/>
+              </a:rPr>
+              <a:t>1,60 kW under 3 h ger 4,80 kWh aktiv energi.</a:t>
+            </a:r>
+          </a:p>
+          <a:p xmlns:a="http://schemas.openxmlformats.org/drawingml/2006/main">
+            <a:pPr>
+              <a:defRPr sz="2100" b="0">
+                <a:solidFill>
+                  <a:srgbClr val="172F43"/>
+                </a:solidFill>
+                <a:latin typeface="Calibri"/>
+                <a:ea typeface="Calibri"/>
+                <a:cs typeface="Calibri"/>
+              </a:defRPr>
+            </a:pPr>
+          </a:p>
+          <a:p xmlns:a="http://schemas.openxmlformats.org/drawingml/2006/main">
+            <a:pPr>
+              <a:defRPr sz="2100" b="0">
+                <a:solidFill>
+                  <a:srgbClr val="172F43"/>
+                </a:solidFill>
+                <a:latin typeface="Calibri"/>
+                <a:ea typeface="Calibri"/>
+                <a:cs typeface="Calibri"/>
+              </a:defRPr>
+            </a:pPr>
+            <a:r>
+              <a:rPr sz="2100" b="0">
+                <a:solidFill>
+                  <a:srgbClr val="172F43"/>
+                </a:solidFill>
+                <a:latin typeface="Calibri"/>
+                <a:ea typeface="Calibri"/>
+                <a:cs typeface="Calibri"/>
+              </a:rPr>
+              <a:t>Använd P för aktiv energi, även om S är större.</a:t>
+            </a:r>
+          </a:p>
+        </p:txBody>
+      </p:sp>
+      <p:sp>
+        <p:nvSpPr>
+          <p:cNvPr id="11" name="formula">
+            <a:extLst xmlns:a="http://schemas.openxmlformats.org/drawingml/2006/main">
+              <a:ext uri="{FF2B5EF4-FFF2-40B4-BE49-F238E27FC236}">
+                <a16:creationId xmlns:a16="http://schemas.microsoft.com/office/drawing/2014/main" id="{EF08AD41-7883-4F3E-80D1-59A660A06BF7}"/>
               </a:ext>
             </a:extLst>
           </p:cNvPr>
@@ -5703,8 +5717,8 @@
         </p:nvSpPr>
         <p:spPr>
           <a:xfrm xmlns:a="http://schemas.openxmlformats.org/drawingml/2006/main">
-            <a:off x="762000" y="5543550"/>
-            <a:ext cx="7620000" cy="438150"/>
+            <a:off x="762000" y="4953000"/>
+            <a:ext cx="7620000" cy="619125"/>
           </a:xfrm>
           <a:prstGeom xmlns:a="http://schemas.openxmlformats.org/drawingml/2006/main" prst="rect">
             <a:avLst/>
@@ -5721,7 +5735,7 @@
           <a:lstStyle xmlns:a="http://schemas.openxmlformats.org/drawingml/2006/main"/>
           <a:p xmlns:a="http://schemas.openxmlformats.org/drawingml/2006/main">
             <a:pPr>
-              <a:defRPr sz="1725" b="1">
+              <a:defRPr sz="2250" b="1">
                 <a:solidFill>
                   <a:srgbClr val="064F91"/>
                 </a:solidFill>
@@ -5731,7 +5745,7 @@
               </a:defRPr>
             </a:pPr>
             <a:r>
-              <a:rPr sz="1725" b="1">
+              <a:rPr sz="2250" b="1">
                 <a:solidFill>
                   <a:srgbClr val="064F91"/>
                 </a:solidFill>
@@ -5739,7 +5753,7 @@
                 <a:ea typeface="Calibri"/>
                 <a:cs typeface="Calibri"/>
               </a:rPr>
-              <a:t>Räkna innan facit visas.</a:t>
+              <a:t>E = P · t</a:t>
             </a:r>
           </a:p>
         </p:txBody>
@@ -5749,7 +5763,7 @@
           <p:cNvPr id="12" name="section">
             <a:extLst xmlns:a="http://schemas.openxmlformats.org/drawingml/2006/main">
               <a:ext uri="{FF2B5EF4-FFF2-40B4-BE49-F238E27FC236}">
-                <a16:creationId xmlns:a16="http://schemas.microsoft.com/office/drawing/2014/main" id="{41D96973-E72A-43BF-9A23-E6F860EB4BA0}"/>
+                <a16:creationId xmlns:a16="http://schemas.microsoft.com/office/drawing/2014/main" id="{DD8B815E-40B6-42A0-A8BA-516FA5076B39}"/>
               </a:ext>
             </a:extLst>
           </p:cNvPr>
@@ -5806,7 +5820,7 @@
           <p:cNvPr id="13" name="page">
             <a:extLst xmlns:a="http://schemas.openxmlformats.org/drawingml/2006/main">
               <a:ext uri="{FF2B5EF4-FFF2-40B4-BE49-F238E27FC236}">
-                <a16:creationId xmlns:a16="http://schemas.microsoft.com/office/drawing/2014/main" id="{61F4611D-371A-4B97-99C6-982DA4FEB606}"/>
+                <a16:creationId xmlns:a16="http://schemas.microsoft.com/office/drawing/2014/main" id="{8B569EC5-D74C-4FE6-A578-5EF96C4104AC}"/>
               </a:ext>
             </a:extLst>
           </p:cNvPr>
@@ -5889,7 +5903,7 @@
           <p:nvPr/>
         </p:nvPicPr>
         <p:blipFill>
-          <a:blip xmlns:r="http://schemas.openxmlformats.org/officeDocument/2006/relationships" xmlns:a="http://schemas.openxmlformats.org/drawingml/2006/main" r:embed="Rb89eca466bd0406b"/>
+          <a:blip xmlns:r="http://schemas.openxmlformats.org/officeDocument/2006/relationships" xmlns:a="http://schemas.openxmlformats.org/drawingml/2006/main" r:embed="Rbbdca3c7b09d4d8b"/>
           <a:stretch xmlns:a="http://schemas.openxmlformats.org/drawingml/2006/main">
             <a:fillRect l="0" t="0" r="0" b="0"/>
           </a:stretch>
@@ -5909,7 +5923,7 @@
           <p:cNvPr id="9" name="title">
             <a:extLst xmlns:a="http://schemas.openxmlformats.org/drawingml/2006/main">
               <a:ext uri="{FF2B5EF4-FFF2-40B4-BE49-F238E27FC236}">
-                <a16:creationId xmlns:a16="http://schemas.microsoft.com/office/drawing/2014/main" id="{C1C8C9FE-B159-4A8C-AE11-6F62CC366C00}"/>
+                <a16:creationId xmlns:a16="http://schemas.microsoft.com/office/drawing/2014/main" id="{172696AE-105E-47B5-AA9F-83EEDDC2C059}"/>
               </a:ext>
             </a:extLst>
           </p:cNvPr>
@@ -5956,7 +5970,7 @@
                 <a:ea typeface="Calibri"/>
                 <a:cs typeface="Calibri"/>
               </a:rPr>
-              <a:t>Fördjupning: kompensation</a:t>
+              <a:t>Eget försök med andra värden</a:t>
             </a:r>
           </a:p>
         </p:txBody>
@@ -5966,7 +5980,7 @@
           <p:cNvPr id="10" name="body">
             <a:extLst xmlns:a="http://schemas.openxmlformats.org/drawingml/2006/main">
               <a:ext uri="{FF2B5EF4-FFF2-40B4-BE49-F238E27FC236}">
-                <a16:creationId xmlns:a16="http://schemas.microsoft.com/office/drawing/2014/main" id="{FD15925C-08D4-4BE6-815A-9AB7D02E212C}"/>
+                <a16:creationId xmlns:a16="http://schemas.microsoft.com/office/drawing/2014/main" id="{9BC49B0C-87EC-48AA-B0B4-101753504D3F}"/>
               </a:ext>
             </a:extLst>
           </p:cNvPr>
@@ -5978,7 +5992,7 @@
         <p:spPr>
           <a:xfrm xmlns:a="http://schemas.openxmlformats.org/drawingml/2006/main">
             <a:off x="762000" y="1590675"/>
-            <a:ext cx="7620000" cy="3286125"/>
+            <a:ext cx="7620000" cy="3524250"/>
           </a:xfrm>
           <a:prstGeom xmlns:a="http://schemas.openxmlformats.org/drawingml/2006/main" prst="rect">
             <a:avLst/>
@@ -6013,7 +6027,7 @@
                 <a:ea typeface="Calibri"/>
                 <a:cs typeface="Calibri"/>
               </a:rPr>
-              <a:t>Att kompensera betyder att en kondensator tillför kapacitiv reaktiv effekt som tar ut en del av lastens induktiva Q.</a:t>
+              <a:t>En enfaslast tar P = 4 140 W vid U = 230 V och PF = 0,60.</a:t>
             </a:r>
           </a:p>
           <a:p xmlns:a="http://schemas.openxmlformats.org/drawingml/2006/main">
@@ -6048,109 +6062,17 @@
                 <a:ea typeface="Calibri"/>
                 <a:cs typeface="Calibri"/>
               </a:rPr>
-              <a:t>Exempel: pumpmotorn P = 1 380 W och PF = 0,80. S = 1 380/0,80 = 1 725 VA.</a:t>
-            </a:r>
-          </a:p>
-          <a:p xmlns:a="http://schemas.openxmlformats.org/drawingml/2006/main">
-            <a:pPr>
-              <a:defRPr sz="2100" b="0">
-                <a:solidFill>
-                  <a:srgbClr val="172F43"/>
-                </a:solidFill>
-                <a:latin typeface="Calibri"/>
-                <a:ea typeface="Calibri"/>
-                <a:cs typeface="Calibri"/>
-              </a:defRPr>
-            </a:pPr>
-          </a:p>
-          <a:p xmlns:a="http://schemas.openxmlformats.org/drawingml/2006/main">
-            <a:pPr>
-              <a:defRPr sz="2100" b="0">
-                <a:solidFill>
-                  <a:srgbClr val="172F43"/>
-                </a:solidFill>
-                <a:latin typeface="Calibri"/>
-                <a:ea typeface="Calibri"/>
-                <a:cs typeface="Calibri"/>
-              </a:defRPr>
-            </a:pPr>
-            <a:r>
-              <a:rPr sz="2100" b="0">
-                <a:solidFill>
-                  <a:srgbClr val="172F43"/>
-                </a:solidFill>
-                <a:latin typeface="Calibri"/>
-                <a:ea typeface="Calibri"/>
-                <a:cs typeface="Calibri"/>
-              </a:rPr>
-              <a:t>Q = √(1 725² − 1 380²) = +1 035 var.</a:t>
-            </a:r>
-          </a:p>
-          <a:p xmlns:a="http://schemas.openxmlformats.org/drawingml/2006/main">
-            <a:pPr>
-              <a:defRPr sz="2100" b="0">
-                <a:solidFill>
-                  <a:srgbClr val="172F43"/>
-                </a:solidFill>
-                <a:latin typeface="Calibri"/>
-                <a:ea typeface="Calibri"/>
-                <a:cs typeface="Calibri"/>
-              </a:defRPr>
-            </a:pPr>
-          </a:p>
-          <a:p xmlns:a="http://schemas.openxmlformats.org/drawingml/2006/main">
-            <a:pPr>
-              <a:defRPr sz="2100" b="0">
-                <a:solidFill>
-                  <a:srgbClr val="172F43"/>
-                </a:solidFill>
-                <a:latin typeface="Calibri"/>
-                <a:ea typeface="Calibri"/>
-                <a:cs typeface="Calibri"/>
-              </a:defRPr>
-            </a:pPr>
-            <a:r>
-              <a:rPr sz="2100" b="0">
-                <a:solidFill>
-                  <a:srgbClr val="172F43"/>
-                </a:solidFill>
-                <a:latin typeface="Calibri"/>
-                <a:ea typeface="Calibri"/>
-                <a:cs typeface="Calibri"/>
-              </a:rPr>
-              <a:t>För full kompensation behövs Q</a:t>
-            </a:r>
-            <a:r>
-              <a:rPr sz="2100" b="0" baseline="-25000">
-                <a:solidFill>
-                  <a:srgbClr val="172F43"/>
-                </a:solidFill>
-                <a:latin typeface="Calibri"/>
-                <a:ea typeface="Calibri"/>
-                <a:cs typeface="Calibri"/>
-              </a:rPr>
-              <a:t>kondensator</a:t>
-            </a:r>
-            <a:r>
-              <a:rPr sz="2100" b="0">
-                <a:solidFill>
-                  <a:srgbClr val="172F43"/>
-                </a:solidFill>
-                <a:latin typeface="Calibri"/>
-                <a:ea typeface="Calibri"/>
-                <a:cs typeface="Calibri"/>
-              </a:rPr>
-              <a:t> = −1 035 var. Behovets belopp är 1 035 var.</a:t>
-            </a:r>
-          </a:p>
-        </p:txBody>
-      </p:sp>
-      <p:sp>
-        <p:nvSpPr>
-          <p:cNvPr id="11" name="formula">
-            <a:extLst xmlns:a="http://schemas.openxmlformats.org/drawingml/2006/main">
-              <a:ext uri="{FF2B5EF4-FFF2-40B4-BE49-F238E27FC236}">
-                <a16:creationId xmlns:a16="http://schemas.microsoft.com/office/drawing/2014/main" id="{801BC9A8-6037-45BD-AC98-F0BF79517009}"/>
+              <a:t>Beräkna I och S. Förklara om P skulle ändras bara för att PF förbättras i vår modell.</a:t>
+            </a:r>
+          </a:p>
+        </p:txBody>
+      </p:sp>
+      <p:sp>
+        <p:nvSpPr>
+          <p:cNvPr id="11" name="check">
+            <a:extLst xmlns:a="http://schemas.openxmlformats.org/drawingml/2006/main">
+              <a:ext uri="{FF2B5EF4-FFF2-40B4-BE49-F238E27FC236}">
+                <a16:creationId xmlns:a16="http://schemas.microsoft.com/office/drawing/2014/main" id="{DAC25AC2-956E-4B5F-AE5D-D800FBC91592}"/>
               </a:ext>
             </a:extLst>
           </p:cNvPr>
@@ -6161,8 +6083,8 @@
         </p:nvSpPr>
         <p:spPr>
           <a:xfrm xmlns:a="http://schemas.openxmlformats.org/drawingml/2006/main">
-            <a:off x="762000" y="4953000"/>
-            <a:ext cx="7620000" cy="619125"/>
+            <a:off x="762000" y="5543550"/>
+            <a:ext cx="7620000" cy="438150"/>
           </a:xfrm>
           <a:prstGeom xmlns:a="http://schemas.openxmlformats.org/drawingml/2006/main" prst="rect">
             <a:avLst/>
@@ -6179,7 +6101,7 @@
           <a:lstStyle xmlns:a="http://schemas.openxmlformats.org/drawingml/2006/main"/>
           <a:p xmlns:a="http://schemas.openxmlformats.org/drawingml/2006/main">
             <a:pPr>
-              <a:defRPr sz="2250" b="1">
+              <a:defRPr sz="1725" b="1">
                 <a:solidFill>
                   <a:srgbClr val="064F91"/>
                 </a:solidFill>
@@ -6189,7 +6111,7 @@
               </a:defRPr>
             </a:pPr>
             <a:r>
-              <a:rPr sz="2250" b="1">
+              <a:rPr sz="1725" b="1">
                 <a:solidFill>
                   <a:srgbClr val="064F91"/>
                 </a:solidFill>
@@ -6197,62 +6119,7 @@
                 <a:ea typeface="Calibri"/>
                 <a:cs typeface="Calibri"/>
               </a:rPr>
-              <a:t>Q</a:t>
-            </a:r>
-            <a:r>
-              <a:rPr sz="2250" b="1" baseline="-25000">
-                <a:solidFill>
-                  <a:srgbClr val="064F91"/>
-                </a:solidFill>
-                <a:latin typeface="Calibri"/>
-                <a:ea typeface="Calibri"/>
-                <a:cs typeface="Calibri"/>
-              </a:rPr>
-              <a:t>total</a:t>
-            </a:r>
-            <a:r>
-              <a:rPr sz="2250" b="1">
-                <a:solidFill>
-                  <a:srgbClr val="064F91"/>
-                </a:solidFill>
-                <a:latin typeface="Calibri"/>
-                <a:ea typeface="Calibri"/>
-                <a:cs typeface="Calibri"/>
-              </a:rPr>
-              <a:t> = Q</a:t>
-            </a:r>
-            <a:r>
-              <a:rPr sz="2250" b="1" baseline="-25000">
-                <a:solidFill>
-                  <a:srgbClr val="064F91"/>
-                </a:solidFill>
-                <a:latin typeface="Calibri"/>
-                <a:ea typeface="Calibri"/>
-                <a:cs typeface="Calibri"/>
-              </a:rPr>
-              <a:t>last</a:t>
-            </a:r>
-            <a:r>
-              <a:rPr sz="2250" b="1">
-                <a:solidFill>
-                  <a:srgbClr val="064F91"/>
-                </a:solidFill>
-                <a:latin typeface="Calibri"/>
-                <a:ea typeface="Calibri"/>
-                <a:cs typeface="Calibri"/>
-              </a:rPr>
-              <a:t> + Q</a:t>
-            </a:r>
-            <a:r>
-              <a:rPr sz="2250" b="1" baseline="-25000">
-                <a:solidFill>
-                  <a:srgbClr val="064F91"/>
-                </a:solidFill>
-                <a:latin typeface="Calibri"/>
-                <a:ea typeface="Calibri"/>
-                <a:cs typeface="Calibri"/>
-              </a:rPr>
-              <a:t>kondensator</a:t>
+              <a:t>Räkna innan facit visas.</a:t>
             </a:r>
           </a:p>
         </p:txBody>
@@ -6262,7 +6129,7 @@
           <p:cNvPr id="12" name="section">
             <a:extLst xmlns:a="http://schemas.openxmlformats.org/drawingml/2006/main">
               <a:ext uri="{FF2B5EF4-FFF2-40B4-BE49-F238E27FC236}">
-                <a16:creationId xmlns:a16="http://schemas.microsoft.com/office/drawing/2014/main" id="{8A86158E-F9BC-4810-84A6-91E4CFB69ACB}"/>
+                <a16:creationId xmlns:a16="http://schemas.microsoft.com/office/drawing/2014/main" id="{41D96973-E72A-43BF-9A23-E6F860EB4BA0}"/>
               </a:ext>
             </a:extLst>
           </p:cNvPr>
@@ -6309,7 +6176,7 @@
                 <a:ea typeface="Calibri"/>
                 <a:cs typeface="Calibri"/>
               </a:rPr>
-              <a:t>Fördjupning</a:t>
+              <a:t>Grunddel</a:t>
             </a:r>
           </a:p>
         </p:txBody>
@@ -6319,7 +6186,7 @@
           <p:cNvPr id="13" name="page">
             <a:extLst xmlns:a="http://schemas.openxmlformats.org/drawingml/2006/main">
               <a:ext uri="{FF2B5EF4-FFF2-40B4-BE49-F238E27FC236}">
-                <a16:creationId xmlns:a16="http://schemas.microsoft.com/office/drawing/2014/main" id="{04AE9D52-1D9C-4245-8CC0-F5780480A78F}"/>
+                <a16:creationId xmlns:a16="http://schemas.microsoft.com/office/drawing/2014/main" id="{61F4611D-371A-4B97-99C6-982DA4FEB606}"/>
               </a:ext>
             </a:extLst>
           </p:cNvPr>
@@ -6402,7 +6269,7 @@
           <p:nvPr/>
         </p:nvPicPr>
         <p:blipFill>
-          <a:blip xmlns:r="http://schemas.openxmlformats.org/officeDocument/2006/relationships" xmlns:a="http://schemas.openxmlformats.org/drawingml/2006/main" r:embed="R21e5ffc7b1a74474"/>
+          <a:blip xmlns:r="http://schemas.openxmlformats.org/officeDocument/2006/relationships" xmlns:a="http://schemas.openxmlformats.org/drawingml/2006/main" r:embed="Rb89eca466bd0406b"/>
           <a:stretch xmlns:a="http://schemas.openxmlformats.org/drawingml/2006/main">
             <a:fillRect l="0" t="0" r="0" b="0"/>
           </a:stretch>
@@ -6422,7 +6289,7 @@
           <p:cNvPr id="9" name="title">
             <a:extLst xmlns:a="http://schemas.openxmlformats.org/drawingml/2006/main">
               <a:ext uri="{FF2B5EF4-FFF2-40B4-BE49-F238E27FC236}">
-                <a16:creationId xmlns:a16="http://schemas.microsoft.com/office/drawing/2014/main" id="{63279CE0-5BFF-4A99-8D5C-BC41B8EC7BF5}"/>
+                <a16:creationId xmlns:a16="http://schemas.microsoft.com/office/drawing/2014/main" id="{C1C8C9FE-B159-4A8C-AE11-6F62CC366C00}"/>
               </a:ext>
             </a:extLst>
           </p:cNvPr>
@@ -6469,7 +6336,7 @@
                 <a:ea typeface="Calibri"/>
                 <a:cs typeface="Calibri"/>
               </a:rPr>
-              <a:t>Fördjupning: ledningsförlust</a:t>
+              <a:t>Fördjupning: kompensation</a:t>
             </a:r>
           </a:p>
         </p:txBody>
@@ -6479,7 +6346,7 @@
           <p:cNvPr id="10" name="body">
             <a:extLst xmlns:a="http://schemas.openxmlformats.org/drawingml/2006/main">
               <a:ext uri="{FF2B5EF4-FFF2-40B4-BE49-F238E27FC236}">
-                <a16:creationId xmlns:a16="http://schemas.microsoft.com/office/drawing/2014/main" id="{60BA8162-62C8-4187-84B9-922CF5F9709E}"/>
+                <a16:creationId xmlns:a16="http://schemas.microsoft.com/office/drawing/2014/main" id="{FD15925C-08D4-4BE6-815A-9AB7D02E212C}"/>
               </a:ext>
             </a:extLst>
           </p:cNvPr>
@@ -6526,12 +6393,7 @@
                 <a:ea typeface="Calibri"/>
                 <a:cs typeface="Calibri"/>
               </a:rPr>
-              <a:t>Samma kabel har samma resistans R. Förlusten är I²R.</a:t>
-            </a:r>
-          </a:p>
-          <a:p xmlns:a="http://schemas.openxmlformats.org/drawingml/2006/main">
-            <a:r>
-              <a:t/>
+              <a:t>Att kompensera betyder att en kondensator tillför kapacitiv reaktiv effekt som tar ut en del av lastens induktiva Q.</a:t>
             </a:r>
           </a:p>
           <a:p xmlns:a="http://schemas.openxmlformats.org/drawingml/2006/main">
@@ -6545,6 +6407,18 @@
                 <a:cs typeface="Calibri"/>
               </a:defRPr>
             </a:pPr>
+          </a:p>
+          <a:p xmlns:a="http://schemas.openxmlformats.org/drawingml/2006/main">
+            <a:pPr>
+              <a:defRPr sz="2100" b="0">
+                <a:solidFill>
+                  <a:srgbClr val="172F43"/>
+                </a:solidFill>
+                <a:latin typeface="Calibri"/>
+                <a:ea typeface="Calibri"/>
+                <a:cs typeface="Calibri"/>
+              </a:defRPr>
+            </a:pPr>
             <a:r>
               <a:rPr sz="2100" b="0">
                 <a:solidFill>
@@ -6554,12 +6428,7 @@
                 <a:ea typeface="Calibri"/>
                 <a:cs typeface="Calibri"/>
               </a:rPr>
-              <a:t>När strömmen minskar från 12 A till 6 A återstår (6/12)² = 0,25 av ledningsförlusten.</a:t>
-            </a:r>
-          </a:p>
-          <a:p xmlns:a="http://schemas.openxmlformats.org/drawingml/2006/main">
-            <a:r>
-              <a:t/>
+              <a:t>Exempel: pumpmotorn P = 1 380 W och PF = 0,80. S = 1 380/0,80 = 1 725 VA.</a:t>
             </a:r>
           </a:p>
           <a:p xmlns:a="http://schemas.openxmlformats.org/drawingml/2006/main">
@@ -6573,6 +6442,18 @@
                 <a:cs typeface="Calibri"/>
               </a:defRPr>
             </a:pPr>
+          </a:p>
+          <a:p xmlns:a="http://schemas.openxmlformats.org/drawingml/2006/main">
+            <a:pPr>
+              <a:defRPr sz="2100" b="0">
+                <a:solidFill>
+                  <a:srgbClr val="172F43"/>
+                </a:solidFill>
+                <a:latin typeface="Calibri"/>
+                <a:ea typeface="Calibri"/>
+                <a:cs typeface="Calibri"/>
+              </a:defRPr>
+            </a:pPr>
             <a:r>
               <a:rPr sz="2100" b="0">
                 <a:solidFill>
@@ -6582,7 +6463,64 @@
                 <a:ea typeface="Calibri"/>
                 <a:cs typeface="Calibri"/>
               </a:rPr>
-              <a:t>Ledningsförlusten minskar med 75 %. Lastens aktiva effekt behöver inte minska.</a:t>
+              <a:t>Q = √(1 725² − 1 380²) = +1 035 var.</a:t>
+            </a:r>
+          </a:p>
+          <a:p xmlns:a="http://schemas.openxmlformats.org/drawingml/2006/main">
+            <a:pPr>
+              <a:defRPr sz="2100" b="0">
+                <a:solidFill>
+                  <a:srgbClr val="172F43"/>
+                </a:solidFill>
+                <a:latin typeface="Calibri"/>
+                <a:ea typeface="Calibri"/>
+                <a:cs typeface="Calibri"/>
+              </a:defRPr>
+            </a:pPr>
+          </a:p>
+          <a:p xmlns:a="http://schemas.openxmlformats.org/drawingml/2006/main">
+            <a:pPr>
+              <a:defRPr sz="2100" b="0">
+                <a:solidFill>
+                  <a:srgbClr val="172F43"/>
+                </a:solidFill>
+                <a:latin typeface="Calibri"/>
+                <a:ea typeface="Calibri"/>
+                <a:cs typeface="Calibri"/>
+              </a:defRPr>
+            </a:pPr>
+            <a:r>
+              <a:rPr sz="2100" b="0">
+                <a:solidFill>
+                  <a:srgbClr val="172F43"/>
+                </a:solidFill>
+                <a:latin typeface="Calibri"/>
+                <a:ea typeface="Calibri"/>
+                <a:cs typeface="Calibri"/>
+              </a:rPr>
+              <a:t>För full kompensation behövs Q</a:t>
+            </a:r>
+            <a:r>
+              <a:rPr sz="2100" b="0" baseline="-25000">
+                <a:solidFill>
+                  <a:srgbClr val="172F43"/>
+                </a:solidFill>
+                <a:latin typeface="Calibri"/>
+                <a:ea typeface="Calibri"/>
+                <a:cs typeface="Calibri"/>
+              </a:rPr>
+              <a:t>kondensator</a:t>
+            </a:r>
+            <a:r>
+              <a:rPr sz="2100" b="0">
+                <a:solidFill>
+                  <a:srgbClr val="172F43"/>
+                </a:solidFill>
+                <a:latin typeface="Calibri"/>
+                <a:ea typeface="Calibri"/>
+                <a:cs typeface="Calibri"/>
+              </a:rPr>
+              <a:t> = −1 035 var. Behovets belopp är 1 035 var.</a:t>
             </a:r>
           </a:p>
         </p:txBody>
@@ -6592,7 +6530,7 @@
           <p:cNvPr id="11" name="formula">
             <a:extLst xmlns:a="http://schemas.openxmlformats.org/drawingml/2006/main">
               <a:ext uri="{FF2B5EF4-FFF2-40B4-BE49-F238E27FC236}">
-                <a16:creationId xmlns:a16="http://schemas.microsoft.com/office/drawing/2014/main" id="{0587162A-5AF8-49AF-9BC6-D446FB41F2FE}"/>
+                <a16:creationId xmlns:a16="http://schemas.microsoft.com/office/drawing/2014/main" id="{801BC9A8-6037-45BD-AC98-F0BF79517009}"/>
               </a:ext>
             </a:extLst>
           </p:cNvPr>
@@ -6639,7 +6577,7 @@
                 <a:ea typeface="Calibri"/>
                 <a:cs typeface="Calibri"/>
               </a:rPr>
-              <a:t>P</a:t>
+              <a:t>Q</a:t>
             </a:r>
             <a:r>
               <a:rPr sz="2250" b="1" baseline="-25000">
@@ -6650,7 +6588,7 @@
                 <a:ea typeface="Calibri"/>
                 <a:cs typeface="Calibri"/>
               </a:rPr>
-              <a:t>förlust</a:t>
+              <a:t>total</a:t>
             </a:r>
             <a:r>
               <a:rPr sz="2250" b="1">
@@ -6661,7 +6599,40 @@
                 <a:ea typeface="Calibri"/>
                 <a:cs typeface="Calibri"/>
               </a:rPr>
-              <a:t> = I²R</a:t>
+              <a:t> = Q</a:t>
+            </a:r>
+            <a:r>
+              <a:rPr sz="2250" b="1" baseline="-25000">
+                <a:solidFill>
+                  <a:srgbClr val="064F91"/>
+                </a:solidFill>
+                <a:latin typeface="Calibri"/>
+                <a:ea typeface="Calibri"/>
+                <a:cs typeface="Calibri"/>
+              </a:rPr>
+              <a:t>last</a:t>
+            </a:r>
+            <a:r>
+              <a:rPr sz="2250" b="1">
+                <a:solidFill>
+                  <a:srgbClr val="064F91"/>
+                </a:solidFill>
+                <a:latin typeface="Calibri"/>
+                <a:ea typeface="Calibri"/>
+                <a:cs typeface="Calibri"/>
+              </a:rPr>
+              <a:t> + Q</a:t>
+            </a:r>
+            <a:r>
+              <a:rPr sz="2250" b="1" baseline="-25000">
+                <a:solidFill>
+                  <a:srgbClr val="064F91"/>
+                </a:solidFill>
+                <a:latin typeface="Calibri"/>
+                <a:ea typeface="Calibri"/>
+                <a:cs typeface="Calibri"/>
+              </a:rPr>
+              <a:t>kondensator</a:t>
             </a:r>
           </a:p>
         </p:txBody>
@@ -6671,7 +6642,7 @@
           <p:cNvPr id="12" name="section">
             <a:extLst xmlns:a="http://schemas.openxmlformats.org/drawingml/2006/main">
               <a:ext uri="{FF2B5EF4-FFF2-40B4-BE49-F238E27FC236}">
-                <a16:creationId xmlns:a16="http://schemas.microsoft.com/office/drawing/2014/main" id="{22A6E9C6-24B8-420D-9708-4BC86F5BC42D}"/>
+                <a16:creationId xmlns:a16="http://schemas.microsoft.com/office/drawing/2014/main" id="{8A86158E-F9BC-4810-84A6-91E4CFB69ACB}"/>
               </a:ext>
             </a:extLst>
           </p:cNvPr>
@@ -6728,7 +6699,7 @@
           <p:cNvPr id="13" name="page">
             <a:extLst xmlns:a="http://schemas.openxmlformats.org/drawingml/2006/main">
               <a:ext uri="{FF2B5EF4-FFF2-40B4-BE49-F238E27FC236}">
-                <a16:creationId xmlns:a16="http://schemas.microsoft.com/office/drawing/2014/main" id="{BD8B7B13-0FF1-49A7-8945-B8D7B3D0D10D}"/>
+                <a16:creationId xmlns:a16="http://schemas.microsoft.com/office/drawing/2014/main" id="{04AE9D52-1D9C-4245-8CC0-F5780480A78F}"/>
               </a:ext>
             </a:extLst>
           </p:cNvPr>
@@ -6804,14 +6775,14 @@
       </p:grpSpPr>
       <p:pic>
         <p:nvPicPr>
-          <p:cNvPr id="13" name="Bildobjekt 2"/>
+          <p:cNvPr id="14" name="Bildobjekt 2"/>
           <p:cNvPicPr>
             <a:picLocks xmlns:a="http://schemas.openxmlformats.org/drawingml/2006/main" noChangeAspect="1"/>
           </p:cNvPicPr>
           <p:nvPr/>
         </p:nvPicPr>
         <p:blipFill>
-          <a:blip xmlns:r="http://schemas.openxmlformats.org/officeDocument/2006/relationships" xmlns:a="http://schemas.openxmlformats.org/drawingml/2006/main" r:embed="R91c645dbd77a430b"/>
+          <a:blip xmlns:r="http://schemas.openxmlformats.org/officeDocument/2006/relationships" xmlns:a="http://schemas.openxmlformats.org/drawingml/2006/main" r:embed="R21e5ffc7b1a74474"/>
           <a:stretch xmlns:a="http://schemas.openxmlformats.org/drawingml/2006/main">
             <a:fillRect l="0" t="0" r="0" b="0"/>
           </a:stretch>
@@ -6831,7 +6802,7 @@
           <p:cNvPr id="9" name="title">
             <a:extLst xmlns:a="http://schemas.openxmlformats.org/drawingml/2006/main">
               <a:ext uri="{FF2B5EF4-FFF2-40B4-BE49-F238E27FC236}">
-                <a16:creationId xmlns:a16="http://schemas.microsoft.com/office/drawing/2014/main" id="{55480149-87EF-4BDD-9132-3A48107A6898}"/>
+                <a16:creationId xmlns:a16="http://schemas.microsoft.com/office/drawing/2014/main" id="{63279CE0-5BFF-4A99-8D5C-BC41B8EC7BF5}"/>
               </a:ext>
             </a:extLst>
           </p:cNvPr>
@@ -6878,7 +6849,7 @@
                 <a:ea typeface="Calibri"/>
                 <a:cs typeface="Calibri"/>
               </a:rPr>
-              <a:t>Fördjupning: PF och cos φ</a:t>
+              <a:t>Fördjupning: ledningsförlust</a:t>
             </a:r>
           </a:p>
         </p:txBody>
@@ -6888,7 +6859,7 @@
           <p:cNvPr id="10" name="body">
             <a:extLst xmlns:a="http://schemas.openxmlformats.org/drawingml/2006/main">
               <a:ext uri="{FF2B5EF4-FFF2-40B4-BE49-F238E27FC236}">
-                <a16:creationId xmlns:a16="http://schemas.microsoft.com/office/drawing/2014/main" id="{F82FC9B9-47B1-4B91-903D-2181A9AEA180}"/>
+                <a16:creationId xmlns:a16="http://schemas.microsoft.com/office/drawing/2014/main" id="{60BA8162-62C8-4187-84B9-922CF5F9709E}"/>
               </a:ext>
             </a:extLst>
           </p:cNvPr>
@@ -6900,7 +6871,7 @@
         <p:spPr>
           <a:xfrm xmlns:a="http://schemas.openxmlformats.org/drawingml/2006/main">
             <a:off x="762000" y="1590675"/>
-            <a:ext cx="7620000" cy="3524250"/>
+            <a:ext cx="7620000" cy="3286125"/>
           </a:xfrm>
           <a:prstGeom xmlns:a="http://schemas.openxmlformats.org/drawingml/2006/main" prst="rect">
             <a:avLst/>
@@ -6935,7 +6906,12 @@
                 <a:ea typeface="Calibri"/>
                 <a:cs typeface="Calibri"/>
               </a:rPr>
-              <a:t>PF = P/S gäller även när strömmen är förvrängd av övertoner (strömmar med 2, 3, 5 … gånger nätfrekvensen, till exempel från elektronik).</a:t>
+              <a:t>Samma kabel har samma resistans R. Förlusten är I²R.</a:t>
+            </a:r>
+          </a:p>
+          <a:p xmlns:a="http://schemas.openxmlformats.org/drawingml/2006/main">
+            <a:r>
+              <a:t/>
             </a:r>
           </a:p>
           <a:p xmlns:a="http://schemas.openxmlformats.org/drawingml/2006/main">
@@ -6949,6 +6925,22 @@
                 <a:cs typeface="Calibri"/>
               </a:defRPr>
             </a:pPr>
+            <a:r>
+              <a:rPr sz="2100" b="0">
+                <a:solidFill>
+                  <a:srgbClr val="172F43"/>
+                </a:solidFill>
+                <a:latin typeface="Calibri"/>
+                <a:ea typeface="Calibri"/>
+                <a:cs typeface="Calibri"/>
+              </a:rPr>
+              <a:t>När strömmen minskar från 12 A till 6 A återstår (6/12)² = 0,25 av ledningsförlusten.</a:t>
+            </a:r>
+          </a:p>
+          <a:p xmlns:a="http://schemas.openxmlformats.org/drawingml/2006/main">
+            <a:r>
+              <a:t/>
+            </a:r>
           </a:p>
           <a:p xmlns:a="http://schemas.openxmlformats.org/drawingml/2006/main">
             <a:pPr>
@@ -6970,87 +6962,17 @@
                 <a:ea typeface="Calibri"/>
                 <a:cs typeface="Calibri"/>
               </a:rPr>
-              <a:t>PF = cos φ förutsätter sinusformad spänning och ström.</a:t>
-            </a:r>
-          </a:p>
-          <a:p xmlns:a="http://schemas.openxmlformats.org/drawingml/2006/main">
-            <a:pPr>
-              <a:defRPr sz="2100" b="0">
-                <a:solidFill>
-                  <a:srgbClr val="172F43"/>
-                </a:solidFill>
-                <a:latin typeface="Calibri"/>
-                <a:ea typeface="Calibri"/>
-                <a:cs typeface="Calibri"/>
-              </a:defRPr>
-            </a:pPr>
-          </a:p>
-          <a:p xmlns:a="http://schemas.openxmlformats.org/drawingml/2006/main">
-            <a:pPr>
-              <a:defRPr sz="2100" b="0">
-                <a:solidFill>
-                  <a:srgbClr val="172F43"/>
-                </a:solidFill>
-                <a:latin typeface="Calibri"/>
-                <a:ea typeface="Calibri"/>
-                <a:cs typeface="Calibri"/>
-              </a:defRPr>
-            </a:pPr>
-            <a:r>
-              <a:rPr sz="2100" b="0">
-                <a:solidFill>
-                  <a:srgbClr val="172F43"/>
-                </a:solidFill>
-                <a:latin typeface="Calibri"/>
-                <a:ea typeface="Calibri"/>
-                <a:cs typeface="Calibri"/>
-              </a:rPr>
-              <a:t>Exempel: P = 800 W och S = 1 000 VA ger PF = 0,80, även om grundtonens cos φ är 0,95.</a:t>
-            </a:r>
-          </a:p>
-          <a:p xmlns:a="http://schemas.openxmlformats.org/drawingml/2006/main">
-            <a:pPr>
-              <a:defRPr sz="2100" b="0">
-                <a:solidFill>
-                  <a:srgbClr val="172F43"/>
-                </a:solidFill>
-                <a:latin typeface="Calibri"/>
-                <a:ea typeface="Calibri"/>
-                <a:cs typeface="Calibri"/>
-              </a:defRPr>
-            </a:pPr>
-          </a:p>
-          <a:p xmlns:a="http://schemas.openxmlformats.org/drawingml/2006/main">
-            <a:pPr>
-              <a:defRPr sz="2100" b="0">
-                <a:solidFill>
-                  <a:srgbClr val="172F43"/>
-                </a:solidFill>
-                <a:latin typeface="Calibri"/>
-                <a:ea typeface="Calibri"/>
-                <a:cs typeface="Calibri"/>
-              </a:defRPr>
-            </a:pPr>
-            <a:r>
-              <a:rPr sz="2100" b="0">
-                <a:solidFill>
-                  <a:srgbClr val="172F43"/>
-                </a:solidFill>
-                <a:latin typeface="Calibri"/>
-                <a:ea typeface="Calibri"/>
-                <a:cs typeface="Calibri"/>
-              </a:rPr>
-              <a:t>Den enkla effekttriangeln beskriver inte alla effekter vid övertoner.</a:t>
-            </a:r>
-          </a:p>
-        </p:txBody>
-      </p:sp>
-      <p:sp>
-        <p:nvSpPr>
-          <p:cNvPr id="11" name="section">
-            <a:extLst xmlns:a="http://schemas.openxmlformats.org/drawingml/2006/main">
-              <a:ext uri="{FF2B5EF4-FFF2-40B4-BE49-F238E27FC236}">
-                <a16:creationId xmlns:a16="http://schemas.microsoft.com/office/drawing/2014/main" id="{48A7D039-1204-4AC7-A9E1-78237CA4947B}"/>
+              <a:t>Ledningsförlusten minskar med 75 %. Lastens aktiva effekt behöver inte minska.</a:t>
+            </a:r>
+          </a:p>
+        </p:txBody>
+      </p:sp>
+      <p:sp>
+        <p:nvSpPr>
+          <p:cNvPr id="11" name="formula">
+            <a:extLst xmlns:a="http://schemas.openxmlformats.org/drawingml/2006/main">
+              <a:ext uri="{FF2B5EF4-FFF2-40B4-BE49-F238E27FC236}">
+                <a16:creationId xmlns:a16="http://schemas.microsoft.com/office/drawing/2014/main" id="{0587162A-5AF8-49AF-9BC6-D446FB41F2FE}"/>
               </a:ext>
             </a:extLst>
           </p:cNvPr>
@@ -7061,8 +6983,8 @@
         </p:nvSpPr>
         <p:spPr>
           <a:xfrm xmlns:a="http://schemas.openxmlformats.org/drawingml/2006/main">
-            <a:off x="1809750" y="6419850"/>
-            <a:ext cx="4191000" cy="266700"/>
+            <a:off x="762000" y="4953000"/>
+            <a:ext cx="7620000" cy="619125"/>
           </a:xfrm>
           <a:prstGeom xmlns:a="http://schemas.openxmlformats.org/drawingml/2006/main" prst="rect">
             <a:avLst/>
@@ -7079,6 +7001,85 @@
           <a:lstStyle xmlns:a="http://schemas.openxmlformats.org/drawingml/2006/main"/>
           <a:p xmlns:a="http://schemas.openxmlformats.org/drawingml/2006/main">
             <a:pPr>
+              <a:defRPr sz="2250" b="1">
+                <a:solidFill>
+                  <a:srgbClr val="064F91"/>
+                </a:solidFill>
+                <a:latin typeface="Calibri"/>
+                <a:ea typeface="Calibri"/>
+                <a:cs typeface="Calibri"/>
+              </a:defRPr>
+            </a:pPr>
+            <a:r>
+              <a:rPr sz="2250" b="1">
+                <a:solidFill>
+                  <a:srgbClr val="064F91"/>
+                </a:solidFill>
+                <a:latin typeface="Calibri"/>
+                <a:ea typeface="Calibri"/>
+                <a:cs typeface="Calibri"/>
+              </a:rPr>
+              <a:t>P</a:t>
+            </a:r>
+            <a:r>
+              <a:rPr sz="2250" b="1" baseline="-25000">
+                <a:solidFill>
+                  <a:srgbClr val="064F91"/>
+                </a:solidFill>
+                <a:latin typeface="Calibri"/>
+                <a:ea typeface="Calibri"/>
+                <a:cs typeface="Calibri"/>
+              </a:rPr>
+              <a:t>förlust</a:t>
+            </a:r>
+            <a:r>
+              <a:rPr sz="2250" b="1">
+                <a:solidFill>
+                  <a:srgbClr val="064F91"/>
+                </a:solidFill>
+                <a:latin typeface="Calibri"/>
+                <a:ea typeface="Calibri"/>
+                <a:cs typeface="Calibri"/>
+              </a:rPr>
+              <a:t> = I²R</a:t>
+            </a:r>
+          </a:p>
+        </p:txBody>
+      </p:sp>
+      <p:sp>
+        <p:nvSpPr>
+          <p:cNvPr id="12" name="section">
+            <a:extLst xmlns:a="http://schemas.openxmlformats.org/drawingml/2006/main">
+              <a:ext uri="{FF2B5EF4-FFF2-40B4-BE49-F238E27FC236}">
+                <a16:creationId xmlns:a16="http://schemas.microsoft.com/office/drawing/2014/main" id="{22A6E9C6-24B8-420D-9708-4BC86F5BC42D}"/>
+              </a:ext>
+            </a:extLst>
+          </p:cNvPr>
+          <p:cNvSpPr>
+            <a:spLocks xmlns:a="http://schemas.openxmlformats.org/drawingml/2006/main" noGrp="1"/>
+          </p:cNvSpPr>
+          <p:nvPr/>
+        </p:nvSpPr>
+        <p:spPr>
+          <a:xfrm xmlns:a="http://schemas.openxmlformats.org/drawingml/2006/main">
+            <a:off x="1809750" y="6419850"/>
+            <a:ext cx="4191000" cy="266700"/>
+          </a:xfrm>
+          <a:prstGeom xmlns:a="http://schemas.openxmlformats.org/drawingml/2006/main" prst="rect">
+            <a:avLst/>
+          </a:prstGeom>
+          <a:noFill xmlns:a="http://schemas.openxmlformats.org/drawingml/2006/main"/>
+          <a:ln xmlns:a="http://schemas.openxmlformats.org/drawingml/2006/main" w="0">
+            <a:noFill/>
+          </a:ln>
+        </p:spPr>
+        <p:txBody>
+          <a:bodyPr xmlns:a="http://schemas.openxmlformats.org/drawingml/2006/main" lIns="0" tIns="0" rIns="0" bIns="0" anchor="t">
+            <a:noAutofit/>
+          </a:bodyPr>
+          <a:lstStyle xmlns:a="http://schemas.openxmlformats.org/drawingml/2006/main"/>
+          <a:p xmlns:a="http://schemas.openxmlformats.org/drawingml/2006/main">
+            <a:pPr>
               <a:defRPr sz="1275" b="0">
                 <a:solidFill>
                   <a:srgbClr val="FFFFFF"/>
@@ -7104,10 +7105,10 @@
       </p:sp>
       <p:sp>
         <p:nvSpPr>
-          <p:cNvPr id="12" name="page">
-            <a:extLst xmlns:a="http://schemas.openxmlformats.org/drawingml/2006/main">
-              <a:ext uri="{FF2B5EF4-FFF2-40B4-BE49-F238E27FC236}">
-                <a16:creationId xmlns:a16="http://schemas.microsoft.com/office/drawing/2014/main" id="{DB2673E6-2197-47BA-9F59-695A8AB69541}"/>
+          <p:cNvPr id="13" name="page">
+            <a:extLst xmlns:a="http://schemas.openxmlformats.org/drawingml/2006/main">
+              <a:ext uri="{FF2B5EF4-FFF2-40B4-BE49-F238E27FC236}">
+                <a16:creationId xmlns:a16="http://schemas.microsoft.com/office/drawing/2014/main" id="{BD8B7B13-0FF1-49A7-8945-B8D7B3D0D10D}"/>
               </a:ext>
             </a:extLst>
           </p:cNvPr>
@@ -7190,7 +7191,7 @@
           <p:nvPr/>
         </p:nvPicPr>
         <p:blipFill>
-          <a:blip xmlns:r="http://schemas.openxmlformats.org/officeDocument/2006/relationships" xmlns:a="http://schemas.openxmlformats.org/drawingml/2006/main" r:embed="R67bd4d6f7f944216"/>
+          <a:blip xmlns:r="http://schemas.openxmlformats.org/officeDocument/2006/relationships" xmlns:a="http://schemas.openxmlformats.org/drawingml/2006/main" r:embed="R91c645dbd77a430b"/>
           <a:stretch xmlns:a="http://schemas.openxmlformats.org/drawingml/2006/main">
             <a:fillRect l="0" t="0" r="0" b="0"/>
           </a:stretch>
@@ -7210,7 +7211,7 @@
           <p:cNvPr id="9" name="title">
             <a:extLst xmlns:a="http://schemas.openxmlformats.org/drawingml/2006/main">
               <a:ext uri="{FF2B5EF4-FFF2-40B4-BE49-F238E27FC236}">
-                <a16:creationId xmlns:a16="http://schemas.microsoft.com/office/drawing/2014/main" id="{B57FC4B3-02F2-43CF-AA58-8E6BC56D5079}"/>
+                <a16:creationId xmlns:a16="http://schemas.microsoft.com/office/drawing/2014/main" id="{55480149-87EF-4BDD-9132-3A48107A6898}"/>
               </a:ext>
             </a:extLst>
           </p:cNvPr>
@@ -7257,7 +7258,7 @@
                 <a:ea typeface="Calibri"/>
                 <a:cs typeface="Calibri"/>
               </a:rPr>
-              <a:t>Kontroll före redovisning</a:t>
+              <a:t>Fördjupning: PF och cos φ</a:t>
             </a:r>
           </a:p>
         </p:txBody>
@@ -7267,7 +7268,7 @@
           <p:cNvPr id="10" name="body">
             <a:extLst xmlns:a="http://schemas.openxmlformats.org/drawingml/2006/main">
               <a:ext uri="{FF2B5EF4-FFF2-40B4-BE49-F238E27FC236}">
-                <a16:creationId xmlns:a16="http://schemas.microsoft.com/office/drawing/2014/main" id="{617D7394-7B31-4A7B-8E39-EDB55840FA38}"/>
+                <a16:creationId xmlns:a16="http://schemas.microsoft.com/office/drawing/2014/main" id="{F82FC9B9-47B1-4B91-903D-2181A9AEA180}"/>
               </a:ext>
             </a:extLst>
           </p:cNvPr>
@@ -7314,7 +7315,7 @@
                 <a:ea typeface="Calibri"/>
                 <a:cs typeface="Calibri"/>
               </a:rPr>
-              <a:t>Kan du förklara skillnaden mellan W (watt, aktiv effekt), var (voltampere reaktiv, reaktiv effekt) och VA (voltampere, skenbar effekt)?</a:t>
+              <a:t>PF = P/S gäller även när strömmen är förvrängd av övertoner (strömmar med 2, 3, 5 … gånger nätfrekvensen, till exempel från elektronik).</a:t>
             </a:r>
           </a:p>
           <a:p xmlns:a="http://schemas.openxmlformats.org/drawingml/2006/main">
@@ -7349,7 +7350,7 @@
                 <a:ea typeface="Calibri"/>
                 <a:cs typeface="Calibri"/>
               </a:rPr>
-              <a:t>Kan du räkna I när U, P och PF är givna?</a:t>
+              <a:t>PF = cos φ förutsätter sinusformad spänning och ström.</a:t>
             </a:r>
           </a:p>
           <a:p xmlns:a="http://schemas.openxmlformats.org/drawingml/2006/main">
@@ -7384,7 +7385,7 @@
                 <a:ea typeface="Calibri"/>
                 <a:cs typeface="Calibri"/>
               </a:rPr>
-              <a:t>Kan du förklara vad som ändras när PF sjunker vid samma P och U?</a:t>
+              <a:t>Exempel: P = 800 W och S = 1 000 VA ger PF = 0,80, även om grundtonens cos φ är 0,95.</a:t>
             </a:r>
           </a:p>
           <a:p xmlns:a="http://schemas.openxmlformats.org/drawingml/2006/main">
@@ -7419,7 +7420,7 @@
                 <a:ea typeface="Calibri"/>
                 <a:cs typeface="Calibri"/>
               </a:rPr>
-              <a:t>Spara ditt grundprotokoll. Läraren bedömer metoden och förklaringen.</a:t>
+              <a:t>Den enkla effekttriangeln beskriver inte alla effekter vid övertoner.</a:t>
             </a:r>
           </a:p>
         </p:txBody>
@@ -7429,7 +7430,7 @@
           <p:cNvPr id="11" name="section">
             <a:extLst xmlns:a="http://schemas.openxmlformats.org/drawingml/2006/main">
               <a:ext uri="{FF2B5EF4-FFF2-40B4-BE49-F238E27FC236}">
-                <a16:creationId xmlns:a16="http://schemas.microsoft.com/office/drawing/2014/main" id="{E3187B5A-CCB4-446F-BF03-DF5EF38BACEA}"/>
+                <a16:creationId xmlns:a16="http://schemas.microsoft.com/office/drawing/2014/main" id="{48A7D039-1204-4AC7-A9E1-78237CA4947B}"/>
               </a:ext>
             </a:extLst>
           </p:cNvPr>
@@ -7476,7 +7477,7 @@
                 <a:ea typeface="Calibri"/>
                 <a:cs typeface="Calibri"/>
               </a:rPr>
-              <a:t>Grunddel</a:t>
+              <a:t>Fördjupning</a:t>
             </a:r>
           </a:p>
         </p:txBody>
@@ -7486,7 +7487,7 @@
           <p:cNvPr id="12" name="page">
             <a:extLst xmlns:a="http://schemas.openxmlformats.org/drawingml/2006/main">
               <a:ext uri="{FF2B5EF4-FFF2-40B4-BE49-F238E27FC236}">
-                <a16:creationId xmlns:a16="http://schemas.microsoft.com/office/drawing/2014/main" id="{7996832E-D081-4829-BE34-0D7D8ED1293E}"/>
+                <a16:creationId xmlns:a16="http://schemas.microsoft.com/office/drawing/2014/main" id="{DB2673E6-2197-47BA-9F59-695A8AB69541}"/>
               </a:ext>
             </a:extLst>
           </p:cNvPr>
@@ -7534,6 +7535,385 @@
                 <a:cs typeface="Calibri"/>
               </a:rPr>
               <a:t>15</a:t>
+            </a:r>
+          </a:p>
+        </p:txBody>
+      </p:sp>
+    </p:spTree>
+    <p:extLst>
+      <p:ext uri="{BB962C8B-B14F-4D97-AF65-F5344CB8AC3E}">
+        <p14:creationId xmlns:p14="http://schemas.microsoft.com/office/powerpoint/2010/main" val="2747996220"/>
+      </p:ext>
+    </p:extLst>
+  </p:cSld>
+</p:sld>
+</file>
+
+<file path=ppt/slides/slide16.xml><?xml version="1.0" encoding="utf-8"?>
+<p:sld xmlns:p="http://schemas.openxmlformats.org/presentationml/2006/main">
+  <p:cSld>
+    <p:spTree>
+      <p:nvGrpSpPr>
+        <p:cNvPr id="1" name=""/>
+        <p:cNvGrpSpPr/>
+        <p:nvPr/>
+      </p:nvGrpSpPr>
+      <p:grpSpPr>
+        <a:xfrm xmlns:a="http://schemas.openxmlformats.org/drawingml/2006/main"/>
+      </p:grpSpPr>
+      <p:pic>
+        <p:nvPicPr>
+          <p:cNvPr id="13" name="Bildobjekt 2"/>
+          <p:cNvPicPr>
+            <a:picLocks xmlns:a="http://schemas.openxmlformats.org/drawingml/2006/main" noChangeAspect="1"/>
+          </p:cNvPicPr>
+          <p:nvPr/>
+        </p:nvPicPr>
+        <p:blipFill>
+          <a:blip xmlns:r="http://schemas.openxmlformats.org/officeDocument/2006/relationships" xmlns:a="http://schemas.openxmlformats.org/drawingml/2006/main" r:embed="R67bd4d6f7f944216"/>
+          <a:stretch xmlns:a="http://schemas.openxmlformats.org/drawingml/2006/main">
+            <a:fillRect l="0" t="0" r="0" b="0"/>
+          </a:stretch>
+        </p:blipFill>
+        <p:spPr>
+          <a:xfrm xmlns:a="http://schemas.openxmlformats.org/drawingml/2006/main">
+            <a:off x="0" y="6098791"/>
+            <a:ext cx="9144006" cy="763524"/>
+          </a:xfrm>
+          <a:prstGeom xmlns:a="http://schemas.openxmlformats.org/drawingml/2006/main" prst="rect">
+            <a:avLst/>
+          </a:prstGeom>
+        </p:spPr>
+      </p:pic>
+      <p:sp>
+        <p:nvSpPr>
+          <p:cNvPr id="9" name="title">
+            <a:extLst xmlns:a="http://schemas.openxmlformats.org/drawingml/2006/main">
+              <a:ext uri="{FF2B5EF4-FFF2-40B4-BE49-F238E27FC236}">
+                <a16:creationId xmlns:a16="http://schemas.microsoft.com/office/drawing/2014/main" id="{B57FC4B3-02F2-43CF-AA58-8E6BC56D5079}"/>
+              </a:ext>
+            </a:extLst>
+          </p:cNvPr>
+          <p:cNvSpPr>
+            <a:spLocks xmlns:a="http://schemas.openxmlformats.org/drawingml/2006/main" noGrp="1"/>
+          </p:cNvSpPr>
+          <p:nvPr/>
+        </p:nvSpPr>
+        <p:spPr>
+          <a:xfrm xmlns:a="http://schemas.openxmlformats.org/drawingml/2006/main">
+            <a:off x="571500" y="428625"/>
+            <a:ext cx="8001000" cy="781050"/>
+          </a:xfrm>
+          <a:prstGeom xmlns:a="http://schemas.openxmlformats.org/drawingml/2006/main" prst="rect">
+            <a:avLst/>
+          </a:prstGeom>
+          <a:noFill xmlns:a="http://schemas.openxmlformats.org/drawingml/2006/main"/>
+          <a:ln xmlns:a="http://schemas.openxmlformats.org/drawingml/2006/main" w="0">
+            <a:noFill/>
+          </a:ln>
+        </p:spPr>
+        <p:txBody>
+          <a:bodyPr xmlns:a="http://schemas.openxmlformats.org/drawingml/2006/main" lIns="0" tIns="0" rIns="0" bIns="0" anchor="t">
+            <a:noAutofit/>
+          </a:bodyPr>
+          <a:lstStyle xmlns:a="http://schemas.openxmlformats.org/drawingml/2006/main"/>
+          <a:p xmlns:a="http://schemas.openxmlformats.org/drawingml/2006/main">
+            <a:pPr>
+              <a:defRPr sz="3000" b="1">
+                <a:solidFill>
+                  <a:srgbClr val="111111"/>
+                </a:solidFill>
+                <a:latin typeface="Calibri"/>
+                <a:ea typeface="Calibri"/>
+                <a:cs typeface="Calibri"/>
+              </a:defRPr>
+            </a:pPr>
+            <a:r>
+              <a:rPr sz="3000" b="1">
+                <a:solidFill>
+                  <a:srgbClr val="111111"/>
+                </a:solidFill>
+                <a:latin typeface="Calibri"/>
+                <a:ea typeface="Calibri"/>
+                <a:cs typeface="Calibri"/>
+              </a:rPr>
+              <a:t>Kontroll före redovisning</a:t>
+            </a:r>
+          </a:p>
+        </p:txBody>
+      </p:sp>
+      <p:sp>
+        <p:nvSpPr>
+          <p:cNvPr id="10" name="body">
+            <a:extLst xmlns:a="http://schemas.openxmlformats.org/drawingml/2006/main">
+              <a:ext uri="{FF2B5EF4-FFF2-40B4-BE49-F238E27FC236}">
+                <a16:creationId xmlns:a16="http://schemas.microsoft.com/office/drawing/2014/main" id="{617D7394-7B31-4A7B-8E39-EDB55840FA38}"/>
+              </a:ext>
+            </a:extLst>
+          </p:cNvPr>
+          <p:cNvSpPr>
+            <a:spLocks xmlns:a="http://schemas.openxmlformats.org/drawingml/2006/main" noGrp="1"/>
+          </p:cNvSpPr>
+          <p:nvPr/>
+        </p:nvSpPr>
+        <p:spPr>
+          <a:xfrm xmlns:a="http://schemas.openxmlformats.org/drawingml/2006/main">
+            <a:off x="762000" y="1590675"/>
+            <a:ext cx="7620000" cy="3524250"/>
+          </a:xfrm>
+          <a:prstGeom xmlns:a="http://schemas.openxmlformats.org/drawingml/2006/main" prst="rect">
+            <a:avLst/>
+          </a:prstGeom>
+          <a:noFill xmlns:a="http://schemas.openxmlformats.org/drawingml/2006/main"/>
+          <a:ln xmlns:a="http://schemas.openxmlformats.org/drawingml/2006/main" w="0">
+            <a:noFill/>
+          </a:ln>
+        </p:spPr>
+        <p:txBody>
+          <a:bodyPr xmlns:a="http://schemas.openxmlformats.org/drawingml/2006/main" lIns="0" tIns="0" rIns="0" bIns="0" anchor="t">
+            <a:noAutofit/>
+          </a:bodyPr>
+          <a:lstStyle xmlns:a="http://schemas.openxmlformats.org/drawingml/2006/main"/>
+          <a:p xmlns:a="http://schemas.openxmlformats.org/drawingml/2006/main">
+            <a:pPr>
+              <a:defRPr sz="2100" b="0">
+                <a:solidFill>
+                  <a:srgbClr val="172F43"/>
+                </a:solidFill>
+                <a:latin typeface="Calibri"/>
+                <a:ea typeface="Calibri"/>
+                <a:cs typeface="Calibri"/>
+              </a:defRPr>
+            </a:pPr>
+            <a:r>
+              <a:rPr sz="2100" b="0">
+                <a:solidFill>
+                  <a:srgbClr val="172F43"/>
+                </a:solidFill>
+                <a:latin typeface="Calibri"/>
+                <a:ea typeface="Calibri"/>
+                <a:cs typeface="Calibri"/>
+              </a:rPr>
+              <a:t>Kan du förklara skillnaden mellan W (watt, aktiv effekt), var (voltampere reaktiv, reaktiv effekt) och VA (voltampere, skenbar effekt)?</a:t>
+            </a:r>
+          </a:p>
+          <a:p xmlns:a="http://schemas.openxmlformats.org/drawingml/2006/main">
+            <a:pPr>
+              <a:defRPr sz="2100" b="0">
+                <a:solidFill>
+                  <a:srgbClr val="172F43"/>
+                </a:solidFill>
+                <a:latin typeface="Calibri"/>
+                <a:ea typeface="Calibri"/>
+                <a:cs typeface="Calibri"/>
+              </a:defRPr>
+            </a:pPr>
+          </a:p>
+          <a:p xmlns:a="http://schemas.openxmlformats.org/drawingml/2006/main">
+            <a:pPr>
+              <a:defRPr sz="2100" b="0">
+                <a:solidFill>
+                  <a:srgbClr val="172F43"/>
+                </a:solidFill>
+                <a:latin typeface="Calibri"/>
+                <a:ea typeface="Calibri"/>
+                <a:cs typeface="Calibri"/>
+              </a:defRPr>
+            </a:pPr>
+            <a:r>
+              <a:rPr sz="2100" b="0">
+                <a:solidFill>
+                  <a:srgbClr val="172F43"/>
+                </a:solidFill>
+                <a:latin typeface="Calibri"/>
+                <a:ea typeface="Calibri"/>
+                <a:cs typeface="Calibri"/>
+              </a:rPr>
+              <a:t>Kan du räkna I när U, P och PF är givna?</a:t>
+            </a:r>
+          </a:p>
+          <a:p xmlns:a="http://schemas.openxmlformats.org/drawingml/2006/main">
+            <a:pPr>
+              <a:defRPr sz="2100" b="0">
+                <a:solidFill>
+                  <a:srgbClr val="172F43"/>
+                </a:solidFill>
+                <a:latin typeface="Calibri"/>
+                <a:ea typeface="Calibri"/>
+                <a:cs typeface="Calibri"/>
+              </a:defRPr>
+            </a:pPr>
+          </a:p>
+          <a:p xmlns:a="http://schemas.openxmlformats.org/drawingml/2006/main">
+            <a:pPr>
+              <a:defRPr sz="2100" b="0">
+                <a:solidFill>
+                  <a:srgbClr val="172F43"/>
+                </a:solidFill>
+                <a:latin typeface="Calibri"/>
+                <a:ea typeface="Calibri"/>
+                <a:cs typeface="Calibri"/>
+              </a:defRPr>
+            </a:pPr>
+            <a:r>
+              <a:rPr sz="2100" b="0">
+                <a:solidFill>
+                  <a:srgbClr val="172F43"/>
+                </a:solidFill>
+                <a:latin typeface="Calibri"/>
+                <a:ea typeface="Calibri"/>
+                <a:cs typeface="Calibri"/>
+              </a:rPr>
+              <a:t>Kan du förklara vad som ändras när PF sjunker vid samma P och U?</a:t>
+            </a:r>
+          </a:p>
+          <a:p xmlns:a="http://schemas.openxmlformats.org/drawingml/2006/main">
+            <a:pPr>
+              <a:defRPr sz="2100" b="0">
+                <a:solidFill>
+                  <a:srgbClr val="172F43"/>
+                </a:solidFill>
+                <a:latin typeface="Calibri"/>
+                <a:ea typeface="Calibri"/>
+                <a:cs typeface="Calibri"/>
+              </a:defRPr>
+            </a:pPr>
+          </a:p>
+          <a:p xmlns:a="http://schemas.openxmlformats.org/drawingml/2006/main">
+            <a:pPr>
+              <a:defRPr sz="2100" b="0">
+                <a:solidFill>
+                  <a:srgbClr val="172F43"/>
+                </a:solidFill>
+                <a:latin typeface="Calibri"/>
+                <a:ea typeface="Calibri"/>
+                <a:cs typeface="Calibri"/>
+              </a:defRPr>
+            </a:pPr>
+            <a:r>
+              <a:rPr sz="2100" b="0">
+                <a:solidFill>
+                  <a:srgbClr val="172F43"/>
+                </a:solidFill>
+                <a:latin typeface="Calibri"/>
+                <a:ea typeface="Calibri"/>
+                <a:cs typeface="Calibri"/>
+              </a:rPr>
+              <a:t>Spara ditt grundprotokoll. Läraren bedömer metoden och förklaringen.</a:t>
+            </a:r>
+          </a:p>
+        </p:txBody>
+      </p:sp>
+      <p:sp>
+        <p:nvSpPr>
+          <p:cNvPr id="11" name="section">
+            <a:extLst xmlns:a="http://schemas.openxmlformats.org/drawingml/2006/main">
+              <a:ext uri="{FF2B5EF4-FFF2-40B4-BE49-F238E27FC236}">
+                <a16:creationId xmlns:a16="http://schemas.microsoft.com/office/drawing/2014/main" id="{E3187B5A-CCB4-446F-BF03-DF5EF38BACEA}"/>
+              </a:ext>
+            </a:extLst>
+          </p:cNvPr>
+          <p:cNvSpPr>
+            <a:spLocks xmlns:a="http://schemas.openxmlformats.org/drawingml/2006/main" noGrp="1"/>
+          </p:cNvSpPr>
+          <p:nvPr/>
+        </p:nvSpPr>
+        <p:spPr>
+          <a:xfrm xmlns:a="http://schemas.openxmlformats.org/drawingml/2006/main">
+            <a:off x="1809750" y="6419850"/>
+            <a:ext cx="4191000" cy="266700"/>
+          </a:xfrm>
+          <a:prstGeom xmlns:a="http://schemas.openxmlformats.org/drawingml/2006/main" prst="rect">
+            <a:avLst/>
+          </a:prstGeom>
+          <a:noFill xmlns:a="http://schemas.openxmlformats.org/drawingml/2006/main"/>
+          <a:ln xmlns:a="http://schemas.openxmlformats.org/drawingml/2006/main" w="0">
+            <a:noFill/>
+          </a:ln>
+        </p:spPr>
+        <p:txBody>
+          <a:bodyPr xmlns:a="http://schemas.openxmlformats.org/drawingml/2006/main" lIns="0" tIns="0" rIns="0" bIns="0" anchor="t">
+            <a:noAutofit/>
+          </a:bodyPr>
+          <a:lstStyle xmlns:a="http://schemas.openxmlformats.org/drawingml/2006/main"/>
+          <a:p xmlns:a="http://schemas.openxmlformats.org/drawingml/2006/main">
+            <a:pPr>
+              <a:defRPr sz="1275" b="0">
+                <a:solidFill>
+                  <a:srgbClr val="FFFFFF"/>
+                </a:solidFill>
+                <a:latin typeface="Calibri"/>
+                <a:ea typeface="Calibri"/>
+                <a:cs typeface="Calibri"/>
+              </a:defRPr>
+            </a:pPr>
+            <a:r>
+              <a:rPr sz="1275" b="0">
+                <a:solidFill>
+                  <a:srgbClr val="FFFFFF"/>
+                </a:solidFill>
+                <a:latin typeface="Calibri"/>
+                <a:ea typeface="Calibri"/>
+                <a:cs typeface="Calibri"/>
+              </a:rPr>
+              <a:t>Grunddel</a:t>
+            </a:r>
+          </a:p>
+        </p:txBody>
+      </p:sp>
+      <p:sp>
+        <p:nvSpPr>
+          <p:cNvPr id="12" name="page">
+            <a:extLst xmlns:a="http://schemas.openxmlformats.org/drawingml/2006/main">
+              <a:ext uri="{FF2B5EF4-FFF2-40B4-BE49-F238E27FC236}">
+                <a16:creationId xmlns:a16="http://schemas.microsoft.com/office/drawing/2014/main" id="{7996832E-D081-4829-BE34-0D7D8ED1293E}"/>
+              </a:ext>
+            </a:extLst>
+          </p:cNvPr>
+          <p:cNvSpPr>
+            <a:spLocks xmlns:a="http://schemas.openxmlformats.org/drawingml/2006/main" noGrp="1"/>
+          </p:cNvSpPr>
+          <p:nvPr/>
+        </p:nvSpPr>
+        <p:spPr>
+          <a:xfrm xmlns:a="http://schemas.openxmlformats.org/drawingml/2006/main">
+            <a:off x="8286750" y="6438900"/>
+            <a:ext cx="428625" cy="285750"/>
+          </a:xfrm>
+          <a:prstGeom xmlns:a="http://schemas.openxmlformats.org/drawingml/2006/main" prst="rect">
+            <a:avLst/>
+          </a:prstGeom>
+          <a:noFill xmlns:a="http://schemas.openxmlformats.org/drawingml/2006/main"/>
+          <a:ln xmlns:a="http://schemas.openxmlformats.org/drawingml/2006/main" w="0">
+            <a:noFill/>
+          </a:ln>
+        </p:spPr>
+        <p:txBody>
+          <a:bodyPr xmlns:a="http://schemas.openxmlformats.org/drawingml/2006/main" lIns="0" tIns="0" rIns="0" bIns="0" anchor="t">
+            <a:noAutofit/>
+          </a:bodyPr>
+          <a:lstStyle xmlns:a="http://schemas.openxmlformats.org/drawingml/2006/main"/>
+          <a:p xmlns:a="http://schemas.openxmlformats.org/drawingml/2006/main">
+            <a:pPr>
+              <a:defRPr sz="1500" b="0">
+                <a:solidFill>
+                  <a:srgbClr val="FFFFFF"/>
+                </a:solidFill>
+                <a:latin typeface="Calibri"/>
+                <a:ea typeface="Calibri"/>
+                <a:cs typeface="Calibri"/>
+              </a:defRPr>
+            </a:pPr>
+            <a:r>
+              <a:rPr sz="1500" b="0">
+                <a:solidFill>
+                  <a:srgbClr val="FFFFFF"/>
+                </a:solidFill>
+                <a:latin typeface="Calibri"/>
+                <a:ea typeface="Calibri"/>
+                <a:cs typeface="Calibri"/>
+              </a:rPr>
+              <a:t>16</a:t>
             </a:r>
           </a:p>
         </p:txBody>
@@ -11318,7 +11698,7 @@
 </file>
 
 <file path=ppt/slides/slide9.xml><?xml version="1.0" encoding="utf-8"?>
-<p:sld xmlns:p="http://schemas.openxmlformats.org/presentationml/2006/main">
+<p:sld xmlns:a="http://schemas.openxmlformats.org/drawingml/2006/main" xmlns:p="http://schemas.openxmlformats.org/presentationml/2006/main" xmlns:r="http://schemas.openxmlformats.org/officeDocument/2006/relationships">
   <p:cSld>
     <p:spTree>
       <p:nvGrpSpPr>
@@ -11326,29 +11706,27 @@
         <p:cNvGrpSpPr/>
         <p:nvPr/>
       </p:nvGrpSpPr>
-      <p:grpSpPr>
-        <a:xfrm xmlns:a="http://schemas.openxmlformats.org/drawingml/2006/main"/>
-      </p:grpSpPr>
+      <p:grpSpPr/>
       <p:pic>
         <p:nvPicPr>
-          <p:cNvPr id="13" name="Bildobjekt 2"/>
+          <p:cNvPr id="2" name="Picture 1" descr="image.jpeg"/>
           <p:cNvPicPr>
-            <a:picLocks xmlns:a="http://schemas.openxmlformats.org/drawingml/2006/main" noChangeAspect="1"/>
+            <a:picLocks noChangeAspect="1"/>
           </p:cNvPicPr>
           <p:nvPr/>
         </p:nvPicPr>
         <p:blipFill>
-          <a:blip xmlns:r="http://schemas.openxmlformats.org/officeDocument/2006/relationships" xmlns:a="http://schemas.openxmlformats.org/drawingml/2006/main" r:embed="R8790e0a3cd5441b7"/>
-          <a:stretch xmlns:a="http://schemas.openxmlformats.org/drawingml/2006/main">
-            <a:fillRect l="0" t="0" r="0" b="0"/>
+          <a:blip r:embed="rId2"/>
+          <a:stretch>
+            <a:fillRect/>
           </a:stretch>
         </p:blipFill>
         <p:spPr>
-          <a:xfrm xmlns:a="http://schemas.openxmlformats.org/drawingml/2006/main">
+          <a:xfrm>
             <a:off x="0" y="6098791"/>
             <a:ext cx="9144006" cy="763524"/>
           </a:xfrm>
-          <a:prstGeom xmlns:a="http://schemas.openxmlformats.org/drawingml/2006/main" prst="rect">
+          <a:prstGeom prst="rect">
             <a:avLst/>
           </a:prstGeom>
         </p:spPr>
@@ -11356,36 +11734,36 @@
       <p:sp>
         <p:nvSpPr>
           <p:cNvPr id="9" name="title">
-            <a:extLst xmlns:a="http://schemas.openxmlformats.org/drawingml/2006/main">
-              <a:ext uri="{FF2B5EF4-FFF2-40B4-BE49-F238E27FC236}">
-                <a16:creationId xmlns:a16="http://schemas.microsoft.com/office/drawing/2014/main" id="{A3FC888B-E98B-4768-B4B6-9DCBD8C3052B}"/>
-              </a:ext>
-            </a:extLst>
-          </p:cNvPr>
-          <p:cNvSpPr>
-            <a:spLocks xmlns:a="http://schemas.openxmlformats.org/drawingml/2006/main" noGrp="1"/>
+            <a:extLst>
+              <a:ext uri="{FF2B5EF4-FFF2-40B4-BE49-F238E27FC236}">
+                <a16:creationId xmlns:a16="http://schemas.microsoft.com/office/drawing/2014/main" id="{172696AE-105E-47B5-AA9F-83EEDDC2C059}"/>
+              </a:ext>
+            </a:extLst>
+          </p:cNvPr>
+          <p:cNvSpPr>
+            <a:spLocks noGrp="1"/>
           </p:cNvSpPr>
           <p:nvPr/>
         </p:nvSpPr>
         <p:spPr>
-          <a:xfrm xmlns:a="http://schemas.openxmlformats.org/drawingml/2006/main">
+          <a:xfrm>
             <a:off x="571500" y="428625"/>
             <a:ext cx="8001000" cy="781050"/>
           </a:xfrm>
-          <a:prstGeom xmlns:a="http://schemas.openxmlformats.org/drawingml/2006/main" prst="rect">
+          <a:prstGeom prst="rect">
             <a:avLst/>
           </a:prstGeom>
-          <a:noFill xmlns:a="http://schemas.openxmlformats.org/drawingml/2006/main"/>
-          <a:ln xmlns:a="http://schemas.openxmlformats.org/drawingml/2006/main" w="0">
+          <a:noFill/>
+          <a:ln w="0">
             <a:noFill/>
           </a:ln>
         </p:spPr>
         <p:txBody>
-          <a:bodyPr xmlns:a="http://schemas.openxmlformats.org/drawingml/2006/main" lIns="0" tIns="0" rIns="0" bIns="0" anchor="t">
+          <a:bodyPr lIns="0" tIns="0" rIns="0" bIns="0" anchor="t">
             <a:noAutofit/>
           </a:bodyPr>
-          <a:lstStyle xmlns:a="http://schemas.openxmlformats.org/drawingml/2006/main"/>
-          <a:p xmlns:a="http://schemas.openxmlformats.org/drawingml/2006/main">
+          <a:lstStyle/>
+          <a:p>
             <a:pPr>
               <a:defRPr sz="3000" b="1">
                 <a:solidFill>
@@ -11405,7 +11783,7 @@
                 <a:ea typeface="Calibri"/>
                 <a:cs typeface="Calibri"/>
               </a:rPr>
-              <a:t>Arbetsgång i den guidade labben</a:t>
+              <a:t>Din tur: kylskåpets kompressor</a:t>
             </a:r>
           </a:p>
         </p:txBody>
@@ -11413,36 +11791,36 @@
       <p:sp>
         <p:nvSpPr>
           <p:cNvPr id="10" name="body">
-            <a:extLst xmlns:a="http://schemas.openxmlformats.org/drawingml/2006/main">
-              <a:ext uri="{FF2B5EF4-FFF2-40B4-BE49-F238E27FC236}">
-                <a16:creationId xmlns:a16="http://schemas.microsoft.com/office/drawing/2014/main" id="{5CEC0966-DB79-40FD-B306-DC827586F843}"/>
-              </a:ext>
-            </a:extLst>
-          </p:cNvPr>
-          <p:cNvSpPr>
-            <a:spLocks xmlns:a="http://schemas.openxmlformats.org/drawingml/2006/main" noGrp="1"/>
+            <a:extLst>
+              <a:ext uri="{FF2B5EF4-FFF2-40B4-BE49-F238E27FC236}">
+                <a16:creationId xmlns:a16="http://schemas.microsoft.com/office/drawing/2014/main" id="{9BC49B0C-87EC-48AA-B0B4-101753504D3F}"/>
+              </a:ext>
+            </a:extLst>
+          </p:cNvPr>
+          <p:cNvSpPr>
+            <a:spLocks noGrp="1"/>
           </p:cNvSpPr>
           <p:nvPr/>
         </p:nvSpPr>
         <p:spPr>
-          <a:xfrm xmlns:a="http://schemas.openxmlformats.org/drawingml/2006/main">
-            <a:off x="762000" y="1590675"/>
-            <a:ext cx="7620000" cy="3524250"/>
-          </a:xfrm>
-          <a:prstGeom xmlns:a="http://schemas.openxmlformats.org/drawingml/2006/main" prst="rect">
+          <a:xfrm>
+            <a:off x="762000" y="1330000"/>
+            <a:ext cx="7620000" cy="560000"/>
+          </a:xfrm>
+          <a:prstGeom prst="rect">
             <a:avLst/>
           </a:prstGeom>
-          <a:noFill xmlns:a="http://schemas.openxmlformats.org/drawingml/2006/main"/>
-          <a:ln xmlns:a="http://schemas.openxmlformats.org/drawingml/2006/main" w="0">
+          <a:noFill/>
+          <a:ln w="0">
             <a:noFill/>
           </a:ln>
         </p:spPr>
         <p:txBody>
-          <a:bodyPr xmlns:a="http://schemas.openxmlformats.org/drawingml/2006/main" lIns="0" tIns="0" rIns="0" bIns="0" anchor="t">
+          <a:bodyPr lIns="0" tIns="0" rIns="0" bIns="0" anchor="t">
             <a:noAutofit/>
           </a:bodyPr>
-          <a:lstStyle xmlns:a="http://schemas.openxmlformats.org/drawingml/2006/main"/>
-          <a:p xmlns:a="http://schemas.openxmlformats.org/drawingml/2006/main">
+          <a:lstStyle/>
+          <a:p>
             <a:pPr>
               <a:defRPr sz="2100" b="0">
                 <a:solidFill>
@@ -11454,157 +11832,109 @@
               </a:defRPr>
             </a:pPr>
             <a:r>
-              <a:rPr sz="2100" b="0">
-                <a:solidFill>
-                  <a:srgbClr val="172F43"/>
-                </a:solidFill>
-                <a:latin typeface="Calibri"/>
-                <a:ea typeface="Calibri"/>
-                <a:cs typeface="Calibri"/>
-              </a:rPr>
-              <a:t>Du får en egen effekt P ur ditt D. Förutsäg strömmen vid PF = 1,00, läs av och registrera värdet.</a:t>
-            </a:r>
-          </a:p>
-          <a:p xmlns:a="http://schemas.openxmlformats.org/drawingml/2006/main">
-            <a:pPr>
-              <a:defRPr sz="2100" b="0">
-                <a:solidFill>
-                  <a:srgbClr val="172F43"/>
-                </a:solidFill>
-                <a:latin typeface="Calibri"/>
-                <a:ea typeface="Calibri"/>
-                <a:cs typeface="Calibri"/>
-              </a:defRPr>
-            </a:pPr>
-          </a:p>
-          <a:p xmlns:a="http://schemas.openxmlformats.org/drawingml/2006/main">
-            <a:pPr>
-              <a:defRPr sz="2100" b="0">
-                <a:solidFill>
-                  <a:srgbClr val="172F43"/>
-                </a:solidFill>
-                <a:latin typeface="Calibri"/>
-                <a:ea typeface="Calibri"/>
-                <a:cs typeface="Calibri"/>
-              </a:defRPr>
-            </a:pPr>
-            <a:r>
-              <a:rPr sz="2100" b="0">
-                <a:solidFill>
-                  <a:srgbClr val="172F43"/>
-                </a:solidFill>
-                <a:latin typeface="Calibri"/>
-                <a:ea typeface="Calibri"/>
-                <a:cs typeface="Calibri"/>
-              </a:rPr>
-              <a:t>Förutsäg strömmen vid PF = 0,50. U och P hålls oförändrade.</a:t>
-            </a:r>
-          </a:p>
-          <a:p xmlns:a="http://schemas.openxmlformats.org/drawingml/2006/main">
-            <a:pPr>
-              <a:defRPr sz="2100" b="0">
-                <a:solidFill>
-                  <a:srgbClr val="172F43"/>
-                </a:solidFill>
-                <a:latin typeface="Calibri"/>
-                <a:ea typeface="Calibri"/>
-                <a:cs typeface="Calibri"/>
-              </a:defRPr>
-            </a:pPr>
-          </a:p>
-          <a:p xmlns:a="http://schemas.openxmlformats.org/drawingml/2006/main">
-            <a:pPr>
-              <a:defRPr sz="2100" b="0">
-                <a:solidFill>
-                  <a:srgbClr val="172F43"/>
-                </a:solidFill>
-                <a:latin typeface="Calibri"/>
-                <a:ea typeface="Calibri"/>
-                <a:cs typeface="Calibri"/>
-              </a:defRPr>
-            </a:pPr>
-            <a:r>
-              <a:rPr sz="2100" b="0">
-                <a:solidFill>
-                  <a:srgbClr val="172F43"/>
-                </a:solidFill>
-                <a:latin typeface="Calibri"/>
-                <a:ea typeface="Calibri"/>
-                <a:cs typeface="Calibri"/>
-              </a:rPr>
-              <a:t>Jämför de båda värdena och förklara orsaken.</a:t>
-            </a:r>
-          </a:p>
-          <a:p xmlns:a="http://schemas.openxmlformats.org/drawingml/2006/main">
-            <a:pPr>
-              <a:defRPr sz="2100" b="0">
-                <a:solidFill>
-                  <a:srgbClr val="172F43"/>
-                </a:solidFill>
-                <a:latin typeface="Calibri"/>
-                <a:ea typeface="Calibri"/>
-                <a:cs typeface="Calibri"/>
-              </a:defRPr>
-            </a:pPr>
-          </a:p>
-          <a:p xmlns:a="http://schemas.openxmlformats.org/drawingml/2006/main">
-            <a:pPr>
-              <a:defRPr sz="2100" b="0">
-                <a:solidFill>
-                  <a:srgbClr val="172F43"/>
-                </a:solidFill>
-                <a:latin typeface="Calibri"/>
-                <a:ea typeface="Calibri"/>
-                <a:cs typeface="Calibri"/>
-              </a:defRPr>
-            </a:pPr>
-            <a:r>
-              <a:rPr sz="2100" b="0">
-                <a:solidFill>
-                  <a:srgbClr val="172F43"/>
-                </a:solidFill>
-                <a:latin typeface="Calibri"/>
-                <a:ea typeface="Calibri"/>
-                <a:cs typeface="Calibri"/>
-              </a:rPr>
-              <a:t>Redovisa vilka storheter som ändrades och vilka som var konstanta.</a:t>
-            </a:r>
-          </a:p>
-        </p:txBody>
-      </p:sp>
-      <p:sp>
-        <p:nvSpPr>
-          <p:cNvPr id="11" name="section">
-            <a:extLst xmlns:a="http://schemas.openxmlformats.org/drawingml/2006/main">
-              <a:ext uri="{FF2B5EF4-FFF2-40B4-BE49-F238E27FC236}">
-                <a16:creationId xmlns:a16="http://schemas.microsoft.com/office/drawing/2014/main" id="{658188E9-BDC9-477D-9A79-5EED68B17B9A}"/>
-              </a:ext>
-            </a:extLst>
-          </p:cNvPr>
-          <p:cNvSpPr>
-            <a:spLocks xmlns:a="http://schemas.openxmlformats.org/drawingml/2006/main" noGrp="1"/>
+              <a:rPr sz="1600" b="0">
+                <a:solidFill>
+                  <a:srgbClr val="4D6579"/>
+                </a:solidFill>
+                <a:latin typeface="Calibri"/>
+                <a:ea typeface="Calibri"/>
+                <a:cs typeface="Calibri"/>
+              </a:rPr>
+              <a:t>Räkna på papper eller miniwhiteboard. Titta på svaret först när du har ett eget.</a:t>
+            </a:r>
+          </a:p>
+        </p:txBody>
+      </p:sp>
+      <p:sp>
+        <p:nvSpPr>
+          <p:cNvPr id="11" name="check">
+            <a:extLst>
+              <a:ext uri="{FF2B5EF4-FFF2-40B4-BE49-F238E27FC236}">
+                <a16:creationId xmlns:a16="http://schemas.microsoft.com/office/drawing/2014/main" id="{DAC25AC2-956E-4B5F-AE5D-D800FBC91592}"/>
+              </a:ext>
+            </a:extLst>
+          </p:cNvPr>
+          <p:cNvSpPr>
+            <a:spLocks noGrp="1"/>
           </p:cNvSpPr>
           <p:nvPr/>
         </p:nvSpPr>
         <p:spPr>
-          <a:xfrm xmlns:a="http://schemas.openxmlformats.org/drawingml/2006/main">
+          <a:xfrm>
+            <a:off x="762000" y="1950000"/>
+            <a:ext cx="7620000" cy="1900000"/>
+          </a:xfrm>
+          <a:prstGeom prst="rect">
+            <a:avLst/>
+          </a:prstGeom>
+          <a:noFill/>
+          <a:ln w="0">
+            <a:noFill/>
+          </a:ln>
+        </p:spPr>
+        <p:txBody>
+          <a:bodyPr lIns="0" tIns="0" rIns="0" bIns="0" anchor="t" wrap="square">
+            <a:noAutofit/>
+          </a:bodyPr>
+          <a:lstStyle/>
+          <a:p>
+            <a:pPr>
+              <a:defRPr sz="1725" b="1">
+                <a:solidFill>
+                  <a:srgbClr val="064F91"/>
+                </a:solidFill>
+                <a:latin typeface="Calibri"/>
+                <a:ea typeface="Calibri"/>
+                <a:cs typeface="Calibri"/>
+              </a:defRPr>
+            </a:pPr>
+            <a:r>
+              <a:rPr sz="2600" b="1">
+                <a:solidFill>
+                  <a:srgbClr val="163248"/>
+                </a:solidFill>
+                <a:latin typeface="Calibri"/>
+                <a:ea typeface="Calibri"/>
+                <a:cs typeface="Calibri"/>
+              </a:rPr>
+              <a:t>Kylskåpets kompressor tar P = 150 W vid U = 230 V och PF = 0,60. Räkna S, I och Q.</a:t>
+            </a:r>
+          </a:p>
+        </p:txBody>
+      </p:sp>
+      <p:sp>
+        <p:nvSpPr>
+          <p:cNvPr id="12" name="section">
+            <a:extLst>
+              <a:ext uri="{FF2B5EF4-FFF2-40B4-BE49-F238E27FC236}">
+                <a16:creationId xmlns:a16="http://schemas.microsoft.com/office/drawing/2014/main" id="{41D96973-E72A-43BF-9A23-E6F860EB4BA0}"/>
+              </a:ext>
+            </a:extLst>
+          </p:cNvPr>
+          <p:cNvSpPr>
+            <a:spLocks noGrp="1"/>
+          </p:cNvSpPr>
+          <p:nvPr/>
+        </p:nvSpPr>
+        <p:spPr>
+          <a:xfrm>
             <a:off x="1809750" y="6419850"/>
             <a:ext cx="4191000" cy="266700"/>
           </a:xfrm>
-          <a:prstGeom xmlns:a="http://schemas.openxmlformats.org/drawingml/2006/main" prst="rect">
+          <a:prstGeom prst="rect">
             <a:avLst/>
           </a:prstGeom>
-          <a:noFill xmlns:a="http://schemas.openxmlformats.org/drawingml/2006/main"/>
-          <a:ln xmlns:a="http://schemas.openxmlformats.org/drawingml/2006/main" w="0">
+          <a:noFill/>
+          <a:ln w="0">
             <a:noFill/>
           </a:ln>
         </p:spPr>
         <p:txBody>
-          <a:bodyPr xmlns:a="http://schemas.openxmlformats.org/drawingml/2006/main" lIns="0" tIns="0" rIns="0" bIns="0" anchor="t">
+          <a:bodyPr lIns="0" tIns="0" rIns="0" bIns="0" anchor="t">
             <a:noAutofit/>
           </a:bodyPr>
-          <a:lstStyle xmlns:a="http://schemas.openxmlformats.org/drawingml/2006/main"/>
-          <a:p xmlns:a="http://schemas.openxmlformats.org/drawingml/2006/main">
+          <a:lstStyle/>
+          <a:p>
             <a:pPr>
               <a:defRPr sz="1275" b="0">
                 <a:solidFill>
@@ -11631,37 +11961,37 @@
       </p:sp>
       <p:sp>
         <p:nvSpPr>
-          <p:cNvPr id="12" name="page">
-            <a:extLst xmlns:a="http://schemas.openxmlformats.org/drawingml/2006/main">
-              <a:ext uri="{FF2B5EF4-FFF2-40B4-BE49-F238E27FC236}">
-                <a16:creationId xmlns:a16="http://schemas.microsoft.com/office/drawing/2014/main" id="{89381429-45A2-49C4-929C-A561EE8F9D04}"/>
-              </a:ext>
-            </a:extLst>
-          </p:cNvPr>
-          <p:cNvSpPr>
-            <a:spLocks xmlns:a="http://schemas.openxmlformats.org/drawingml/2006/main" noGrp="1"/>
+          <p:cNvPr id="13" name="page">
+            <a:extLst>
+              <a:ext uri="{FF2B5EF4-FFF2-40B4-BE49-F238E27FC236}">
+                <a16:creationId xmlns:a16="http://schemas.microsoft.com/office/drawing/2014/main" id="{61F4611D-371A-4B97-99C6-982DA4FEB606}"/>
+              </a:ext>
+            </a:extLst>
+          </p:cNvPr>
+          <p:cNvSpPr>
+            <a:spLocks noGrp="1"/>
           </p:cNvSpPr>
           <p:nvPr/>
         </p:nvSpPr>
         <p:spPr>
-          <a:xfrm xmlns:a="http://schemas.openxmlformats.org/drawingml/2006/main">
+          <a:xfrm>
             <a:off x="8286750" y="6438900"/>
             <a:ext cx="428625" cy="285750"/>
           </a:xfrm>
-          <a:prstGeom xmlns:a="http://schemas.openxmlformats.org/drawingml/2006/main" prst="rect">
+          <a:prstGeom prst="rect">
             <a:avLst/>
           </a:prstGeom>
-          <a:noFill xmlns:a="http://schemas.openxmlformats.org/drawingml/2006/main"/>
-          <a:ln xmlns:a="http://schemas.openxmlformats.org/drawingml/2006/main" w="0">
+          <a:noFill/>
+          <a:ln w="0">
             <a:noFill/>
           </a:ln>
         </p:spPr>
         <p:txBody>
-          <a:bodyPr xmlns:a="http://schemas.openxmlformats.org/drawingml/2006/main" lIns="0" tIns="0" rIns="0" bIns="0" anchor="t">
+          <a:bodyPr lIns="0" tIns="0" rIns="0" bIns="0" anchor="t">
             <a:noAutofit/>
           </a:bodyPr>
-          <a:lstStyle xmlns:a="http://schemas.openxmlformats.org/drawingml/2006/main"/>
-          <a:p xmlns:a="http://schemas.openxmlformats.org/drawingml/2006/main">
+          <a:lstStyle/>
+          <a:p>
             <a:pPr>
               <a:defRPr sz="1500" b="0">
                 <a:solidFill>
@@ -11686,13 +12016,150 @@
           </a:p>
         </p:txBody>
       </p:sp>
+      <p:sp>
+        <p:nvSpPr>
+          <p:cNvPr id="14" name="svar">
+            <a:extLst>
+              <a:ext uri="{FF2B5EF4-FFF2-40B4-BE49-F238E27FC236}">
+                <a16:creationId xmlns:a16="http://schemas.microsoft.com/office/drawing/2014/main" id="{DAC25AC2-956E-4B5F-AE5D-D800FBC91592}"/>
+              </a:ext>
+            </a:extLst>
+          </p:cNvPr>
+          <p:cNvSpPr>
+            <a:spLocks noGrp="1"/>
+          </p:cNvSpPr>
+          <p:nvPr/>
+        </p:nvSpPr>
+        <p:spPr>
+          <a:xfrm>
+            <a:off x="762000" y="3950000"/>
+            <a:ext cx="7620000" cy="1250000"/>
+          </a:xfrm>
+          <a:prstGeom prst="rect">
+            <a:avLst/>
+          </a:prstGeom>
+          <a:solidFill>
+            <a:srgbClr val="E9F5EE"/>
+          </a:solidFill>
+          <a:ln w="19050">
+            <a:solidFill>
+              <a:srgbClr val="176844"/>
+            </a:solidFill>
+          </a:ln>
+        </p:spPr>
+        <p:txBody>
+          <a:bodyPr lIns="160000" tIns="110000" rIns="160000" bIns="110000" anchor="t" wrap="square">
+            <a:noAutofit/>
+          </a:bodyPr>
+          <a:lstStyle/>
+          <a:p>
+            <a:pPr>
+              <a:defRPr sz="1725" b="1">
+                <a:solidFill>
+                  <a:srgbClr val="064F91"/>
+                </a:solidFill>
+                <a:latin typeface="Calibri"/>
+                <a:ea typeface="Calibri"/>
+                <a:cs typeface="Calibri"/>
+              </a:defRPr>
+            </a:pPr>
+            <a:r>
+              <a:rPr sz="2000" b="1">
+                <a:solidFill>
+                  <a:srgbClr val="176844"/>
+                </a:solidFill>
+                <a:latin typeface="Calibri"/>
+                <a:ea typeface="Calibri"/>
+                <a:cs typeface="Calibri"/>
+              </a:rPr>
+              <a:t>S = 150/0,60 = 250 VA. I = 250/230 ≈ 1,09 A. Q = √(250² − 150²) = 200 var.</a:t>
+            </a:r>
+          </a:p>
+        </p:txBody>
+      </p:sp>
     </p:spTree>
-    <p:extLst>
-      <p:ext uri="{BB962C8B-B14F-4D97-AF65-F5344CB8AC3E}">
-        <p14:creationId xmlns:p14="http://schemas.microsoft.com/office/powerpoint/2010/main" val="2747996220"/>
-      </p:ext>
-    </p:extLst>
   </p:cSld>
+  <p:clrMapOvr>
+    <a:masterClrMapping/>
+  </p:clrMapOvr>
+  <p:timing>
+    <p:tnLst>
+      <p:par>
+        <p:cTn id="1" dur="indefinite" restart="never" nodeType="tmRoot">
+          <p:childTnLst>
+            <p:seq concurrent="1" nextAc="seek">
+              <p:cTn id="2" dur="indefinite" nodeType="mainSeq">
+                <p:childTnLst>
+                  <p:par>
+                    <p:cTn id="3" fill="hold">
+                      <p:stCondLst>
+                        <p:cond delay="indefinite"/>
+                      </p:stCondLst>
+                      <p:childTnLst>
+                        <p:par>
+                          <p:cTn id="4" fill="hold">
+                            <p:stCondLst>
+                              <p:cond delay="0"/>
+                            </p:stCondLst>
+                            <p:childTnLst>
+                              <p:par>
+                                <p:cTn id="5" presetID="1" presetClass="entr" presetSubtype="0" fill="hold" grpId="0" nodeType="clickEffect">
+                                  <p:stCondLst>
+                                    <p:cond delay="0"/>
+                                  </p:stCondLst>
+                                  <p:childTnLst>
+                                    <p:set>
+                                      <p:cBhvr>
+                                        <p:cTn id="6" dur="1" fill="hold">
+                                          <p:stCondLst>
+                                            <p:cond delay="0"/>
+                                          </p:stCondLst>
+                                        </p:cTn>
+                                        <p:tgtEl>
+                                          <p:spTgt spid="14"/>
+                                        </p:tgtEl>
+                                        <p:attrNameLst>
+                                          <p:attrName>style.visibility</p:attrName>
+                                        </p:attrNameLst>
+                                      </p:cBhvr>
+                                      <p:to>
+                                        <p:strVal val="visible"/>
+                                      </p:to>
+                                    </p:set>
+                                  </p:childTnLst>
+                                </p:cTn>
+                              </p:par>
+                            </p:childTnLst>
+                          </p:cTn>
+                        </p:par>
+                      </p:childTnLst>
+                    </p:cTn>
+                  </p:par>
+                </p:childTnLst>
+              </p:cTn>
+              <p:prevCondLst>
+                <p:cond evt="onPrev" delay="0">
+                  <p:tgtEl>
+                    <p:sldTgt/>
+                  </p:tgtEl>
+                </p:cond>
+              </p:prevCondLst>
+              <p:nextCondLst>
+                <p:cond evt="onNext" delay="0">
+                  <p:tgtEl>
+                    <p:sldTgt/>
+                  </p:tgtEl>
+                </p:cond>
+              </p:nextCondLst>
+            </p:seq>
+          </p:childTnLst>
+        </p:cTn>
+      </p:par>
+    </p:tnLst>
+    <p:bldLst>
+      <p:bldP spid="14" grpId="0" animBg="1"/>
+    </p:bldLst>
+  </p:timing>
 </p:sld>
 </file>
 

--- a/sjoskolan/vecka-40/aktuell/v40_03_Effekt_i_vaxelstromskretsar_elev.pptx
+++ b/sjoskolan/vecka-40/aktuell/v40_03_Effekt_i_vaxelstromskretsar_elev.pptx
@@ -10593,10 +10593,10 @@
       </p:sp>
       <p:sp>
         <p:nvSpPr>
-          <p:cNvPr id="10" name="real-leg">
-            <a:extLst xmlns:a="http://schemas.openxmlformats.org/drawingml/2006/main">
-              <a:ext uri="{FF2B5EF4-FFF2-40B4-BE49-F238E27FC236}">
-                <a16:creationId xmlns:a16="http://schemas.microsoft.com/office/drawing/2014/main" id="{13AF7545-D9C3-4B57-9E32-A6072F271F30}"/>
+          <p:cNvPr id="18" name="body">
+            <a:extLst xmlns:a="http://schemas.openxmlformats.org/drawingml/2006/main">
+              <a:ext uri="{FF2B5EF4-FFF2-40B4-BE49-F238E27FC236}">
+                <a16:creationId xmlns:a16="http://schemas.microsoft.com/office/drawing/2014/main" id="{B405FD13-70BC-4256-8763-0CBA213AFAAB}"/>
               </a:ext>
             </a:extLst>
           </p:cNvPr>
@@ -10607,223 +10607,8 @@
         </p:nvSpPr>
         <p:spPr>
           <a:xfrm xmlns:a="http://schemas.openxmlformats.org/drawingml/2006/main">
-            <a:off x="3333750" y="3143250"/>
-            <a:ext cx="1044860" cy="9525"/>
-          </a:xfrm>
-          <a:custGeom xmlns:a="http://schemas.openxmlformats.org/drawingml/2006/main">
-            <a:pathLst>
-              <a:path w="1044860" h="9525">
-                <a:moveTo>
-                  <a:pt x="0" y="0"/>
-                </a:moveTo>
-                <a:lnTo>
-                  <a:pt x="1044860" y="0"/>
-                </a:lnTo>
-              </a:path>
-            </a:pathLst>
-          </a:custGeom>
-          <a:noFill xmlns:a="http://schemas.openxmlformats.org/drawingml/2006/main"/>
-          <a:ln xmlns:a="http://schemas.openxmlformats.org/drawingml/2006/main" w="28575">
-            <a:solidFill>
-              <a:srgbClr val="172F43"/>
-            </a:solidFill>
-          </a:ln>
-        </p:spPr>
-        <p:txBody xmlns:a="http://schemas.openxmlformats.org/drawingml/2006/main">
-          <a:bodyPr/>
-          <a:p/>
-        </p:txBody>
-      </p:sp>
-      <p:sp>
-        <p:nvSpPr>
-          <p:cNvPr id="11" name="reactive-leg">
-            <a:extLst xmlns:a="http://schemas.openxmlformats.org/drawingml/2006/main">
-              <a:ext uri="{FF2B5EF4-FFF2-40B4-BE49-F238E27FC236}">
-                <a16:creationId xmlns:a16="http://schemas.microsoft.com/office/drawing/2014/main" id="{168559E0-79AF-47CF-B111-593DB37B01BF}"/>
-              </a:ext>
-            </a:extLst>
-          </p:cNvPr>
-          <p:cNvSpPr>
-            <a:spLocks xmlns:a="http://schemas.openxmlformats.org/drawingml/2006/main" noGrp="1"/>
-          </p:cNvSpPr>
-          <p:nvPr/>
-        </p:nvSpPr>
-        <p:spPr>
-          <a:xfrm xmlns:a="http://schemas.openxmlformats.org/drawingml/2006/main">
-            <a:off x="4378610" y="1333500"/>
-            <a:ext cx="9525" cy="1809750"/>
-          </a:xfrm>
-          <a:custGeom xmlns:a="http://schemas.openxmlformats.org/drawingml/2006/main">
-            <a:pathLst>
-              <a:path w="9525" h="1809750">
-                <a:moveTo>
-                  <a:pt x="0" y="1809750"/>
-                </a:moveTo>
-                <a:lnTo>
-                  <a:pt x="0" y="0"/>
-                </a:lnTo>
-              </a:path>
-            </a:pathLst>
-          </a:custGeom>
-          <a:noFill xmlns:a="http://schemas.openxmlformats.org/drawingml/2006/main"/>
-          <a:ln xmlns:a="http://schemas.openxmlformats.org/drawingml/2006/main" w="28575">
-            <a:solidFill>
-              <a:srgbClr val="AD5018"/>
-            </a:solidFill>
-          </a:ln>
-        </p:spPr>
-        <p:txBody xmlns:a="http://schemas.openxmlformats.org/drawingml/2006/main">
-          <a:bodyPr/>
-          <a:p/>
-        </p:txBody>
-      </p:sp>
-      <p:sp>
-        <p:nvSpPr>
-          <p:cNvPr id="12" name="hypotenuse">
-            <a:extLst xmlns:a="http://schemas.openxmlformats.org/drawingml/2006/main">
-              <a:ext uri="{FF2B5EF4-FFF2-40B4-BE49-F238E27FC236}">
-                <a16:creationId xmlns:a16="http://schemas.microsoft.com/office/drawing/2014/main" id="{EEFD3E55-92C2-404A-9997-9A67DF57A0F2}"/>
-              </a:ext>
-            </a:extLst>
-          </p:cNvPr>
-          <p:cNvSpPr>
-            <a:spLocks xmlns:a="http://schemas.openxmlformats.org/drawingml/2006/main" noGrp="1"/>
-          </p:cNvSpPr>
-          <p:nvPr/>
-        </p:nvSpPr>
-        <p:spPr>
-          <a:xfrm xmlns:a="http://schemas.openxmlformats.org/drawingml/2006/main">
-            <a:off x="3333750" y="1333500"/>
-            <a:ext cx="1044860" cy="1809750"/>
-          </a:xfrm>
-          <a:custGeom xmlns:a="http://schemas.openxmlformats.org/drawingml/2006/main">
-            <a:pathLst>
-              <a:path w="1044860" h="1809750">
-                <a:moveTo>
-                  <a:pt x="0" y="1809750"/>
-                </a:moveTo>
-                <a:lnTo>
-                  <a:pt x="1044860" y="0"/>
-                </a:lnTo>
-              </a:path>
-            </a:pathLst>
-          </a:custGeom>
-          <a:noFill xmlns:a="http://schemas.openxmlformats.org/drawingml/2006/main"/>
-          <a:ln xmlns:a="http://schemas.openxmlformats.org/drawingml/2006/main" w="28575">
-            <a:solidFill>
-              <a:srgbClr val="064F91"/>
-            </a:solidFill>
-          </a:ln>
-        </p:spPr>
-        <p:txBody xmlns:a="http://schemas.openxmlformats.org/drawingml/2006/main">
-          <a:bodyPr/>
-          <a:p/>
-        </p:txBody>
-      </p:sp>
-      <p:sp>
-        <p:nvSpPr>
-          <p:cNvPr id="13" name="right-angle-h">
-            <a:extLst xmlns:a="http://schemas.openxmlformats.org/drawingml/2006/main">
-              <a:ext uri="{FF2B5EF4-FFF2-40B4-BE49-F238E27FC236}">
-                <a16:creationId xmlns:a16="http://schemas.microsoft.com/office/drawing/2014/main" id="{2E82900D-D4CB-4E81-8B5C-292AEEA52910}"/>
-              </a:ext>
-            </a:extLst>
-          </p:cNvPr>
-          <p:cNvSpPr>
-            <a:spLocks xmlns:a="http://schemas.openxmlformats.org/drawingml/2006/main" noGrp="1"/>
-          </p:cNvSpPr>
-          <p:nvPr/>
-        </p:nvSpPr>
-        <p:spPr>
-          <a:xfrm xmlns:a="http://schemas.openxmlformats.org/drawingml/2006/main">
-            <a:off x="4264310" y="3028950"/>
-            <a:ext cx="114300" cy="9525"/>
-          </a:xfrm>
-          <a:custGeom xmlns:a="http://schemas.openxmlformats.org/drawingml/2006/main">
-            <a:pathLst>
-              <a:path w="114300" h="9525">
-                <a:moveTo>
-                  <a:pt x="0" y="0"/>
-                </a:moveTo>
-                <a:lnTo>
-                  <a:pt x="114300" y="0"/>
-                </a:lnTo>
-              </a:path>
-            </a:pathLst>
-          </a:custGeom>
-          <a:noFill xmlns:a="http://schemas.openxmlformats.org/drawingml/2006/main"/>
-          <a:ln xmlns:a="http://schemas.openxmlformats.org/drawingml/2006/main" w="28575">
-            <a:solidFill>
-              <a:srgbClr val="8394A1"/>
-            </a:solidFill>
-          </a:ln>
-        </p:spPr>
-        <p:txBody xmlns:a="http://schemas.openxmlformats.org/drawingml/2006/main">
-          <a:bodyPr/>
-          <a:p/>
-        </p:txBody>
-      </p:sp>
-      <p:sp>
-        <p:nvSpPr>
-          <p:cNvPr id="14" name="right-angle-v">
-            <a:extLst xmlns:a="http://schemas.openxmlformats.org/drawingml/2006/main">
-              <a:ext uri="{FF2B5EF4-FFF2-40B4-BE49-F238E27FC236}">
-                <a16:creationId xmlns:a16="http://schemas.microsoft.com/office/drawing/2014/main" id="{D7736CFB-E585-43E0-80EC-2A4BCBE59078}"/>
-              </a:ext>
-            </a:extLst>
-          </p:cNvPr>
-          <p:cNvSpPr>
-            <a:spLocks xmlns:a="http://schemas.openxmlformats.org/drawingml/2006/main" noGrp="1"/>
-          </p:cNvSpPr>
-          <p:nvPr/>
-        </p:nvSpPr>
-        <p:spPr>
-          <a:xfrm xmlns:a="http://schemas.openxmlformats.org/drawingml/2006/main">
-            <a:off x="4264310" y="3028950"/>
-            <a:ext cx="9525" cy="114300"/>
-          </a:xfrm>
-          <a:custGeom xmlns:a="http://schemas.openxmlformats.org/drawingml/2006/main">
-            <a:pathLst>
-              <a:path w="9525" h="114300">
-                <a:moveTo>
-                  <a:pt x="0" y="0"/>
-                </a:moveTo>
-                <a:lnTo>
-                  <a:pt x="0" y="114300"/>
-                </a:lnTo>
-              </a:path>
-            </a:pathLst>
-          </a:custGeom>
-          <a:noFill xmlns:a="http://schemas.openxmlformats.org/drawingml/2006/main"/>
-          <a:ln xmlns:a="http://schemas.openxmlformats.org/drawingml/2006/main" w="28575">
-            <a:solidFill>
-              <a:srgbClr val="8394A1"/>
-            </a:solidFill>
-          </a:ln>
-        </p:spPr>
-        <p:txBody xmlns:a="http://schemas.openxmlformats.org/drawingml/2006/main">
-          <a:bodyPr/>
-          <a:p/>
-        </p:txBody>
-      </p:sp>
-      <p:sp>
-        <p:nvSpPr>
-          <p:cNvPr id="15" name="horizontal-label">
-            <a:extLst xmlns:a="http://schemas.openxmlformats.org/drawingml/2006/main">
-              <a:ext uri="{FF2B5EF4-FFF2-40B4-BE49-F238E27FC236}">
-                <a16:creationId xmlns:a16="http://schemas.microsoft.com/office/drawing/2014/main" id="{EDC2AEC1-BC53-4C48-AA22-C355F0AF49D1}"/>
-              </a:ext>
-            </a:extLst>
-          </p:cNvPr>
-          <p:cNvSpPr>
-            <a:spLocks xmlns:a="http://schemas.openxmlformats.org/drawingml/2006/main" noGrp="1"/>
-          </p:cNvSpPr>
-          <p:nvPr/>
-        </p:nvSpPr>
-        <p:spPr>
-          <a:xfrm xmlns:a="http://schemas.openxmlformats.org/drawingml/2006/main">
-            <a:off x="3286125" y="3219450"/>
-            <a:ext cx="2667000" cy="285750"/>
+            <a:off x="762000" y="3905250"/>
+            <a:ext cx="7620000" cy="2044750"/>
           </a:xfrm>
           <a:prstGeom xmlns:a="http://schemas.openxmlformats.org/drawingml/2006/main" prst="rect">
             <a:avLst/>
@@ -10840,35 +10625,116 @@
           <a:lstStyle xmlns:a="http://schemas.openxmlformats.org/drawingml/2006/main"/>
           <a:p xmlns:a="http://schemas.openxmlformats.org/drawingml/2006/main">
             <a:pPr>
-              <a:defRPr sz="1650" b="1">
-                <a:solidFill>
-                  <a:srgbClr val="172F43"/>
-                </a:solidFill>
-                <a:latin typeface="Calibri"/>
-                <a:ea typeface="Calibri"/>
-                <a:cs typeface="Calibri"/>
-              </a:defRPr>
-            </a:pPr>
-            <a:r>
-              <a:rPr sz="1650" b="1">
-                <a:solidFill>
-                  <a:srgbClr val="172F43"/>
-                </a:solidFill>
-                <a:latin typeface="Calibri"/>
-                <a:ea typeface="Calibri"/>
-                <a:cs typeface="Calibri"/>
-              </a:rPr>
-              <a:t>P = 1 380 W</a:t>
-            </a:r>
-          </a:p>
-        </p:txBody>
-      </p:sp>
-      <p:sp>
-        <p:nvSpPr>
-          <p:cNvPr id="16" name="vertical-label">
-            <a:extLst xmlns:a="http://schemas.openxmlformats.org/drawingml/2006/main">
-              <a:ext uri="{FF2B5EF4-FFF2-40B4-BE49-F238E27FC236}">
-                <a16:creationId xmlns:a16="http://schemas.microsoft.com/office/drawing/2014/main" id="{57FE82B3-ED82-4055-94CD-168C5B1F74BB}"/>
+              <a:spcAft>
+                <a:spcPts val="800"/>
+              </a:spcAft>
+              <a:defRPr sz="1650" b="0">
+                <a:solidFill>
+                  <a:srgbClr val="172F43"/>
+                </a:solidFill>
+                <a:latin typeface="Calibri"/>
+                <a:ea typeface="Calibri"/>
+                <a:cs typeface="Calibri"/>
+              </a:defRPr>
+            </a:pPr>
+            <a:r>
+              <a:rPr sz="1600" b="0">
+                <a:solidFill>
+                  <a:srgbClr val="172F43"/>
+                </a:solidFill>
+                <a:latin typeface="Calibri"/>
+                <a:ea typeface="Calibri"/>
+                <a:cs typeface="Calibri"/>
+              </a:rPr>
+              <a:t>Reaktiv effekt Q beskriver energi som går fram och tillbaka mellan källan och spolar eller kondensatorer. Den förbrukas inte, men ger ändå ström i ledningarna.</a:t>
+            </a:r>
+          </a:p>
+          <a:p xmlns:a="http://schemas.openxmlformats.org/drawingml/2006/main">
+            <a:pPr>
+              <a:spcAft>
+                <a:spcPts val="800"/>
+              </a:spcAft>
+              <a:defRPr sz="1650" b="0">
+                <a:solidFill>
+                  <a:srgbClr val="172F43"/>
+                </a:solidFill>
+                <a:latin typeface="Calibri"/>
+                <a:ea typeface="Calibri"/>
+                <a:cs typeface="Calibri"/>
+              </a:defRPr>
+            </a:pPr>
+            <a:r>
+              <a:rPr sz="1600" b="0">
+                <a:solidFill>
+                  <a:srgbClr val="172F43"/>
+                </a:solidFill>
+                <a:latin typeface="Calibri"/>
+                <a:ea typeface="Calibri"/>
+                <a:cs typeface="Calibri"/>
+              </a:rPr>
+              <a:t>För sinus: S² = P² + Q². Därför |Q| = √(S² − P²).</a:t>
+            </a:r>
+          </a:p>
+          <a:p xmlns:a="http://schemas.openxmlformats.org/drawingml/2006/main">
+            <a:pPr>
+              <a:spcAft>
+                <a:spcPts val="800"/>
+              </a:spcAft>
+              <a:defRPr sz="1650" b="0">
+                <a:solidFill>
+                  <a:srgbClr val="172F43"/>
+                </a:solidFill>
+                <a:latin typeface="Calibri"/>
+                <a:ea typeface="Calibri"/>
+                <a:cs typeface="Calibri"/>
+              </a:defRPr>
+            </a:pPr>
+            <a:r>
+              <a:rPr sz="1600" b="0">
+                <a:solidFill>
+                  <a:srgbClr val="172F43"/>
+                </a:solidFill>
+                <a:latin typeface="Calibri"/>
+                <a:ea typeface="Calibri"/>
+                <a:cs typeface="Calibri"/>
+              </a:rPr>
+              <a:t>Exempel: S = 2 760 VA och P = 1 380 W ger |Q| ≈ 2 390,23 var. Enheten var betyder voltampere reaktiv.</a:t>
+            </a:r>
+          </a:p>
+          <a:p xmlns:a="http://schemas.openxmlformats.org/drawingml/2006/main">
+            <a:pPr>
+              <a:spcAft>
+                <a:spcPts val="800"/>
+              </a:spcAft>
+              <a:defRPr sz="1650" b="0">
+                <a:solidFill>
+                  <a:srgbClr val="172F43"/>
+                </a:solidFill>
+                <a:latin typeface="Calibri"/>
+                <a:ea typeface="Calibri"/>
+                <a:cs typeface="Calibri"/>
+              </a:defRPr>
+            </a:pPr>
+            <a:r>
+              <a:rPr sz="1600" b="0">
+                <a:solidFill>
+                  <a:srgbClr val="172F43"/>
+                </a:solidFill>
+                <a:latin typeface="Calibri"/>
+                <a:ea typeface="Calibri"/>
+                <a:cs typeface="Calibri"/>
+              </a:rPr>
+              <a:t>I kursens teckenkonvention är induktiv Q positiv och kapacitiv Q negativ.</a:t>
+            </a:r>
+          </a:p>
+        </p:txBody>
+      </p:sp>
+      <p:sp>
+        <p:nvSpPr>
+          <p:cNvPr id="19" name="formula">
+            <a:extLst xmlns:a="http://schemas.openxmlformats.org/drawingml/2006/main">
+              <a:ext uri="{FF2B5EF4-FFF2-40B4-BE49-F238E27FC236}">
+                <a16:creationId xmlns:a16="http://schemas.microsoft.com/office/drawing/2014/main" id="{092E72CF-88D7-4EDD-A111-A6F4949BA795}"/>
               </a:ext>
             </a:extLst>
           </p:cNvPr>
@@ -10879,8 +10745,8 @@
         </p:nvSpPr>
         <p:spPr>
           <a:xfrm xmlns:a="http://schemas.openxmlformats.org/drawingml/2006/main">
-            <a:off x="4569110" y="2143125"/>
-            <a:ext cx="2571750" cy="285750"/>
+            <a:off x="809625" y="3552825"/>
+            <a:ext cx="7524750" cy="304800"/>
           </a:xfrm>
           <a:prstGeom xmlns:a="http://schemas.openxmlformats.org/drawingml/2006/main" prst="rect">
             <a:avLst/>
@@ -10897,35 +10763,35 @@
           <a:lstStyle xmlns:a="http://schemas.openxmlformats.org/drawingml/2006/main"/>
           <a:p xmlns:a="http://schemas.openxmlformats.org/drawingml/2006/main">
             <a:pPr>
-              <a:defRPr sz="1650" b="1">
-                <a:solidFill>
-                  <a:srgbClr val="AD5018"/>
-                </a:solidFill>
-                <a:latin typeface="Calibri"/>
-                <a:ea typeface="Calibri"/>
-                <a:cs typeface="Calibri"/>
-              </a:defRPr>
-            </a:pPr>
-            <a:r>
-              <a:rPr sz="1650" b="1">
-                <a:solidFill>
-                  <a:srgbClr val="AD5018"/>
-                </a:solidFill>
-                <a:latin typeface="Calibri"/>
-                <a:ea typeface="Calibri"/>
-                <a:cs typeface="Calibri"/>
-              </a:rPr>
-              <a:t>Q ≈ 2 390 var</a:t>
-            </a:r>
-          </a:p>
-        </p:txBody>
-      </p:sp>
-      <p:sp>
-        <p:nvSpPr>
-          <p:cNvPr id="17" name="diagonal-label">
-            <a:extLst xmlns:a="http://schemas.openxmlformats.org/drawingml/2006/main">
-              <a:ext uri="{FF2B5EF4-FFF2-40B4-BE49-F238E27FC236}">
-                <a16:creationId xmlns:a16="http://schemas.microsoft.com/office/drawing/2014/main" id="{5BC1B119-DCDD-4C6A-864F-386795572A72}"/>
+              <a:defRPr sz="1725" b="1">
+                <a:solidFill>
+                  <a:srgbClr val="064F91"/>
+                </a:solidFill>
+                <a:latin typeface="Calibri"/>
+                <a:ea typeface="Calibri"/>
+                <a:cs typeface="Calibri"/>
+              </a:defRPr>
+            </a:pPr>
+            <a:r>
+              <a:rPr sz="1725" b="1">
+                <a:solidFill>
+                  <a:srgbClr val="064F91"/>
+                </a:solidFill>
+                <a:latin typeface="Calibri"/>
+                <a:ea typeface="Calibri"/>
+                <a:cs typeface="Calibri"/>
+              </a:rPr>
+              <a:t>|Q| = √(S² − P²)</a:t>
+            </a:r>
+          </a:p>
+        </p:txBody>
+      </p:sp>
+      <p:sp>
+        <p:nvSpPr>
+          <p:cNvPr id="20" name="section">
+            <a:extLst xmlns:a="http://schemas.openxmlformats.org/drawingml/2006/main">
+              <a:ext uri="{FF2B5EF4-FFF2-40B4-BE49-F238E27FC236}">
+                <a16:creationId xmlns:a16="http://schemas.microsoft.com/office/drawing/2014/main" id="{52A2DC57-E85F-4021-81C3-3D7E97672920}"/>
               </a:ext>
             </a:extLst>
           </p:cNvPr>
@@ -10936,8 +10802,8 @@
         </p:nvSpPr>
         <p:spPr>
           <a:xfrm xmlns:a="http://schemas.openxmlformats.org/drawingml/2006/main">
-            <a:off x="1143000" y="1476375"/>
-            <a:ext cx="2190750" cy="285750"/>
+            <a:off x="1809750" y="6419850"/>
+            <a:ext cx="4191000" cy="266700"/>
           </a:xfrm>
           <a:prstGeom xmlns:a="http://schemas.openxmlformats.org/drawingml/2006/main" prst="rect">
             <a:avLst/>
@@ -10954,35 +10820,35 @@
           <a:lstStyle xmlns:a="http://schemas.openxmlformats.org/drawingml/2006/main"/>
           <a:p xmlns:a="http://schemas.openxmlformats.org/drawingml/2006/main">
             <a:pPr>
-              <a:defRPr sz="1800" b="1">
-                <a:solidFill>
-                  <a:srgbClr val="064F91"/>
-                </a:solidFill>
-                <a:latin typeface="Calibri"/>
-                <a:ea typeface="Calibri"/>
-                <a:cs typeface="Calibri"/>
-              </a:defRPr>
-            </a:pPr>
-            <a:r>
-              <a:rPr sz="1800" b="1">
-                <a:solidFill>
-                  <a:srgbClr val="064F91"/>
-                </a:solidFill>
-                <a:latin typeface="Calibri"/>
-                <a:ea typeface="Calibri"/>
-                <a:cs typeface="Calibri"/>
-              </a:rPr>
-              <a:t>S = 2 760 VA</a:t>
-            </a:r>
-          </a:p>
-        </p:txBody>
-      </p:sp>
-      <p:sp>
-        <p:nvSpPr>
-          <p:cNvPr id="18" name="body">
-            <a:extLst xmlns:a="http://schemas.openxmlformats.org/drawingml/2006/main">
-              <a:ext uri="{FF2B5EF4-FFF2-40B4-BE49-F238E27FC236}">
-                <a16:creationId xmlns:a16="http://schemas.microsoft.com/office/drawing/2014/main" id="{B405FD13-70BC-4256-8763-0CBA213AFAAB}"/>
+              <a:defRPr sz="1275" b="0">
+                <a:solidFill>
+                  <a:srgbClr val="FFFFFF"/>
+                </a:solidFill>
+                <a:latin typeface="Calibri"/>
+                <a:ea typeface="Calibri"/>
+                <a:cs typeface="Calibri"/>
+              </a:defRPr>
+            </a:pPr>
+            <a:r>
+              <a:rPr sz="1275" b="0">
+                <a:solidFill>
+                  <a:srgbClr val="FFFFFF"/>
+                </a:solidFill>
+                <a:latin typeface="Calibri"/>
+                <a:ea typeface="Calibri"/>
+                <a:cs typeface="Calibri"/>
+              </a:rPr>
+              <a:t>Grunddel</a:t>
+            </a:r>
+          </a:p>
+        </p:txBody>
+      </p:sp>
+      <p:sp>
+        <p:nvSpPr>
+          <p:cNvPr id="21" name="page">
+            <a:extLst xmlns:a="http://schemas.openxmlformats.org/drawingml/2006/main">
+              <a:ext uri="{FF2B5EF4-FFF2-40B4-BE49-F238E27FC236}">
+                <a16:creationId xmlns:a16="http://schemas.microsoft.com/office/drawing/2014/main" id="{703FF835-9398-4A00-A11B-295FB1135E66}"/>
               </a:ext>
             </a:extLst>
           </p:cNvPr>
@@ -10993,8 +10859,8 @@
         </p:nvSpPr>
         <p:spPr>
           <a:xfrm xmlns:a="http://schemas.openxmlformats.org/drawingml/2006/main">
-            <a:off x="762000" y="3905250"/>
-            <a:ext cx="7620000" cy="2044750"/>
+            <a:off x="8286750" y="6438900"/>
+            <a:ext cx="428625" cy="285750"/>
           </a:xfrm>
           <a:prstGeom xmlns:a="http://schemas.openxmlformats.org/drawingml/2006/main" prst="rect">
             <a:avLst/>
@@ -11011,281 +10877,53 @@
           <a:lstStyle xmlns:a="http://schemas.openxmlformats.org/drawingml/2006/main"/>
           <a:p xmlns:a="http://schemas.openxmlformats.org/drawingml/2006/main">
             <a:pPr>
-              <a:spcAft>
-                <a:spcPts val="800"/>
-              </a:spcAft>
-              <a:defRPr sz="1650" b="0">
-                <a:solidFill>
-                  <a:srgbClr val="172F43"/>
-                </a:solidFill>
-                <a:latin typeface="Calibri"/>
-                <a:ea typeface="Calibri"/>
-                <a:cs typeface="Calibri"/>
-              </a:defRPr>
-            </a:pPr>
-            <a:r>
-              <a:rPr sz="1600" b="0">
-                <a:solidFill>
-                  <a:srgbClr val="172F43"/>
-                </a:solidFill>
-                <a:latin typeface="Calibri"/>
-                <a:ea typeface="Calibri"/>
-                <a:cs typeface="Calibri"/>
-              </a:rPr>
-              <a:t>Reaktiv effekt Q beskriver energi som går fram och tillbaka mellan källan och spolar eller kondensatorer. Den förbrukas inte, men ger ändå ström i ledningarna.</a:t>
-            </a:r>
-          </a:p>
-          <a:p xmlns:a="http://schemas.openxmlformats.org/drawingml/2006/main">
-            <a:pPr>
-              <a:spcAft>
-                <a:spcPts val="800"/>
-              </a:spcAft>
-              <a:defRPr sz="1650" b="0">
-                <a:solidFill>
-                  <a:srgbClr val="172F43"/>
-                </a:solidFill>
-                <a:latin typeface="Calibri"/>
-                <a:ea typeface="Calibri"/>
-                <a:cs typeface="Calibri"/>
-              </a:defRPr>
-            </a:pPr>
-            <a:r>
-              <a:rPr sz="1600" b="0">
-                <a:solidFill>
-                  <a:srgbClr val="172F43"/>
-                </a:solidFill>
-                <a:latin typeface="Calibri"/>
-                <a:ea typeface="Calibri"/>
-                <a:cs typeface="Calibri"/>
-              </a:rPr>
-              <a:t>För sinus: S² = P² + Q². Därför |Q| = √(S² − P²).</a:t>
-            </a:r>
-          </a:p>
-          <a:p xmlns:a="http://schemas.openxmlformats.org/drawingml/2006/main">
-            <a:pPr>
-              <a:spcAft>
-                <a:spcPts val="800"/>
-              </a:spcAft>
-              <a:defRPr sz="1650" b="0">
-                <a:solidFill>
-                  <a:srgbClr val="172F43"/>
-                </a:solidFill>
-                <a:latin typeface="Calibri"/>
-                <a:ea typeface="Calibri"/>
-                <a:cs typeface="Calibri"/>
-              </a:defRPr>
-            </a:pPr>
-            <a:r>
-              <a:rPr sz="1600" b="0">
-                <a:solidFill>
-                  <a:srgbClr val="172F43"/>
-                </a:solidFill>
-                <a:latin typeface="Calibri"/>
-                <a:ea typeface="Calibri"/>
-                <a:cs typeface="Calibri"/>
-              </a:rPr>
-              <a:t>Exempel: S = 2 760 VA och P = 1 380 W ger |Q| ≈ 2 390,23 var. Enheten var betyder voltampere reaktiv.</a:t>
-            </a:r>
-          </a:p>
-          <a:p xmlns:a="http://schemas.openxmlformats.org/drawingml/2006/main">
-            <a:pPr>
-              <a:spcAft>
-                <a:spcPts val="800"/>
-              </a:spcAft>
-              <a:defRPr sz="1650" b="0">
-                <a:solidFill>
-                  <a:srgbClr val="172F43"/>
-                </a:solidFill>
-                <a:latin typeface="Calibri"/>
-                <a:ea typeface="Calibri"/>
-                <a:cs typeface="Calibri"/>
-              </a:defRPr>
-            </a:pPr>
-            <a:r>
-              <a:rPr sz="1600" b="0">
-                <a:solidFill>
-                  <a:srgbClr val="172F43"/>
-                </a:solidFill>
-                <a:latin typeface="Calibri"/>
-                <a:ea typeface="Calibri"/>
-                <a:cs typeface="Calibri"/>
-              </a:rPr>
-              <a:t>I kursens teckenkonvention är induktiv Q positiv och kapacitiv Q negativ.</a:t>
-            </a:r>
-          </a:p>
-        </p:txBody>
-      </p:sp>
-      <p:sp>
-        <p:nvSpPr>
-          <p:cNvPr id="19" name="formula">
-            <a:extLst xmlns:a="http://schemas.openxmlformats.org/drawingml/2006/main">
-              <a:ext uri="{FF2B5EF4-FFF2-40B4-BE49-F238E27FC236}">
-                <a16:creationId xmlns:a16="http://schemas.microsoft.com/office/drawing/2014/main" id="{092E72CF-88D7-4EDD-A111-A6F4949BA795}"/>
-              </a:ext>
-            </a:extLst>
-          </p:cNvPr>
-          <p:cNvSpPr>
-            <a:spLocks xmlns:a="http://schemas.openxmlformats.org/drawingml/2006/main" noGrp="1"/>
-          </p:cNvSpPr>
+              <a:defRPr sz="1500" b="0">
+                <a:solidFill>
+                  <a:srgbClr val="FFFFFF"/>
+                </a:solidFill>
+                <a:latin typeface="Calibri"/>
+                <a:ea typeface="Calibri"/>
+                <a:cs typeface="Calibri"/>
+              </a:defRPr>
+            </a:pPr>
+            <a:r>
+              <a:rPr sz="1500" b="0">
+                <a:solidFill>
+                  <a:srgbClr val="FFFFFF"/>
+                </a:solidFill>
+                <a:latin typeface="Calibri"/>
+                <a:ea typeface="Calibri"/>
+                <a:cs typeface="Calibri"/>
+              </a:rPr>
+              <a:t>7</a:t>
+            </a:r>
+          </a:p>
+        </p:txBody>
+      </p:sp>
+      <p:pic xmlns:a="http://schemas.openxmlformats.org/drawingml/2006/main" xmlns:r="http://schemas.openxmlformats.org/officeDocument/2006/relationships">
+        <p:nvPicPr>
+          <p:cNvPr id="23" name="figur-kurva-powerTriangle" descr="Reaktiv effekt"/>
+          <p:cNvPicPr>
+            <a:picLocks noChangeAspect="1"/>
+          </p:cNvPicPr>
           <p:nvPr/>
-        </p:nvSpPr>
-        <p:spPr>
-          <a:xfrm xmlns:a="http://schemas.openxmlformats.org/drawingml/2006/main">
-            <a:off x="809625" y="3552825"/>
-            <a:ext cx="7524750" cy="304800"/>
-          </a:xfrm>
-          <a:prstGeom xmlns:a="http://schemas.openxmlformats.org/drawingml/2006/main" prst="rect">
+        </p:nvPicPr>
+        <p:blipFill>
+          <a:blip r:embed="rId5"/>
+          <a:stretch>
+            <a:fillRect/>
+          </a:stretch>
+        </p:blipFill>
+        <p:spPr>
+          <a:xfrm>
+            <a:off x="859536" y="1188720"/>
+            <a:ext cx="7424927" cy="2386583"/>
+          </a:xfrm>
+          <a:prstGeom prst="rect">
             <a:avLst/>
           </a:prstGeom>
-          <a:noFill xmlns:a="http://schemas.openxmlformats.org/drawingml/2006/main"/>
-          <a:ln xmlns:a="http://schemas.openxmlformats.org/drawingml/2006/main" w="0">
-            <a:noFill/>
-          </a:ln>
-        </p:spPr>
-        <p:txBody>
-          <a:bodyPr xmlns:a="http://schemas.openxmlformats.org/drawingml/2006/main" lIns="0" tIns="0" rIns="0" bIns="0" anchor="t">
-            <a:noAutofit/>
-          </a:bodyPr>
-          <a:lstStyle xmlns:a="http://schemas.openxmlformats.org/drawingml/2006/main"/>
-          <a:p xmlns:a="http://schemas.openxmlformats.org/drawingml/2006/main">
-            <a:pPr>
-              <a:defRPr sz="1725" b="1">
-                <a:solidFill>
-                  <a:srgbClr val="064F91"/>
-                </a:solidFill>
-                <a:latin typeface="Calibri"/>
-                <a:ea typeface="Calibri"/>
-                <a:cs typeface="Calibri"/>
-              </a:defRPr>
-            </a:pPr>
-            <a:r>
-              <a:rPr sz="1725" b="1">
-                <a:solidFill>
-                  <a:srgbClr val="064F91"/>
-                </a:solidFill>
-                <a:latin typeface="Calibri"/>
-                <a:ea typeface="Calibri"/>
-                <a:cs typeface="Calibri"/>
-              </a:rPr>
-              <a:t>|Q| = √(S² − P²)</a:t>
-            </a:r>
-          </a:p>
-        </p:txBody>
-      </p:sp>
-      <p:sp>
-        <p:nvSpPr>
-          <p:cNvPr id="20" name="section">
-            <a:extLst xmlns:a="http://schemas.openxmlformats.org/drawingml/2006/main">
-              <a:ext uri="{FF2B5EF4-FFF2-40B4-BE49-F238E27FC236}">
-                <a16:creationId xmlns:a16="http://schemas.microsoft.com/office/drawing/2014/main" id="{52A2DC57-E85F-4021-81C3-3D7E97672920}"/>
-              </a:ext>
-            </a:extLst>
-          </p:cNvPr>
-          <p:cNvSpPr>
-            <a:spLocks xmlns:a="http://schemas.openxmlformats.org/drawingml/2006/main" noGrp="1"/>
-          </p:cNvSpPr>
-          <p:nvPr/>
-        </p:nvSpPr>
-        <p:spPr>
-          <a:xfrm xmlns:a="http://schemas.openxmlformats.org/drawingml/2006/main">
-            <a:off x="1809750" y="6419850"/>
-            <a:ext cx="4191000" cy="266700"/>
-          </a:xfrm>
-          <a:prstGeom xmlns:a="http://schemas.openxmlformats.org/drawingml/2006/main" prst="rect">
-            <a:avLst/>
-          </a:prstGeom>
-          <a:noFill xmlns:a="http://schemas.openxmlformats.org/drawingml/2006/main"/>
-          <a:ln xmlns:a="http://schemas.openxmlformats.org/drawingml/2006/main" w="0">
-            <a:noFill/>
-          </a:ln>
-        </p:spPr>
-        <p:txBody>
-          <a:bodyPr xmlns:a="http://schemas.openxmlformats.org/drawingml/2006/main" lIns="0" tIns="0" rIns="0" bIns="0" anchor="t">
-            <a:noAutofit/>
-          </a:bodyPr>
-          <a:lstStyle xmlns:a="http://schemas.openxmlformats.org/drawingml/2006/main"/>
-          <a:p xmlns:a="http://schemas.openxmlformats.org/drawingml/2006/main">
-            <a:pPr>
-              <a:defRPr sz="1275" b="0">
-                <a:solidFill>
-                  <a:srgbClr val="FFFFFF"/>
-                </a:solidFill>
-                <a:latin typeface="Calibri"/>
-                <a:ea typeface="Calibri"/>
-                <a:cs typeface="Calibri"/>
-              </a:defRPr>
-            </a:pPr>
-            <a:r>
-              <a:rPr sz="1275" b="0">
-                <a:solidFill>
-                  <a:srgbClr val="FFFFFF"/>
-                </a:solidFill>
-                <a:latin typeface="Calibri"/>
-                <a:ea typeface="Calibri"/>
-                <a:cs typeface="Calibri"/>
-              </a:rPr>
-              <a:t>Grunddel</a:t>
-            </a:r>
-          </a:p>
-        </p:txBody>
-      </p:sp>
-      <p:sp>
-        <p:nvSpPr>
-          <p:cNvPr id="21" name="page">
-            <a:extLst xmlns:a="http://schemas.openxmlformats.org/drawingml/2006/main">
-              <a:ext uri="{FF2B5EF4-FFF2-40B4-BE49-F238E27FC236}">
-                <a16:creationId xmlns:a16="http://schemas.microsoft.com/office/drawing/2014/main" id="{703FF835-9398-4A00-A11B-295FB1135E66}"/>
-              </a:ext>
-            </a:extLst>
-          </p:cNvPr>
-          <p:cNvSpPr>
-            <a:spLocks xmlns:a="http://schemas.openxmlformats.org/drawingml/2006/main" noGrp="1"/>
-          </p:cNvSpPr>
-          <p:nvPr/>
-        </p:nvSpPr>
-        <p:spPr>
-          <a:xfrm xmlns:a="http://schemas.openxmlformats.org/drawingml/2006/main">
-            <a:off x="8286750" y="6438900"/>
-            <a:ext cx="428625" cy="285750"/>
-          </a:xfrm>
-          <a:prstGeom xmlns:a="http://schemas.openxmlformats.org/drawingml/2006/main" prst="rect">
-            <a:avLst/>
-          </a:prstGeom>
-          <a:noFill xmlns:a="http://schemas.openxmlformats.org/drawingml/2006/main"/>
-          <a:ln xmlns:a="http://schemas.openxmlformats.org/drawingml/2006/main" w="0">
-            <a:noFill/>
-          </a:ln>
-        </p:spPr>
-        <p:txBody>
-          <a:bodyPr xmlns:a="http://schemas.openxmlformats.org/drawingml/2006/main" lIns="0" tIns="0" rIns="0" bIns="0" anchor="t">
-            <a:noAutofit/>
-          </a:bodyPr>
-          <a:lstStyle xmlns:a="http://schemas.openxmlformats.org/drawingml/2006/main"/>
-          <a:p xmlns:a="http://schemas.openxmlformats.org/drawingml/2006/main">
-            <a:pPr>
-              <a:defRPr sz="1500" b="0">
-                <a:solidFill>
-                  <a:srgbClr val="FFFFFF"/>
-                </a:solidFill>
-                <a:latin typeface="Calibri"/>
-                <a:ea typeface="Calibri"/>
-                <a:cs typeface="Calibri"/>
-              </a:defRPr>
-            </a:pPr>
-            <a:r>
-              <a:rPr sz="1500" b="0">
-                <a:solidFill>
-                  <a:srgbClr val="FFFFFF"/>
-                </a:solidFill>
-                <a:latin typeface="Calibri"/>
-                <a:ea typeface="Calibri"/>
-                <a:cs typeface="Calibri"/>
-              </a:rPr>
-              <a:t>7</a:t>
-            </a:r>
-          </a:p>
-        </p:txBody>
-      </p:sp>
+        </p:spPr>
+      </p:pic>
     </p:spTree>
     <p:extLst>
       <p:ext uri="{BB962C8B-B14F-4D97-AF65-F5344CB8AC3E}">
